--- a/brand/KODA-sales-deck.pptx
+++ b/brand/KODA-sales-deck.pptx
@@ -17,9 +17,10 @@
     <p:sldId id="265" r:id="rId11"/>
     <p:sldId id="266" r:id="rId12"/>
     <p:sldId id="267" r:id="rId13"/>
+    <p:sldId id="268" r:id="rId14"/>
   </p:sldIdLst>
   <p:notesMasterIdLst>
-    <p:notesMasterId r:id="rId14"/>
+    <p:notesMasterId r:id="rId15"/>
   </p:notesMasterIdLst>
   <p:sldSz cx="12191695" cy="6858000"/>
   <p:notesSz cx="6858000" cy="12191695"/>
@@ -801,6 +802,94 @@
             <a:fld id="{F7021451-1387-4CA6-816F-3879F97B5CBC}" type="slidenum">
               <a:rPr lang="en-US"/>
               <a:t>12</a:t>
+            </a:fld>
+            <a:endParaRPr lang="en-US"/>
+          </a:p>
+        </p:txBody>
+      </p:sp>
+    </p:spTree>
+    <p:extLst>
+      <p:ext uri="{BB962C8B-B14F-4D97-AF65-F5344CB8AC3E}">
+        <p14:creationId xmlns:p14="http://schemas.microsoft.com/office/powerpoint/2010/main" val="1024086991"/>
+      </p:ext>
+    </p:extLst>
+  </p:cSld>
+  <p:clrMapOvr>
+    <a:masterClrMapping/>
+  </p:clrMapOvr>
+</p:notes>
+</file>
+
+<file path=ppt/notesSlides/notesSlide13.xml><?xml version="1.0" encoding="utf-8"?>
+<p:notes xmlns:a="http://schemas.openxmlformats.org/drawingml/2006/main" xmlns:r="http://schemas.openxmlformats.org/officeDocument/2006/relationships" xmlns:p="http://schemas.openxmlformats.org/presentationml/2006/main">
+  <p:cSld>
+    <p:spTree>
+      <p:nvGrpSpPr>
+        <p:cNvPr id="1" name=""/>
+        <p:cNvGrpSpPr/>
+        <p:nvPr/>
+      </p:nvGrpSpPr>
+      <p:grpSpPr>
+        <a:xfrm>
+          <a:off x="0" y="0"/>
+          <a:ext cx="0" cy="0"/>
+          <a:chOff x="0" y="0"/>
+          <a:chExt cx="0" cy="0"/>
+        </a:xfrm>
+      </p:grpSpPr>
+      <p:sp>
+        <p:nvSpPr>
+          <p:cNvPr id="2" name="Slide Image Placeholder 1"/>
+          <p:cNvSpPr>
+            <a:spLocks noGrp="1" noRot="1" noChangeAspect="1"/>
+          </p:cNvSpPr>
+          <p:nvPr>
+            <p:ph type="sldImg"/>
+          </p:nvPr>
+        </p:nvSpPr>
+        <p:spPr/>
+      </p:sp>
+      <p:sp>
+        <p:nvSpPr>
+          <p:cNvPr id="3" name="Notes Placeholder 2"/>
+          <p:cNvSpPr>
+            <a:spLocks noGrp="1"/>
+          </p:cNvSpPr>
+          <p:nvPr>
+            <p:ph type="body" idx="1"/>
+          </p:nvPr>
+        </p:nvSpPr>
+        <p:spPr/>
+        <p:txBody>
+          <a:bodyPr/>
+          <a:lstStyle/>
+          <a:p>
+            <a:r>
+              <a:rPr lang="en-US" dirty="0"/>
+              <a:t/>
+            </a:r>
+            <a:endParaRPr lang="en-US" dirty="0"/>
+          </a:p>
+        </p:txBody>
+      </p:sp>
+      <p:sp>
+        <p:nvSpPr>
+          <p:cNvPr id="4" name="Slide Number Placeholder 3"/>
+          <p:cNvSpPr>
+            <a:spLocks noGrp="1"/>
+          </p:cNvSpPr>
+          <p:nvPr>
+            <p:ph type="sldNum" sz="quarter" idx="10"/>
+          </p:nvPr>
+        </p:nvSpPr>
+        <p:spPr/>
+        <p:txBody>
+          <a:bodyPr/>
+          <a:lstStyle/>
+          <a:p>
+            <a:fld id="{F7021451-1387-4CA6-816F-3879F97B5CBC}" type="slidenum">
+              <a:rPr lang="en-US"/>
+              <a:t>13</a:t>
             </a:fld>
             <a:endParaRPr lang="en-US"/>
           </a:p>
@@ -1863,7 +1952,7 @@
         <p:spPr>
           <a:xfrm>
             <a:off x="566928" y="868680"/>
-            <a:ext cx="7315200" cy="274320"/>
+            <a:ext cx="9144000" cy="274320"/>
           </a:xfrm>
           <a:prstGeom prst="rect">
             <a:avLst/>
@@ -2003,7 +2092,7 @@
         <p:spPr>
           <a:xfrm>
             <a:off x="566928" y="4709160"/>
-            <a:ext cx="8778240" cy="914400"/>
+            <a:ext cx="9326880" cy="914400"/>
           </a:xfrm>
           <a:prstGeom prst="rect">
             <a:avLst/>
@@ -2030,7 +2119,7 @@
                 <a:ea typeface="Calibri" pitchFamily="34" charset="-122"/>
                 <a:cs typeface="Calibri" pitchFamily="34" charset="-120"/>
               </a:rPr>
-              <a:t>Verify any mobile-money payment against the operator’s own confirmation SMS. No telco contract. No code to paste. A verdict in seconds.</a:t>
+              <a:t>Stop losing money to fake payment screenshots. Verify every mobile-money payment against the operator’s own confirmation SMS — in seconds. Free to start.</a:t>
             </a:r>
             <a:endParaRPr lang="en-US" sz="1700" dirty="0"/>
           </a:p>
@@ -2130,7 +2219,7 @@
         <p:spPr>
           <a:xfrm>
             <a:off x="566928" y="640080"/>
-            <a:ext cx="7315200" cy="274320"/>
+            <a:ext cx="9144000" cy="274320"/>
           </a:xfrm>
           <a:prstGeom prst="rect">
             <a:avLst/>
@@ -2154,7 +2243,7 @@
                 <a:ea typeface="Courier New" pitchFamily="34" charset="-122"/>
                 <a:cs typeface="Courier New" pitchFamily="34" charset="-120"/>
               </a:rPr>
-              <a:t>WHO IT’S FOR</a:t>
+              <a:t>GLOBAL BY CONSTRUCTION</a:t>
             </a:r>
             <a:endParaRPr lang="en-US" sz="1150" dirty="0"/>
           </a:p>
@@ -2185,7 +2274,7 @@
               <a:buNone/>
             </a:pPr>
             <a:r>
-              <a:rPr lang="en-US" sz="3200" b="1" dirty="0">
+              <a:rPr lang="en-US" sz="3000" b="1" dirty="0">
                 <a:solidFill>
                   <a:srgbClr val="E9E4D5"/>
                 </a:solidFill>
@@ -2193,9 +2282,9 @@
                 <a:ea typeface="Arial" pitchFamily="34" charset="-122"/>
                 <a:cs typeface="Arial" pitchFamily="34" charset="-120"/>
               </a:rPr>
-              <a:t>One truth layer, every kind of seller.</a:t>
-            </a:r>
-            <a:endParaRPr lang="en-US" sz="3200" dirty="0"/>
+              <a:t>Coverage is a parsing map — not a pile of telco deals.</a:t>
+            </a:r>
+            <a:endParaRPr lang="en-US" sz="3000" dirty="0"/>
           </a:p>
         </p:txBody>
       </p:sp>
@@ -2208,11 +2297,11 @@
         <p:spPr>
           <a:xfrm>
             <a:off x="566928" y="2148840"/>
-            <a:ext cx="2558720" cy="3246120"/>
+            <a:ext cx="2558720" cy="1737360"/>
           </a:xfrm>
           <a:prstGeom prst="roundRect">
             <a:avLst>
-              <a:gd name="adj" fmla="val 3931"/>
+              <a:gd name="adj" fmla="val 5789"/>
             </a:avLst>
           </a:prstGeom>
           <a:solidFill>
@@ -2235,123 +2324,69 @@
       </p:sp>
       <p:sp>
         <p:nvSpPr>
-          <p:cNvPr id="5" name="Shape 3"/>
-          <p:cNvSpPr/>
-          <p:nvPr/>
-        </p:nvSpPr>
-        <p:spPr>
-          <a:xfrm>
-            <a:off x="822960" y="2441448"/>
-            <a:ext cx="640080" cy="640080"/>
-          </a:xfrm>
-          <a:prstGeom prst="roundRect">
-            <a:avLst>
-              <a:gd name="adj" fmla="val 14286"/>
-            </a:avLst>
-          </a:prstGeom>
-          <a:solidFill>
-            <a:srgbClr val="17392E"/>
-          </a:solidFill>
-          <a:ln w="12700">
-            <a:solidFill>
-              <a:srgbClr val="E8A11F"/>
-            </a:solidFill>
-            <a:prstDash val="solid"/>
-          </a:ln>
-        </p:spPr>
-      </p:sp>
-      <p:pic>
-        <p:nvPicPr>
-          <p:cNvPr id="6" name="Image 0" descr="preencoded.png">    </p:cNvPr>
-          <p:cNvPicPr>
-            <a:picLocks noChangeAspect="1"/>
-          </p:cNvPicPr>
-          <p:nvPr/>
-        </p:nvPicPr>
-        <p:blipFill>
-          <a:blip r:embed="rId1"/>
-          <a:stretch>
-            <a:fillRect/>
-          </a:stretch>
-        </p:blipFill>
-        <p:spPr>
-          <a:xfrm>
-            <a:off x="950976" y="2569464"/>
-            <a:ext cx="384048" cy="384048"/>
-          </a:xfrm>
-          <a:prstGeom prst="rect">
-            <a:avLst/>
-          </a:prstGeom>
-        </p:spPr>
-      </p:pic>
-      <p:sp>
-        <p:nvSpPr>
-          <p:cNvPr id="7" name="Text 4"/>
-          <p:cNvSpPr txBox="1"/>
-          <p:nvPr/>
-        </p:nvSpPr>
-        <p:spPr>
-          <a:xfrm>
-            <a:off x="804672" y="3291840"/>
-            <a:ext cx="2101520" cy="685800"/>
-          </a:xfrm>
-          <a:prstGeom prst="rect">
-            <a:avLst/>
-          </a:prstGeom>
-          <a:noFill/>
-          <a:ln/>
-        </p:spPr>
-        <p:txBody>
-          <a:bodyPr wrap="square" lIns="0" tIns="0" rIns="0" bIns="0" rtlCol="0" anchor="ctr"/>
-          <a:lstStyle/>
-          <a:p>
-            <a:pPr indent="0" marL="0">
-              <a:buNone/>
-            </a:pPr>
-            <a:r>
-              <a:rPr lang="en-US" sz="1550" b="1" dirty="0">
-                <a:solidFill>
-                  <a:srgbClr val="F2B944"/>
+          <p:cNvPr id="5" name="Text 3"/>
+          <p:cNvSpPr txBox="1"/>
+          <p:nvPr/>
+        </p:nvSpPr>
+        <p:spPr>
+          <a:xfrm>
+            <a:off x="658368" y="2377440"/>
+            <a:ext cx="2375840" cy="868680"/>
+          </a:xfrm>
+          <a:prstGeom prst="rect">
+            <a:avLst/>
+          </a:prstGeom>
+          <a:noFill/>
+          <a:ln/>
+        </p:spPr>
+        <p:txBody>
+          <a:bodyPr wrap="square" lIns="0" tIns="0" rIns="0" bIns="0" rtlCol="0" anchor="ctr"/>
+          <a:lstStyle/>
+          <a:p>
+            <a:pPr algn="ctr" indent="0" marL="0">
+              <a:buNone/>
+            </a:pPr>
+            <a:r>
+              <a:rPr lang="en-US" sz="6000" b="1" dirty="0">
+                <a:solidFill>
+                  <a:srgbClr val="E8A11F"/>
                 </a:solidFill>
                 <a:latin typeface="Arial" pitchFamily="34" charset="0"/>
                 <a:ea typeface="Arial" pitchFamily="34" charset="-122"/>
                 <a:cs typeface="Arial" pitchFamily="34" charset="-120"/>
               </a:rPr>
-              <a:t>Merchants &amp; SMEs</a:t>
-            </a:r>
-            <a:endParaRPr lang="en-US" sz="1550" dirty="0"/>
-          </a:p>
-        </p:txBody>
-      </p:sp>
-      <p:sp>
-        <p:nvSpPr>
-          <p:cNvPr id="8" name="Text 5"/>
-          <p:cNvSpPr txBox="1"/>
-          <p:nvPr/>
-        </p:nvSpPr>
-        <p:spPr>
-          <a:xfrm>
-            <a:off x="804672" y="3931920"/>
-            <a:ext cx="2101520" cy="1371600"/>
-          </a:xfrm>
-          <a:prstGeom prst="rect">
-            <a:avLst/>
-          </a:prstGeom>
-          <a:noFill/>
-          <a:ln/>
-        </p:spPr>
-        <p:txBody>
-          <a:bodyPr wrap="square" lIns="0" tIns="0" rIns="0" bIns="0" rtlCol="0" anchor="ctr"/>
-          <a:lstStyle/>
-          <a:p>
-            <a:pPr indent="0" marL="0">
-              <a:lnSpc>
-                <a:spcPct val="112000"/>
-              </a:lnSpc>
-              <a:buNone/>
-            </a:pPr>
-            <a:r>
-              <a:rPr lang="en-US" sz="1230" dirty="0">
+              <a:t>235</a:t>
+            </a:r>
+            <a:endParaRPr lang="en-US" sz="6000" dirty="0"/>
+          </a:p>
+        </p:txBody>
+      </p:sp>
+      <p:sp>
+        <p:nvSpPr>
+          <p:cNvPr id="6" name="Text 4"/>
+          <p:cNvSpPr txBox="1"/>
+          <p:nvPr/>
+        </p:nvSpPr>
+        <p:spPr>
+          <a:xfrm>
+            <a:off x="658368" y="3319272"/>
+            <a:ext cx="2375840" cy="457200"/>
+          </a:xfrm>
+          <a:prstGeom prst="rect">
+            <a:avLst/>
+          </a:prstGeom>
+          <a:noFill/>
+          <a:ln/>
+        </p:spPr>
+        <p:txBody>
+          <a:bodyPr wrap="square" lIns="0" tIns="0" rIns="0" bIns="0" rtlCol="0" anchor="ctr"/>
+          <a:lstStyle/>
+          <a:p>
+            <a:pPr algn="ctr" indent="0" marL="0">
+              <a:buNone/>
+            </a:pPr>
+            <a:r>
+              <a:rPr lang="en-US" sz="1250" dirty="0">
                 <a:solidFill>
                   <a:srgbClr val="9BA79B"/>
                 </a:solidFill>
@@ -2359,26 +2394,26 @@
                 <a:ea typeface="Calibri" pitchFamily="34" charset="-122"/>
                 <a:cs typeface="Calibri" pitchFamily="34" charset="-120"/>
               </a:rPr>
-              <a:t>Restaurants, retail, transport, lodging — verify before you hand over goods.</a:t>
-            </a:r>
-            <a:endParaRPr lang="en-US" sz="1230" dirty="0"/>
-          </a:p>
-        </p:txBody>
-      </p:sp>
-      <p:sp>
-        <p:nvSpPr>
-          <p:cNvPr id="9" name="Shape 6"/>
+              <a:t>operators in the registry</a:t>
+            </a:r>
+            <a:endParaRPr lang="en-US" sz="1250" dirty="0"/>
+          </a:p>
+        </p:txBody>
+      </p:sp>
+      <p:sp>
+        <p:nvSpPr>
+          <p:cNvPr id="7" name="Shape 5"/>
           <p:cNvSpPr/>
           <p:nvPr/>
         </p:nvSpPr>
         <p:spPr>
           <a:xfrm>
             <a:off x="3399968" y="2148840"/>
-            <a:ext cx="2558720" cy="3246120"/>
+            <a:ext cx="2558720" cy="1737360"/>
           </a:xfrm>
           <a:prstGeom prst="roundRect">
             <a:avLst>
-              <a:gd name="adj" fmla="val 3931"/>
+              <a:gd name="adj" fmla="val 5789"/>
             </a:avLst>
           </a:prstGeom>
           <a:solidFill>
@@ -2401,123 +2436,69 @@
       </p:sp>
       <p:sp>
         <p:nvSpPr>
-          <p:cNvPr id="10" name="Shape 7"/>
-          <p:cNvSpPr/>
-          <p:nvPr/>
-        </p:nvSpPr>
-        <p:spPr>
-          <a:xfrm>
-            <a:off x="3656000" y="2441448"/>
-            <a:ext cx="640080" cy="640080"/>
-          </a:xfrm>
-          <a:prstGeom prst="roundRect">
-            <a:avLst>
-              <a:gd name="adj" fmla="val 14286"/>
-            </a:avLst>
-          </a:prstGeom>
-          <a:solidFill>
-            <a:srgbClr val="17392E"/>
-          </a:solidFill>
-          <a:ln w="12700">
-            <a:solidFill>
-              <a:srgbClr val="E8A11F"/>
-            </a:solidFill>
-            <a:prstDash val="solid"/>
-          </a:ln>
-        </p:spPr>
-      </p:sp>
-      <p:pic>
-        <p:nvPicPr>
-          <p:cNvPr id="11" name="Image 1" descr="preencoded.png">    </p:cNvPr>
-          <p:cNvPicPr>
-            <a:picLocks noChangeAspect="1"/>
-          </p:cNvPicPr>
-          <p:nvPr/>
-        </p:nvPicPr>
-        <p:blipFill>
-          <a:blip r:embed="rId2"/>
-          <a:stretch>
-            <a:fillRect/>
-          </a:stretch>
-        </p:blipFill>
-        <p:spPr>
-          <a:xfrm>
-            <a:off x="3784016" y="2569464"/>
-            <a:ext cx="384048" cy="384048"/>
-          </a:xfrm>
-          <a:prstGeom prst="rect">
-            <a:avLst/>
-          </a:prstGeom>
-        </p:spPr>
-      </p:pic>
-      <p:sp>
-        <p:nvSpPr>
-          <p:cNvPr id="12" name="Text 8"/>
-          <p:cNvSpPr txBox="1"/>
-          <p:nvPr/>
-        </p:nvSpPr>
-        <p:spPr>
-          <a:xfrm>
-            <a:off x="3637712" y="3291840"/>
-            <a:ext cx="2101520" cy="685800"/>
-          </a:xfrm>
-          <a:prstGeom prst="rect">
-            <a:avLst/>
-          </a:prstGeom>
-          <a:noFill/>
-          <a:ln/>
-        </p:spPr>
-        <p:txBody>
-          <a:bodyPr wrap="square" lIns="0" tIns="0" rIns="0" bIns="0" rtlCol="0" anchor="ctr"/>
-          <a:lstStyle/>
-          <a:p>
-            <a:pPr indent="0" marL="0">
-              <a:buNone/>
-            </a:pPr>
-            <a:r>
-              <a:rPr lang="en-US" sz="1550" b="1" dirty="0">
-                <a:solidFill>
-                  <a:srgbClr val="F2B944"/>
+          <p:cNvPr id="8" name="Text 6"/>
+          <p:cNvSpPr txBox="1"/>
+          <p:nvPr/>
+        </p:nvSpPr>
+        <p:spPr>
+          <a:xfrm>
+            <a:off x="3491408" y="2377440"/>
+            <a:ext cx="2375840" cy="868680"/>
+          </a:xfrm>
+          <a:prstGeom prst="rect">
+            <a:avLst/>
+          </a:prstGeom>
+          <a:noFill/>
+          <a:ln/>
+        </p:spPr>
+        <p:txBody>
+          <a:bodyPr wrap="square" lIns="0" tIns="0" rIns="0" bIns="0" rtlCol="0" anchor="ctr"/>
+          <a:lstStyle/>
+          <a:p>
+            <a:pPr algn="ctr" indent="0" marL="0">
+              <a:buNone/>
+            </a:pPr>
+            <a:r>
+              <a:rPr lang="en-US" sz="6000" b="1" dirty="0">
+                <a:solidFill>
+                  <a:srgbClr val="E8A11F"/>
                 </a:solidFill>
                 <a:latin typeface="Arial" pitchFamily="34" charset="0"/>
                 <a:ea typeface="Arial" pitchFamily="34" charset="-122"/>
                 <a:cs typeface="Arial" pitchFamily="34" charset="-120"/>
               </a:rPr>
-              <a:t>Marketplaces &amp; platforms</a:t>
-            </a:r>
-            <a:endParaRPr lang="en-US" sz="1550" dirty="0"/>
-          </a:p>
-        </p:txBody>
-      </p:sp>
-      <p:sp>
-        <p:nvSpPr>
-          <p:cNvPr id="13" name="Text 9"/>
-          <p:cNvSpPr txBox="1"/>
-          <p:nvPr/>
-        </p:nvSpPr>
-        <p:spPr>
-          <a:xfrm>
-            <a:off x="3637712" y="3931920"/>
-            <a:ext cx="2101520" cy="1371600"/>
-          </a:xfrm>
-          <a:prstGeom prst="rect">
-            <a:avLst/>
-          </a:prstGeom>
-          <a:noFill/>
-          <a:ln/>
-        </p:spPr>
-        <p:txBody>
-          <a:bodyPr wrap="square" lIns="0" tIns="0" rIns="0" bIns="0" rtlCol="0" anchor="ctr"/>
-          <a:lstStyle/>
-          <a:p>
-            <a:pPr indent="0" marL="0">
-              <a:lnSpc>
-                <a:spcPct val="112000"/>
-              </a:lnSpc>
-              <a:buNone/>
-            </a:pPr>
-            <a:r>
-              <a:rPr lang="en-US" sz="1230" dirty="0">
+              <a:t>95</a:t>
+            </a:r>
+            <a:endParaRPr lang="en-US" sz="6000" dirty="0"/>
+          </a:p>
+        </p:txBody>
+      </p:sp>
+      <p:sp>
+        <p:nvSpPr>
+          <p:cNvPr id="9" name="Text 7"/>
+          <p:cNvSpPr txBox="1"/>
+          <p:nvPr/>
+        </p:nvSpPr>
+        <p:spPr>
+          <a:xfrm>
+            <a:off x="3491408" y="3319272"/>
+            <a:ext cx="2375840" cy="457200"/>
+          </a:xfrm>
+          <a:prstGeom prst="rect">
+            <a:avLst/>
+          </a:prstGeom>
+          <a:noFill/>
+          <a:ln/>
+        </p:spPr>
+        <p:txBody>
+          <a:bodyPr wrap="square" lIns="0" tIns="0" rIns="0" bIns="0" rtlCol="0" anchor="ctr"/>
+          <a:lstStyle/>
+          <a:p>
+            <a:pPr algn="ctr" indent="0" marL="0">
+              <a:buNone/>
+            </a:pPr>
+            <a:r>
+              <a:rPr lang="en-US" sz="1250" dirty="0">
                 <a:solidFill>
                   <a:srgbClr val="9BA79B"/>
                 </a:solidFill>
@@ -2525,26 +2506,26 @@
                 <a:ea typeface="Calibri" pitchFamily="34" charset="-122"/>
                 <a:cs typeface="Calibri" pitchFamily="34" charset="-120"/>
               </a:rPr>
-              <a:t>Sub-merchant API, scoped keys, trust scores — onboard thousands at wholesale.</a:t>
-            </a:r>
-            <a:endParaRPr lang="en-US" sz="1230" dirty="0"/>
-          </a:p>
-        </p:txBody>
-      </p:sp>
-      <p:sp>
-        <p:nvSpPr>
-          <p:cNvPr id="14" name="Shape 10"/>
+              <a:t>countries</a:t>
+            </a:r>
+            <a:endParaRPr lang="en-US" sz="1250" dirty="0"/>
+          </a:p>
+        </p:txBody>
+      </p:sp>
+      <p:sp>
+        <p:nvSpPr>
+          <p:cNvPr id="10" name="Shape 8"/>
           <p:cNvSpPr/>
           <p:nvPr/>
         </p:nvSpPr>
         <p:spPr>
           <a:xfrm>
             <a:off x="6233008" y="2148840"/>
-            <a:ext cx="2558720" cy="3246120"/>
+            <a:ext cx="2558720" cy="1737360"/>
           </a:xfrm>
           <a:prstGeom prst="roundRect">
             <a:avLst>
-              <a:gd name="adj" fmla="val 3931"/>
+              <a:gd name="adj" fmla="val 5789"/>
             </a:avLst>
           </a:prstGeom>
           <a:solidFill>
@@ -2567,123 +2548,69 @@
       </p:sp>
       <p:sp>
         <p:nvSpPr>
-          <p:cNvPr id="15" name="Shape 11"/>
-          <p:cNvSpPr/>
-          <p:nvPr/>
-        </p:nvSpPr>
-        <p:spPr>
-          <a:xfrm>
-            <a:off x="6489040" y="2441448"/>
-            <a:ext cx="640080" cy="640080"/>
-          </a:xfrm>
-          <a:prstGeom prst="roundRect">
-            <a:avLst>
-              <a:gd name="adj" fmla="val 14286"/>
-            </a:avLst>
-          </a:prstGeom>
-          <a:solidFill>
-            <a:srgbClr val="17392E"/>
-          </a:solidFill>
-          <a:ln w="12700">
-            <a:solidFill>
-              <a:srgbClr val="E8A11F"/>
-            </a:solidFill>
-            <a:prstDash val="solid"/>
-          </a:ln>
-        </p:spPr>
-      </p:sp>
-      <p:pic>
-        <p:nvPicPr>
-          <p:cNvPr id="16" name="Image 2" descr="preencoded.png">    </p:cNvPr>
-          <p:cNvPicPr>
-            <a:picLocks noChangeAspect="1"/>
-          </p:cNvPicPr>
-          <p:nvPr/>
-        </p:nvPicPr>
-        <p:blipFill>
-          <a:blip r:embed="rId3"/>
-          <a:stretch>
-            <a:fillRect/>
-          </a:stretch>
-        </p:blipFill>
-        <p:spPr>
-          <a:xfrm>
-            <a:off x="6617056" y="2569464"/>
-            <a:ext cx="384048" cy="384048"/>
-          </a:xfrm>
-          <a:prstGeom prst="rect">
-            <a:avLst/>
-          </a:prstGeom>
-        </p:spPr>
-      </p:pic>
-      <p:sp>
-        <p:nvSpPr>
-          <p:cNvPr id="17" name="Text 12"/>
-          <p:cNvSpPr txBox="1"/>
-          <p:nvPr/>
-        </p:nvSpPr>
-        <p:spPr>
-          <a:xfrm>
-            <a:off x="6470752" y="3291840"/>
-            <a:ext cx="2101520" cy="685800"/>
-          </a:xfrm>
-          <a:prstGeom prst="rect">
-            <a:avLst/>
-          </a:prstGeom>
-          <a:noFill/>
-          <a:ln/>
-        </p:spPr>
-        <p:txBody>
-          <a:bodyPr wrap="square" lIns="0" tIns="0" rIns="0" bIns="0" rtlCol="0" anchor="ctr"/>
-          <a:lstStyle/>
-          <a:p>
-            <a:pPr indent="0" marL="0">
-              <a:buNone/>
-            </a:pPr>
-            <a:r>
-              <a:rPr lang="en-US" sz="1550" b="1" dirty="0">
-                <a:solidFill>
-                  <a:srgbClr val="F2B944"/>
+          <p:cNvPr id="11" name="Text 9"/>
+          <p:cNvSpPr txBox="1"/>
+          <p:nvPr/>
+        </p:nvSpPr>
+        <p:spPr>
+          <a:xfrm>
+            <a:off x="6324448" y="2377440"/>
+            <a:ext cx="2375840" cy="868680"/>
+          </a:xfrm>
+          <a:prstGeom prst="rect">
+            <a:avLst/>
+          </a:prstGeom>
+          <a:noFill/>
+          <a:ln/>
+        </p:spPr>
+        <p:txBody>
+          <a:bodyPr wrap="square" lIns="0" tIns="0" rIns="0" bIns="0" rtlCol="0" anchor="ctr"/>
+          <a:lstStyle/>
+          <a:p>
+            <a:pPr algn="ctr" indent="0" marL="0">
+              <a:buNone/>
+            </a:pPr>
+            <a:r>
+              <a:rPr lang="en-US" sz="6000" b="1" dirty="0">
+                <a:solidFill>
+                  <a:srgbClr val="E8A11F"/>
                 </a:solidFill>
                 <a:latin typeface="Arial" pitchFamily="34" charset="0"/>
                 <a:ea typeface="Arial" pitchFamily="34" charset="-122"/>
                 <a:cs typeface="Arial" pitchFamily="34" charset="-120"/>
               </a:rPr>
-              <a:t>Distributors &amp; resellers</a:t>
-            </a:r>
-            <a:endParaRPr lang="en-US" sz="1550" dirty="0"/>
-          </a:p>
-        </p:txBody>
-      </p:sp>
-      <p:sp>
-        <p:nvSpPr>
-          <p:cNvPr id="18" name="Text 13"/>
-          <p:cNvSpPr txBox="1"/>
-          <p:nvPr/>
-        </p:nvSpPr>
-        <p:spPr>
-          <a:xfrm>
-            <a:off x="6470752" y="3931920"/>
-            <a:ext cx="2101520" cy="1371600"/>
-          </a:xfrm>
-          <a:prstGeom prst="rect">
-            <a:avLst/>
-          </a:prstGeom>
-          <a:noFill/>
-          <a:ln/>
-        </p:spPr>
-        <p:txBody>
-          <a:bodyPr wrap="square" lIns="0" tIns="0" rIns="0" bIns="0" rtlCol="0" anchor="ctr"/>
-          <a:lstStyle/>
-          <a:p>
-            <a:pPr indent="0" marL="0">
-              <a:lnSpc>
-                <a:spcPct val="112000"/>
-              </a:lnSpc>
-              <a:buNone/>
-            </a:pPr>
-            <a:r>
-              <a:rPr lang="en-US" sz="1230" dirty="0">
+              <a:t>12</a:t>
+            </a:r>
+            <a:endParaRPr lang="en-US" sz="6000" dirty="0"/>
+          </a:p>
+        </p:txBody>
+      </p:sp>
+      <p:sp>
+        <p:nvSpPr>
+          <p:cNvPr id="12" name="Text 10"/>
+          <p:cNvSpPr txBox="1"/>
+          <p:nvPr/>
+        </p:nvSpPr>
+        <p:spPr>
+          <a:xfrm>
+            <a:off x="6324448" y="3319272"/>
+            <a:ext cx="2375840" cy="457200"/>
+          </a:xfrm>
+          <a:prstGeom prst="rect">
+            <a:avLst/>
+          </a:prstGeom>
+          <a:noFill/>
+          <a:ln/>
+        </p:spPr>
+        <p:txBody>
+          <a:bodyPr wrap="square" lIns="0" tIns="0" rIns="0" bIns="0" rtlCol="0" anchor="ctr"/>
+          <a:lstStyle/>
+          <a:p>
+            <a:pPr algn="ctr" indent="0" marL="0">
+              <a:buNone/>
+            </a:pPr>
+            <a:r>
+              <a:rPr lang="en-US" sz="1250" dirty="0">
                 <a:solidFill>
                   <a:srgbClr val="9BA79B"/>
                 </a:solidFill>
@@ -2691,26 +2618,26 @@
                 <a:ea typeface="Calibri" pitchFamily="34" charset="-122"/>
                 <a:cs typeface="Calibri" pitchFamily="34" charset="-120"/>
               </a:rPr>
-              <a:t>Wholesale ACU, float-escrow rails and PIN vouchers to resell KODA downstream.</a:t>
-            </a:r>
-            <a:endParaRPr lang="en-US" sz="1230" dirty="0"/>
-          </a:p>
-        </p:txBody>
-      </p:sp>
-      <p:sp>
-        <p:nvSpPr>
-          <p:cNvPr id="19" name="Shape 14"/>
+              <a:t>world regions</a:t>
+            </a:r>
+            <a:endParaRPr lang="en-US" sz="1250" dirty="0"/>
+          </a:p>
+        </p:txBody>
+      </p:sp>
+      <p:sp>
+        <p:nvSpPr>
+          <p:cNvPr id="13" name="Shape 11"/>
           <p:cNvSpPr/>
           <p:nvPr/>
         </p:nvSpPr>
         <p:spPr>
           <a:xfrm>
             <a:off x="9066047" y="2148840"/>
-            <a:ext cx="2558720" cy="3246120"/>
+            <a:ext cx="2558720" cy="1737360"/>
           </a:xfrm>
           <a:prstGeom prst="roundRect">
             <a:avLst>
-              <a:gd name="adj" fmla="val 3931"/>
+              <a:gd name="adj" fmla="val 5789"/>
             </a:avLst>
           </a:prstGeom>
           <a:solidFill>
@@ -2733,104 +2660,126 @@
       </p:sp>
       <p:sp>
         <p:nvSpPr>
-          <p:cNvPr id="20" name="Shape 15"/>
+          <p:cNvPr id="14" name="Text 12"/>
+          <p:cNvSpPr txBox="1"/>
+          <p:nvPr/>
+        </p:nvSpPr>
+        <p:spPr>
+          <a:xfrm>
+            <a:off x="9157487" y="2377440"/>
+            <a:ext cx="2375840" cy="868680"/>
+          </a:xfrm>
+          <a:prstGeom prst="rect">
+            <a:avLst/>
+          </a:prstGeom>
+          <a:noFill/>
+          <a:ln/>
+        </p:spPr>
+        <p:txBody>
+          <a:bodyPr wrap="square" lIns="0" tIns="0" rIns="0" bIns="0" rtlCol="0" anchor="ctr"/>
+          <a:lstStyle/>
+          <a:p>
+            <a:pPr algn="ctr" indent="0" marL="0">
+              <a:buNone/>
+            </a:pPr>
+            <a:r>
+              <a:rPr lang="en-US" sz="6000" b="1" dirty="0">
+                <a:solidFill>
+                  <a:srgbClr val="E8A11F"/>
+                </a:solidFill>
+                <a:latin typeface="Arial" pitchFamily="34" charset="0"/>
+                <a:ea typeface="Arial" pitchFamily="34" charset="-122"/>
+                <a:cs typeface="Arial" pitchFamily="34" charset="-120"/>
+              </a:rPr>
+              <a:t>111</a:t>
+            </a:r>
+            <a:endParaRPr lang="en-US" sz="6000" dirty="0"/>
+          </a:p>
+        </p:txBody>
+      </p:sp>
+      <p:sp>
+        <p:nvSpPr>
+          <p:cNvPr id="15" name="Text 13"/>
+          <p:cNvSpPr txBox="1"/>
+          <p:nvPr/>
+        </p:nvSpPr>
+        <p:spPr>
+          <a:xfrm>
+            <a:off x="9157487" y="3319272"/>
+            <a:ext cx="2375840" cy="457200"/>
+          </a:xfrm>
+          <a:prstGeom prst="rect">
+            <a:avLst/>
+          </a:prstGeom>
+          <a:noFill/>
+          <a:ln/>
+        </p:spPr>
+        <p:txBody>
+          <a:bodyPr wrap="square" lIns="0" tIns="0" rIns="0" bIns="0" rtlCol="0" anchor="ctr"/>
+          <a:lstStyle/>
+          <a:p>
+            <a:pPr algn="ctr" indent="0" marL="0">
+              <a:buNone/>
+            </a:pPr>
+            <a:r>
+              <a:rPr lang="en-US" sz="1250" dirty="0">
+                <a:solidFill>
+                  <a:srgbClr val="9BA79B"/>
+                </a:solidFill>
+                <a:latin typeface="Calibri" pitchFamily="34" charset="0"/>
+                <a:ea typeface="Calibri" pitchFamily="34" charset="-122"/>
+                <a:cs typeface="Calibri" pitchFamily="34" charset="-120"/>
+              </a:rPr>
+              <a:t>template families</a:t>
+            </a:r>
+            <a:endParaRPr lang="en-US" sz="1250" dirty="0"/>
+          </a:p>
+        </p:txBody>
+      </p:sp>
+      <p:sp>
+        <p:nvSpPr>
+          <p:cNvPr id="16" name="Shape 14"/>
           <p:cNvSpPr/>
           <p:nvPr/>
         </p:nvSpPr>
         <p:spPr>
           <a:xfrm>
-            <a:off x="9322079" y="2441448"/>
-            <a:ext cx="640080" cy="640080"/>
+            <a:off x="566928" y="4160520"/>
+            <a:ext cx="11057839" cy="1600200"/>
           </a:xfrm>
           <a:prstGeom prst="roundRect">
             <a:avLst>
-              <a:gd name="adj" fmla="val 14286"/>
+              <a:gd name="adj" fmla="val 6286"/>
             </a:avLst>
           </a:prstGeom>
           <a:solidFill>
-            <a:srgbClr val="17392E"/>
+            <a:srgbClr val="0C231C"/>
           </a:solidFill>
           <a:ln w="12700">
             <a:solidFill>
-              <a:srgbClr val="E8A11F"/>
+              <a:srgbClr val="2A4034"/>
             </a:solidFill>
             <a:prstDash val="solid"/>
           </a:ln>
-        </p:spPr>
-      </p:sp>
-      <p:pic>
-        <p:nvPicPr>
-          <p:cNvPr id="21" name="Image 3" descr="preencoded.png">    </p:cNvPr>
-          <p:cNvPicPr>
-            <a:picLocks noChangeAspect="1"/>
-          </p:cNvPicPr>
-          <p:nvPr/>
-        </p:nvPicPr>
-        <p:blipFill>
-          <a:blip r:embed="rId4"/>
-          <a:stretch>
-            <a:fillRect/>
-          </a:stretch>
-        </p:blipFill>
-        <p:spPr>
-          <a:xfrm>
-            <a:off x="9450095" y="2569464"/>
-            <a:ext cx="384048" cy="384048"/>
-          </a:xfrm>
-          <a:prstGeom prst="rect">
-            <a:avLst/>
-          </a:prstGeom>
-        </p:spPr>
-      </p:pic>
-      <p:sp>
-        <p:nvSpPr>
-          <p:cNvPr id="22" name="Text 16"/>
-          <p:cNvSpPr txBox="1"/>
-          <p:nvPr/>
-        </p:nvSpPr>
-        <p:spPr>
-          <a:xfrm>
-            <a:off x="9303791" y="3291840"/>
-            <a:ext cx="2101520" cy="685800"/>
-          </a:xfrm>
-          <a:prstGeom prst="rect">
-            <a:avLst/>
-          </a:prstGeom>
-          <a:noFill/>
-          <a:ln/>
-        </p:spPr>
-        <p:txBody>
-          <a:bodyPr wrap="square" lIns="0" tIns="0" rIns="0" bIns="0" rtlCol="0" anchor="ctr"/>
-          <a:lstStyle/>
-          <a:p>
-            <a:pPr indent="0" marL="0">
-              <a:buNone/>
-            </a:pPr>
-            <a:r>
-              <a:rPr lang="en-US" sz="1550" b="1" dirty="0">
-                <a:solidFill>
-                  <a:srgbClr val="F2B944"/>
-                </a:solidFill>
-                <a:latin typeface="Arial" pitchFamily="34" charset="0"/>
-                <a:ea typeface="Arial" pitchFamily="34" charset="-122"/>
-                <a:cs typeface="Arial" pitchFamily="34" charset="-120"/>
-              </a:rPr>
-              <a:t>Utilities, MFIs &amp; Gov</a:t>
-            </a:r>
-            <a:endParaRPr lang="en-US" sz="1550" dirty="0"/>
-          </a:p>
-        </p:txBody>
-      </p:sp>
-      <p:sp>
-        <p:nvSpPr>
-          <p:cNvPr id="23" name="Text 17"/>
-          <p:cNvSpPr txBox="1"/>
-          <p:nvPr/>
-        </p:nvSpPr>
-        <p:spPr>
-          <a:xfrm>
-            <a:off x="9303791" y="3931920"/>
-            <a:ext cx="2101520" cy="1371600"/>
+          <a:effectLst>
+            <a:outerShdw sx="100000" sy="100000" kx="0" ky="0" algn="bl" rotWithShape="0" blurRad="127000" dist="50800" dir="5400000">
+              <a:srgbClr val="000000">
+                <a:alpha val="35000"/>
+              </a:srgbClr>
+            </a:outerShdw>
+          </a:effectLst>
+        </p:spPr>
+      </p:sp>
+      <p:sp>
+        <p:nvSpPr>
+          <p:cNvPr id="17" name="Text 15"/>
+          <p:cNvSpPr txBox="1"/>
+          <p:nvPr/>
+        </p:nvSpPr>
+        <p:spPr>
+          <a:xfrm>
+            <a:off x="886968" y="4389120"/>
+            <a:ext cx="10417759" cy="1143000"/>
           </a:xfrm>
           <a:prstGeom prst="rect">
             <a:avLst/>
@@ -2844,28 +2793,79 @@
           <a:p>
             <a:pPr indent="0" marL="0">
               <a:lnSpc>
-                <a:spcPct val="112000"/>
+                <a:spcPct val="115000"/>
               </a:lnSpc>
               <a:buNone/>
             </a:pPr>
             <a:r>
-              <a:rPr lang="en-US" sz="1230" dirty="0">
-                <a:solidFill>
-                  <a:srgbClr val="9BA79B"/>
+              <a:rPr lang="en-US" sz="1450" b="1" dirty="0">
+                <a:solidFill>
+                  <a:srgbClr val="F2B944"/>
                 </a:solidFill>
                 <a:latin typeface="Calibri" pitchFamily="34" charset="0"/>
                 <a:ea typeface="Calibri" pitchFamily="34" charset="-122"/>
                 <a:cs typeface="Calibri" pitchFamily="34" charset="-120"/>
               </a:rPr>
-              <a:t>Bulk reconciliation and audit-grade decision traces for every verification.</a:t>
-            </a:r>
-            <a:endParaRPr lang="en-US" sz="1230" dirty="0"/>
-          </a:p>
-        </p:txBody>
-      </p:sp>
-      <p:sp>
-        <p:nvSpPr>
-          <p:cNvPr id="24" name="Text 18"/>
+              <a:t>6 hand-tuned LIVE packs today</a:t>
+            </a:r>
+            <a:pPr indent="0" marL="0">
+              <a:lnSpc>
+                <a:spcPct val="115000"/>
+              </a:lnSpc>
+              <a:buNone/>
+            </a:pPr>
+            <a:r>
+              <a:rPr lang="en-US" sz="1450" dirty="0">
+                <a:solidFill>
+                  <a:srgbClr val="E9E4D5"/>
+                </a:solidFill>
+                <a:latin typeface="Calibri" pitchFamily="34" charset="0"/>
+                <a:ea typeface="Calibri" pitchFamily="34" charset="-122"/>
+                <a:cs typeface="Calibri" pitchFamily="34" charset="-120"/>
+              </a:rPr>
+              <a:t> and climbing — auto-verify, hands-free. Every other operator is </a:t>
+            </a:r>
+            <a:pPr indent="0" marL="0">
+              <a:lnSpc>
+                <a:spcPct val="115000"/>
+              </a:lnSpc>
+              <a:buNone/>
+            </a:pPr>
+            <a:r>
+              <a:rPr lang="en-US" sz="1450" b="1" dirty="0">
+                <a:solidFill>
+                  <a:srgbClr val="F2B944"/>
+                </a:solidFill>
+                <a:latin typeface="Calibri" pitchFamily="34" charset="0"/>
+                <a:ea typeface="Calibri" pitchFamily="34" charset="-122"/>
+                <a:cs typeface="Calibri" pitchFamily="34" charset="-120"/>
+              </a:rPr>
+              <a:t>template-ready</a:t>
+            </a:r>
+            <a:pPr indent="0" marL="0">
+              <a:lnSpc>
+                <a:spcPct val="115000"/>
+              </a:lnSpc>
+              <a:buNone/>
+            </a:pPr>
+            <a:r>
+              <a:rPr lang="en-US" sz="1450" dirty="0">
+                <a:solidFill>
+                  <a:srgbClr val="E9E4D5"/>
+                </a:solidFill>
+                <a:latin typeface="Calibri" pitchFamily="34" charset="0"/>
+                <a:ea typeface="Calibri" pitchFamily="34" charset="-122"/>
+                <a:cs typeface="Calibri" pitchFamily="34" charset="-120"/>
+              </a:rPr>
+              <a:t>: a multilingual generic parser already structures its SMS at a lower trust band until a precise pack ships. Nothing is claimed as fully supported when it isn’t — and no operator API is ever required.</a:t>
+            </a:r>
+            <a:endParaRPr lang="en-US" sz="1450" dirty="0"/>
+          </a:p>
+        </p:txBody>
+      </p:sp>
+      <p:sp>
+        <p:nvSpPr>
+          <p:cNvPr id="18" name="Text 16"/>
           <p:cNvSpPr txBox="1"/>
           <p:nvPr/>
         </p:nvSpPr>
@@ -2930,7 +2930,7 @@
     <p:bg>
       <p:bgPr>
         <a:solidFill>
-          <a:srgbClr val="F5EFDF"/>
+          <a:srgbClr val="0C231C"/>
         </a:solidFill>
       </p:bgPr>
     </p:bg>
@@ -2956,8 +2956,8 @@
         </p:nvSpPr>
         <p:spPr>
           <a:xfrm>
-            <a:off x="566928" y="777240"/>
-            <a:ext cx="7315200" cy="274320"/>
+            <a:off x="566928" y="640080"/>
+            <a:ext cx="9144000" cy="274320"/>
           </a:xfrm>
           <a:prstGeom prst="rect">
             <a:avLst/>
@@ -2981,7 +2981,7 @@
                 <a:ea typeface="Courier New" pitchFamily="34" charset="-122"/>
                 <a:cs typeface="Courier New" pitchFamily="34" charset="-120"/>
               </a:rPr>
-              <a:t>WHY KODA, WHY NOW</a:t>
+              <a:t>THE MODEL</a:t>
             </a:r>
             <a:endParaRPr lang="en-US" sz="1150" dirty="0"/>
           </a:p>
@@ -2995,8 +2995,8 @@
         </p:nvSpPr>
         <p:spPr>
           <a:xfrm>
-            <a:off x="566928" y="1143000"/>
-            <a:ext cx="10972800" cy="822960"/>
+            <a:off x="566928" y="960120"/>
+            <a:ext cx="10972800" cy="640080"/>
           </a:xfrm>
           <a:prstGeom prst="rect">
             <a:avLst/>
@@ -3012,17 +3012,17 @@
               <a:buNone/>
             </a:pPr>
             <a:r>
-              <a:rPr lang="en-US" sz="3400" b="1" dirty="0">
-                <a:solidFill>
-                  <a:srgbClr val="081813"/>
+              <a:rPr lang="en-US" sz="3200" b="1" dirty="0">
+                <a:solidFill>
+                  <a:srgbClr val="E9E4D5"/>
                 </a:solidFill>
                 <a:latin typeface="Arial" pitchFamily="34" charset="0"/>
                 <a:ea typeface="Arial" pitchFamily="34" charset="-122"/>
                 <a:cs typeface="Arial" pitchFamily="34" charset="-120"/>
               </a:rPr>
-              <a:t>It works today — and it’s honest about what it does.</a:t>
-            </a:r>
-            <a:endParaRPr lang="en-US" sz="3400" dirty="0"/>
+              <a:t>Free until your merchant actually gets paid.</a:t>
+            </a:r>
+            <a:endParaRPr lang="en-US" sz="3200" dirty="0"/>
           </a:p>
         </p:txBody>
       </p:sp>
@@ -3034,120 +3034,990 @@
         </p:nvSpPr>
         <p:spPr>
           <a:xfrm>
-            <a:off x="566928" y="2331720"/>
-            <a:ext cx="5349240" cy="1371600"/>
+            <a:off x="566928" y="2148840"/>
+            <a:ext cx="1660093" cy="2148840"/>
           </a:xfrm>
           <a:prstGeom prst="roundRect">
             <a:avLst>
-              <a:gd name="adj" fmla="val 6667"/>
+              <a:gd name="adj" fmla="val 6059"/>
             </a:avLst>
           </a:prstGeom>
           <a:solidFill>
-            <a:srgbClr val="FFFFFF"/>
+            <a:srgbClr val="123027"/>
           </a:solidFill>
           <a:ln w="12700">
             <a:solidFill>
-              <a:srgbClr val="E4DCC6"/>
+              <a:srgbClr val="2A4034"/>
             </a:solidFill>
             <a:prstDash val="solid"/>
           </a:ln>
-        </p:spPr>
-      </p:sp>
-      <p:sp>
-        <p:nvSpPr>
-          <p:cNvPr id="5" name="Shape 3"/>
+          <a:effectLst>
+            <a:outerShdw sx="100000" sy="100000" kx="0" ky="0" algn="bl" rotWithShape="0" blurRad="127000" dist="50800" dir="5400000">
+              <a:srgbClr val="000000">
+                <a:alpha val="35000"/>
+              </a:srgbClr>
+            </a:outerShdw>
+          </a:effectLst>
+        </p:spPr>
+      </p:sp>
+      <p:sp>
+        <p:nvSpPr>
+          <p:cNvPr id="5" name="Text 3"/>
+          <p:cNvSpPr txBox="1"/>
+          <p:nvPr/>
+        </p:nvSpPr>
+        <p:spPr>
+          <a:xfrm>
+            <a:off x="658368" y="2368296"/>
+            <a:ext cx="1477213" cy="365760"/>
+          </a:xfrm>
+          <a:prstGeom prst="rect">
+            <a:avLst/>
+          </a:prstGeom>
+          <a:noFill/>
+          <a:ln/>
+        </p:spPr>
+        <p:txBody>
+          <a:bodyPr wrap="square" lIns="0" tIns="0" rIns="0" bIns="0" rtlCol="0" anchor="ctr"/>
+          <a:lstStyle/>
+          <a:p>
+            <a:pPr algn="ctr" indent="0" marL="0">
+              <a:buNone/>
+            </a:pPr>
+            <a:r>
+              <a:rPr lang="en-US" sz="1400" b="1" dirty="0">
+                <a:solidFill>
+                  <a:srgbClr val="E9E4D5"/>
+                </a:solidFill>
+                <a:latin typeface="Arial" pitchFamily="34" charset="0"/>
+                <a:ea typeface="Arial" pitchFamily="34" charset="-122"/>
+                <a:cs typeface="Arial" pitchFamily="34" charset="-120"/>
+              </a:rPr>
+              <a:t>Marché</a:t>
+            </a:r>
+            <a:endParaRPr lang="en-US" sz="1400" dirty="0"/>
+          </a:p>
+        </p:txBody>
+      </p:sp>
+      <p:sp>
+        <p:nvSpPr>
+          <p:cNvPr id="6" name="Text 4"/>
+          <p:cNvSpPr txBox="1"/>
+          <p:nvPr/>
+        </p:nvSpPr>
+        <p:spPr>
+          <a:xfrm>
+            <a:off x="594360" y="2834640"/>
+            <a:ext cx="1605229" cy="640080"/>
+          </a:xfrm>
+          <a:prstGeom prst="rect">
+            <a:avLst/>
+          </a:prstGeom>
+          <a:noFill/>
+          <a:ln/>
+        </p:spPr>
+        <p:txBody>
+          <a:bodyPr wrap="square" lIns="0" tIns="0" rIns="0" bIns="0" rtlCol="0" anchor="ctr"/>
+          <a:lstStyle/>
+          <a:p>
+            <a:pPr algn="ctr" indent="0" marL="0">
+              <a:buNone/>
+            </a:pPr>
+            <a:r>
+              <a:rPr lang="en-US" sz="2700" b="1" dirty="0">
+                <a:solidFill>
+                  <a:srgbClr val="E8A11F"/>
+                </a:solidFill>
+                <a:latin typeface="Arial" pitchFamily="34" charset="0"/>
+                <a:ea typeface="Arial" pitchFamily="34" charset="-122"/>
+                <a:cs typeface="Arial" pitchFamily="34" charset="-120"/>
+              </a:rPr>
+              <a:t>$0</a:t>
+            </a:r>
+            <a:endParaRPr lang="en-US" sz="2700" dirty="0"/>
+          </a:p>
+        </p:txBody>
+      </p:sp>
+      <p:sp>
+        <p:nvSpPr>
+          <p:cNvPr id="7" name="Text 5"/>
+          <p:cNvSpPr txBox="1"/>
+          <p:nvPr/>
+        </p:nvSpPr>
+        <p:spPr>
+          <a:xfrm>
+            <a:off x="640080" y="3566160"/>
+            <a:ext cx="1513789" cy="594360"/>
+          </a:xfrm>
+          <a:prstGeom prst="rect">
+            <a:avLst/>
+          </a:prstGeom>
+          <a:noFill/>
+          <a:ln/>
+        </p:spPr>
+        <p:txBody>
+          <a:bodyPr wrap="square" lIns="0" tIns="0" rIns="0" bIns="0" rtlCol="0" anchor="ctr"/>
+          <a:lstStyle/>
+          <a:p>
+            <a:pPr algn="ctr" indent="0" marL="0">
+              <a:lnSpc>
+                <a:spcPct val="105000"/>
+              </a:lnSpc>
+              <a:buNone/>
+            </a:pPr>
+            <a:r>
+              <a:rPr lang="en-US" sz="1050" dirty="0">
+                <a:solidFill>
+                  <a:srgbClr val="9BA79B"/>
+                </a:solidFill>
+                <a:latin typeface="Calibri" pitchFamily="34" charset="0"/>
+                <a:ea typeface="Calibri" pitchFamily="34" charset="-122"/>
+                <a:cs typeface="Calibri" pitchFamily="34" charset="-120"/>
+              </a:rPr>
+              <a:t>10 / mo · forever</a:t>
+            </a:r>
+            <a:endParaRPr lang="en-US" sz="1050" dirty="0"/>
+          </a:p>
+        </p:txBody>
+      </p:sp>
+      <p:sp>
+        <p:nvSpPr>
+          <p:cNvPr id="8" name="Shape 6"/>
           <p:cNvSpPr/>
           <p:nvPr/>
         </p:nvSpPr>
         <p:spPr>
           <a:xfrm>
-            <a:off x="804672" y="2606040"/>
-            <a:ext cx="548640" cy="548640"/>
+            <a:off x="2446477" y="2148840"/>
+            <a:ext cx="1660093" cy="2148840"/>
           </a:xfrm>
           <a:prstGeom prst="roundRect">
             <a:avLst>
-              <a:gd name="adj" fmla="val 16667"/>
+              <a:gd name="adj" fmla="val 6059"/>
+            </a:avLst>
+          </a:prstGeom>
+          <a:solidFill>
+            <a:srgbClr val="123027"/>
+          </a:solidFill>
+          <a:ln w="12700">
+            <a:solidFill>
+              <a:srgbClr val="2A4034"/>
+            </a:solidFill>
+            <a:prstDash val="solid"/>
+          </a:ln>
+          <a:effectLst>
+            <a:outerShdw sx="100000" sy="100000" kx="0" ky="0" algn="bl" rotWithShape="0" blurRad="127000" dist="50800" dir="5400000">
+              <a:srgbClr val="000000">
+                <a:alpha val="35000"/>
+              </a:srgbClr>
+            </a:outerShdw>
+          </a:effectLst>
+        </p:spPr>
+      </p:sp>
+      <p:sp>
+        <p:nvSpPr>
+          <p:cNvPr id="9" name="Text 7"/>
+          <p:cNvSpPr txBox="1"/>
+          <p:nvPr/>
+        </p:nvSpPr>
+        <p:spPr>
+          <a:xfrm>
+            <a:off x="2537917" y="2368296"/>
+            <a:ext cx="1477213" cy="365760"/>
+          </a:xfrm>
+          <a:prstGeom prst="rect">
+            <a:avLst/>
+          </a:prstGeom>
+          <a:noFill/>
+          <a:ln/>
+        </p:spPr>
+        <p:txBody>
+          <a:bodyPr wrap="square" lIns="0" tIns="0" rIns="0" bIns="0" rtlCol="0" anchor="ctr"/>
+          <a:lstStyle/>
+          <a:p>
+            <a:pPr algn="ctr" indent="0" marL="0">
+              <a:buNone/>
+            </a:pPr>
+            <a:r>
+              <a:rPr lang="en-US" sz="1400" b="1" dirty="0">
+                <a:solidFill>
+                  <a:srgbClr val="E9E4D5"/>
+                </a:solidFill>
+                <a:latin typeface="Arial" pitchFamily="34" charset="0"/>
+                <a:ea typeface="Arial" pitchFamily="34" charset="-122"/>
+                <a:cs typeface="Arial" pitchFamily="34" charset="-120"/>
+              </a:rPr>
+              <a:t>Boutique</a:t>
+            </a:r>
+            <a:endParaRPr lang="en-US" sz="1400" dirty="0"/>
+          </a:p>
+        </p:txBody>
+      </p:sp>
+      <p:sp>
+        <p:nvSpPr>
+          <p:cNvPr id="10" name="Text 8"/>
+          <p:cNvSpPr txBox="1"/>
+          <p:nvPr/>
+        </p:nvSpPr>
+        <p:spPr>
+          <a:xfrm>
+            <a:off x="2473909" y="2834640"/>
+            <a:ext cx="1605229" cy="640080"/>
+          </a:xfrm>
+          <a:prstGeom prst="rect">
+            <a:avLst/>
+          </a:prstGeom>
+          <a:noFill/>
+          <a:ln/>
+        </p:spPr>
+        <p:txBody>
+          <a:bodyPr wrap="square" lIns="0" tIns="0" rIns="0" bIns="0" rtlCol="0" anchor="ctr"/>
+          <a:lstStyle/>
+          <a:p>
+            <a:pPr algn="ctr" indent="0" marL="0">
+              <a:buNone/>
+            </a:pPr>
+            <a:r>
+              <a:rPr lang="en-US" sz="2700" b="1" dirty="0">
+                <a:solidFill>
+                  <a:srgbClr val="E8A11F"/>
+                </a:solidFill>
+                <a:latin typeface="Arial" pitchFamily="34" charset="0"/>
+                <a:ea typeface="Arial" pitchFamily="34" charset="-122"/>
+                <a:cs typeface="Arial" pitchFamily="34" charset="-120"/>
+              </a:rPr>
+              <a:t>$5</a:t>
+            </a:r>
+            <a:endParaRPr lang="en-US" sz="2700" dirty="0"/>
+          </a:p>
+        </p:txBody>
+      </p:sp>
+      <p:sp>
+        <p:nvSpPr>
+          <p:cNvPr id="11" name="Text 9"/>
+          <p:cNvSpPr txBox="1"/>
+          <p:nvPr/>
+        </p:nvSpPr>
+        <p:spPr>
+          <a:xfrm>
+            <a:off x="2519629" y="3566160"/>
+            <a:ext cx="1513789" cy="594360"/>
+          </a:xfrm>
+          <a:prstGeom prst="rect">
+            <a:avLst/>
+          </a:prstGeom>
+          <a:noFill/>
+          <a:ln/>
+        </p:spPr>
+        <p:txBody>
+          <a:bodyPr wrap="square" lIns="0" tIns="0" rIns="0" bIns="0" rtlCol="0" anchor="ctr"/>
+          <a:lstStyle/>
+          <a:p>
+            <a:pPr algn="ctr" indent="0" marL="0">
+              <a:lnSpc>
+                <a:spcPct val="105000"/>
+              </a:lnSpc>
+              <a:buNone/>
+            </a:pPr>
+            <a:r>
+              <a:rPr lang="en-US" sz="1050" dirty="0">
+                <a:solidFill>
+                  <a:srgbClr val="9BA79B"/>
+                </a:solidFill>
+                <a:latin typeface="Calibri" pitchFamily="34" charset="0"/>
+                <a:ea typeface="Calibri" pitchFamily="34" charset="-122"/>
+                <a:cs typeface="Calibri" pitchFamily="34" charset="-120"/>
+              </a:rPr>
+              <a:t>190 verifs / mo</a:t>
+            </a:r>
+            <a:endParaRPr lang="en-US" sz="1050" dirty="0"/>
+          </a:p>
+        </p:txBody>
+      </p:sp>
+      <p:sp>
+        <p:nvSpPr>
+          <p:cNvPr id="12" name="Shape 10"/>
+          <p:cNvSpPr/>
+          <p:nvPr/>
+        </p:nvSpPr>
+        <p:spPr>
+          <a:xfrm>
+            <a:off x="4326026" y="2148840"/>
+            <a:ext cx="1660093" cy="2148840"/>
+          </a:xfrm>
+          <a:prstGeom prst="roundRect">
+            <a:avLst>
+              <a:gd name="adj" fmla="val 6059"/>
+            </a:avLst>
+          </a:prstGeom>
+          <a:solidFill>
+            <a:srgbClr val="17392E"/>
+          </a:solidFill>
+          <a:ln w="12700">
+            <a:solidFill>
+              <a:srgbClr val="2A4034"/>
+            </a:solidFill>
+            <a:prstDash val="solid"/>
+          </a:ln>
+          <a:effectLst>
+            <a:outerShdw sx="100000" sy="100000" kx="0" ky="0" algn="bl" rotWithShape="0" blurRad="127000" dist="50800" dir="5400000">
+              <a:srgbClr val="000000">
+                <a:alpha val="35000"/>
+              </a:srgbClr>
+            </a:outerShdw>
+          </a:effectLst>
+        </p:spPr>
+      </p:sp>
+      <p:sp>
+        <p:nvSpPr>
+          <p:cNvPr id="13" name="Shape 11"/>
+          <p:cNvSpPr/>
+          <p:nvPr/>
+        </p:nvSpPr>
+        <p:spPr>
+          <a:xfrm>
+            <a:off x="4326026" y="2148840"/>
+            <a:ext cx="1660093" cy="2148840"/>
+          </a:xfrm>
+          <a:prstGeom prst="roundRect">
+            <a:avLst>
+              <a:gd name="adj" fmla="val 6059"/>
+            </a:avLst>
+          </a:prstGeom>
+          <a:ln w="25400">
+            <a:solidFill>
+              <a:srgbClr val="E8A11F"/>
+            </a:solidFill>
+            <a:prstDash val="solid"/>
+          </a:ln>
+        </p:spPr>
+      </p:sp>
+      <p:sp>
+        <p:nvSpPr>
+          <p:cNvPr id="14" name="Text 12"/>
+          <p:cNvSpPr txBox="1"/>
+          <p:nvPr/>
+        </p:nvSpPr>
+        <p:spPr>
+          <a:xfrm>
+            <a:off x="4417466" y="2368296"/>
+            <a:ext cx="1477213" cy="365760"/>
+          </a:xfrm>
+          <a:prstGeom prst="rect">
+            <a:avLst/>
+          </a:prstGeom>
+          <a:noFill/>
+          <a:ln/>
+        </p:spPr>
+        <p:txBody>
+          <a:bodyPr wrap="square" lIns="0" tIns="0" rIns="0" bIns="0" rtlCol="0" anchor="ctr"/>
+          <a:lstStyle/>
+          <a:p>
+            <a:pPr algn="ctr" indent="0" marL="0">
+              <a:buNone/>
+            </a:pPr>
+            <a:r>
+              <a:rPr lang="en-US" sz="1400" b="1" dirty="0">
+                <a:solidFill>
+                  <a:srgbClr val="E9E4D5"/>
+                </a:solidFill>
+                <a:latin typeface="Arial" pitchFamily="34" charset="0"/>
+                <a:ea typeface="Arial" pitchFamily="34" charset="-122"/>
+                <a:cs typeface="Arial" pitchFamily="34" charset="-120"/>
+              </a:rPr>
+              <a:t>Commerce</a:t>
+            </a:r>
+            <a:endParaRPr lang="en-US" sz="1400" dirty="0"/>
+          </a:p>
+        </p:txBody>
+      </p:sp>
+      <p:sp>
+        <p:nvSpPr>
+          <p:cNvPr id="15" name="Text 13"/>
+          <p:cNvSpPr txBox="1"/>
+          <p:nvPr/>
+        </p:nvSpPr>
+        <p:spPr>
+          <a:xfrm>
+            <a:off x="4353458" y="2834640"/>
+            <a:ext cx="1605229" cy="640080"/>
+          </a:xfrm>
+          <a:prstGeom prst="rect">
+            <a:avLst/>
+          </a:prstGeom>
+          <a:noFill/>
+          <a:ln/>
+        </p:spPr>
+        <p:txBody>
+          <a:bodyPr wrap="square" lIns="0" tIns="0" rIns="0" bIns="0" rtlCol="0" anchor="ctr"/>
+          <a:lstStyle/>
+          <a:p>
+            <a:pPr algn="ctr" indent="0" marL="0">
+              <a:buNone/>
+            </a:pPr>
+            <a:r>
+              <a:rPr lang="en-US" sz="2700" b="1" dirty="0">
+                <a:solidFill>
+                  <a:srgbClr val="E8A11F"/>
+                </a:solidFill>
+                <a:latin typeface="Arial" pitchFamily="34" charset="0"/>
+                <a:ea typeface="Arial" pitchFamily="34" charset="-122"/>
+                <a:cs typeface="Arial" pitchFamily="34" charset="-120"/>
+              </a:rPr>
+              <a:t>$20</a:t>
+            </a:r>
+            <a:endParaRPr lang="en-US" sz="2700" dirty="0"/>
+          </a:p>
+        </p:txBody>
+      </p:sp>
+      <p:sp>
+        <p:nvSpPr>
+          <p:cNvPr id="16" name="Text 14"/>
+          <p:cNvSpPr txBox="1"/>
+          <p:nvPr/>
+        </p:nvSpPr>
+        <p:spPr>
+          <a:xfrm>
+            <a:off x="4399178" y="3566160"/>
+            <a:ext cx="1513789" cy="594360"/>
+          </a:xfrm>
+          <a:prstGeom prst="rect">
+            <a:avLst/>
+          </a:prstGeom>
+          <a:noFill/>
+          <a:ln/>
+        </p:spPr>
+        <p:txBody>
+          <a:bodyPr wrap="square" lIns="0" tIns="0" rIns="0" bIns="0" rtlCol="0" anchor="ctr"/>
+          <a:lstStyle/>
+          <a:p>
+            <a:pPr algn="ctr" indent="0" marL="0">
+              <a:lnSpc>
+                <a:spcPct val="105000"/>
+              </a:lnSpc>
+              <a:buNone/>
+            </a:pPr>
+            <a:r>
+              <a:rPr lang="en-US" sz="1050" dirty="0">
+                <a:solidFill>
+                  <a:srgbClr val="9BA79B"/>
+                </a:solidFill>
+                <a:latin typeface="Calibri" pitchFamily="34" charset="0"/>
+                <a:ea typeface="Calibri" pitchFamily="34" charset="-122"/>
+                <a:cs typeface="Calibri" pitchFamily="34" charset="-120"/>
+              </a:rPr>
+              <a:t>760 verifs / mo</a:t>
+            </a:r>
+            <a:endParaRPr lang="en-US" sz="1050" dirty="0"/>
+          </a:p>
+        </p:txBody>
+      </p:sp>
+      <p:sp>
+        <p:nvSpPr>
+          <p:cNvPr id="17" name="Shape 15"/>
+          <p:cNvSpPr/>
+          <p:nvPr/>
+        </p:nvSpPr>
+        <p:spPr>
+          <a:xfrm>
+            <a:off x="6205576" y="2148840"/>
+            <a:ext cx="1660093" cy="2148840"/>
+          </a:xfrm>
+          <a:prstGeom prst="roundRect">
+            <a:avLst>
+              <a:gd name="adj" fmla="val 6059"/>
+            </a:avLst>
+          </a:prstGeom>
+          <a:solidFill>
+            <a:srgbClr val="123027"/>
+          </a:solidFill>
+          <a:ln w="12700">
+            <a:solidFill>
+              <a:srgbClr val="2A4034"/>
+            </a:solidFill>
+            <a:prstDash val="solid"/>
+          </a:ln>
+          <a:effectLst>
+            <a:outerShdw sx="100000" sy="100000" kx="0" ky="0" algn="bl" rotWithShape="0" blurRad="127000" dist="50800" dir="5400000">
+              <a:srgbClr val="000000">
+                <a:alpha val="35000"/>
+              </a:srgbClr>
+            </a:outerShdw>
+          </a:effectLst>
+        </p:spPr>
+      </p:sp>
+      <p:sp>
+        <p:nvSpPr>
+          <p:cNvPr id="18" name="Text 16"/>
+          <p:cNvSpPr txBox="1"/>
+          <p:nvPr/>
+        </p:nvSpPr>
+        <p:spPr>
+          <a:xfrm>
+            <a:off x="6297016" y="2368296"/>
+            <a:ext cx="1477213" cy="365760"/>
+          </a:xfrm>
+          <a:prstGeom prst="rect">
+            <a:avLst/>
+          </a:prstGeom>
+          <a:noFill/>
+          <a:ln/>
+        </p:spPr>
+        <p:txBody>
+          <a:bodyPr wrap="square" lIns="0" tIns="0" rIns="0" bIns="0" rtlCol="0" anchor="ctr"/>
+          <a:lstStyle/>
+          <a:p>
+            <a:pPr algn="ctr" indent="0" marL="0">
+              <a:buNone/>
+            </a:pPr>
+            <a:r>
+              <a:rPr lang="en-US" sz="1400" b="1" dirty="0">
+                <a:solidFill>
+                  <a:srgbClr val="E9E4D5"/>
+                </a:solidFill>
+                <a:latin typeface="Arial" pitchFamily="34" charset="0"/>
+                <a:ea typeface="Arial" pitchFamily="34" charset="-122"/>
+                <a:cs typeface="Arial" pitchFamily="34" charset="-120"/>
+              </a:rPr>
+              <a:t>Plateforme</a:t>
+            </a:r>
+            <a:endParaRPr lang="en-US" sz="1400" dirty="0"/>
+          </a:p>
+        </p:txBody>
+      </p:sp>
+      <p:sp>
+        <p:nvSpPr>
+          <p:cNvPr id="19" name="Text 17"/>
+          <p:cNvSpPr txBox="1"/>
+          <p:nvPr/>
+        </p:nvSpPr>
+        <p:spPr>
+          <a:xfrm>
+            <a:off x="6233008" y="2834640"/>
+            <a:ext cx="1605229" cy="640080"/>
+          </a:xfrm>
+          <a:prstGeom prst="rect">
+            <a:avLst/>
+          </a:prstGeom>
+          <a:noFill/>
+          <a:ln/>
+        </p:spPr>
+        <p:txBody>
+          <a:bodyPr wrap="square" lIns="0" tIns="0" rIns="0" bIns="0" rtlCol="0" anchor="ctr"/>
+          <a:lstStyle/>
+          <a:p>
+            <a:pPr algn="ctr" indent="0" marL="0">
+              <a:buNone/>
+            </a:pPr>
+            <a:r>
+              <a:rPr lang="en-US" sz="2700" b="1" dirty="0">
+                <a:solidFill>
+                  <a:srgbClr val="E8A11F"/>
+                </a:solidFill>
+                <a:latin typeface="Arial" pitchFamily="34" charset="0"/>
+                <a:ea typeface="Arial" pitchFamily="34" charset="-122"/>
+                <a:cs typeface="Arial" pitchFamily="34" charset="-120"/>
+              </a:rPr>
+              <a:t>$100</a:t>
+            </a:r>
+            <a:endParaRPr lang="en-US" sz="2700" dirty="0"/>
+          </a:p>
+        </p:txBody>
+      </p:sp>
+      <p:sp>
+        <p:nvSpPr>
+          <p:cNvPr id="20" name="Text 18"/>
+          <p:cNvSpPr txBox="1"/>
+          <p:nvPr/>
+        </p:nvSpPr>
+        <p:spPr>
+          <a:xfrm>
+            <a:off x="6278728" y="3566160"/>
+            <a:ext cx="1513789" cy="594360"/>
+          </a:xfrm>
+          <a:prstGeom prst="rect">
+            <a:avLst/>
+          </a:prstGeom>
+          <a:noFill/>
+          <a:ln/>
+        </p:spPr>
+        <p:txBody>
+          <a:bodyPr wrap="square" lIns="0" tIns="0" rIns="0" bIns="0" rtlCol="0" anchor="ctr"/>
+          <a:lstStyle/>
+          <a:p>
+            <a:pPr algn="ctr" indent="0" marL="0">
+              <a:lnSpc>
+                <a:spcPct val="105000"/>
+              </a:lnSpc>
+              <a:buNone/>
+            </a:pPr>
+            <a:r>
+              <a:rPr lang="en-US" sz="1050" dirty="0">
+                <a:solidFill>
+                  <a:srgbClr val="9BA79B"/>
+                </a:solidFill>
+                <a:latin typeface="Calibri" pitchFamily="34" charset="0"/>
+                <a:ea typeface="Calibri" pitchFamily="34" charset="-122"/>
+                <a:cs typeface="Calibri" pitchFamily="34" charset="-120"/>
+              </a:rPr>
+              <a:t>3,800 / mo</a:t>
+            </a:r>
+            <a:endParaRPr lang="en-US" sz="1050" dirty="0"/>
+          </a:p>
+        </p:txBody>
+      </p:sp>
+      <p:sp>
+        <p:nvSpPr>
+          <p:cNvPr id="21" name="Shape 19"/>
+          <p:cNvSpPr/>
+          <p:nvPr/>
+        </p:nvSpPr>
+        <p:spPr>
+          <a:xfrm>
+            <a:off x="8085125" y="2148840"/>
+            <a:ext cx="1660093" cy="2148840"/>
+          </a:xfrm>
+          <a:prstGeom prst="roundRect">
+            <a:avLst>
+              <a:gd name="adj" fmla="val 6059"/>
+            </a:avLst>
+          </a:prstGeom>
+          <a:solidFill>
+            <a:srgbClr val="123027"/>
+          </a:solidFill>
+          <a:ln w="12700">
+            <a:solidFill>
+              <a:srgbClr val="2A4034"/>
+            </a:solidFill>
+            <a:prstDash val="solid"/>
+          </a:ln>
+          <a:effectLst>
+            <a:outerShdw sx="100000" sy="100000" kx="0" ky="0" algn="bl" rotWithShape="0" blurRad="127000" dist="50800" dir="5400000">
+              <a:srgbClr val="000000">
+                <a:alpha val="35000"/>
+              </a:srgbClr>
+            </a:outerShdw>
+          </a:effectLst>
+        </p:spPr>
+      </p:sp>
+      <p:sp>
+        <p:nvSpPr>
+          <p:cNvPr id="22" name="Text 20"/>
+          <p:cNvSpPr txBox="1"/>
+          <p:nvPr/>
+        </p:nvSpPr>
+        <p:spPr>
+          <a:xfrm>
+            <a:off x="8176565" y="2368296"/>
+            <a:ext cx="1477213" cy="365760"/>
+          </a:xfrm>
+          <a:prstGeom prst="rect">
+            <a:avLst/>
+          </a:prstGeom>
+          <a:noFill/>
+          <a:ln/>
+        </p:spPr>
+        <p:txBody>
+          <a:bodyPr wrap="square" lIns="0" tIns="0" rIns="0" bIns="0" rtlCol="0" anchor="ctr"/>
+          <a:lstStyle/>
+          <a:p>
+            <a:pPr algn="ctr" indent="0" marL="0">
+              <a:buNone/>
+            </a:pPr>
+            <a:r>
+              <a:rPr lang="en-US" sz="1400" b="1" dirty="0">
+                <a:solidFill>
+                  <a:srgbClr val="E9E4D5"/>
+                </a:solidFill>
+                <a:latin typeface="Arial" pitchFamily="34" charset="0"/>
+                <a:ea typeface="Arial" pitchFamily="34" charset="-122"/>
+                <a:cs typeface="Arial" pitchFamily="34" charset="-120"/>
+              </a:rPr>
+              <a:t>Scale</a:t>
+            </a:r>
+            <a:endParaRPr lang="en-US" sz="1400" dirty="0"/>
+          </a:p>
+        </p:txBody>
+      </p:sp>
+      <p:sp>
+        <p:nvSpPr>
+          <p:cNvPr id="23" name="Text 21"/>
+          <p:cNvSpPr txBox="1"/>
+          <p:nvPr/>
+        </p:nvSpPr>
+        <p:spPr>
+          <a:xfrm>
+            <a:off x="8112557" y="2834640"/>
+            <a:ext cx="1605229" cy="640080"/>
+          </a:xfrm>
+          <a:prstGeom prst="rect">
+            <a:avLst/>
+          </a:prstGeom>
+          <a:noFill/>
+          <a:ln/>
+        </p:spPr>
+        <p:txBody>
+          <a:bodyPr wrap="square" lIns="0" tIns="0" rIns="0" bIns="0" rtlCol="0" anchor="ctr"/>
+          <a:lstStyle/>
+          <a:p>
+            <a:pPr algn="ctr" indent="0" marL="0">
+              <a:buNone/>
+            </a:pPr>
+            <a:r>
+              <a:rPr lang="en-US" sz="2700" b="1" dirty="0">
+                <a:solidFill>
+                  <a:srgbClr val="E8A11F"/>
+                </a:solidFill>
+                <a:latin typeface="Arial" pitchFamily="34" charset="0"/>
+                <a:ea typeface="Arial" pitchFamily="34" charset="-122"/>
+                <a:cs typeface="Arial" pitchFamily="34" charset="-120"/>
+              </a:rPr>
+              <a:t>$399</a:t>
+            </a:r>
+            <a:endParaRPr lang="en-US" sz="2700" dirty="0"/>
+          </a:p>
+        </p:txBody>
+      </p:sp>
+      <p:sp>
+        <p:nvSpPr>
+          <p:cNvPr id="24" name="Text 22"/>
+          <p:cNvSpPr txBox="1"/>
+          <p:nvPr/>
+        </p:nvSpPr>
+        <p:spPr>
+          <a:xfrm>
+            <a:off x="8158277" y="3566160"/>
+            <a:ext cx="1513789" cy="594360"/>
+          </a:xfrm>
+          <a:prstGeom prst="rect">
+            <a:avLst/>
+          </a:prstGeom>
+          <a:noFill/>
+          <a:ln/>
+        </p:spPr>
+        <p:txBody>
+          <a:bodyPr wrap="square" lIns="0" tIns="0" rIns="0" bIns="0" rtlCol="0" anchor="ctr"/>
+          <a:lstStyle/>
+          <a:p>
+            <a:pPr algn="ctr" indent="0" marL="0">
+              <a:lnSpc>
+                <a:spcPct val="105000"/>
+              </a:lnSpc>
+              <a:buNone/>
+            </a:pPr>
+            <a:r>
+              <a:rPr lang="en-US" sz="1050" dirty="0">
+                <a:solidFill>
+                  <a:srgbClr val="9BA79B"/>
+                </a:solidFill>
+                <a:latin typeface="Calibri" pitchFamily="34" charset="0"/>
+                <a:ea typeface="Calibri" pitchFamily="34" charset="-122"/>
+                <a:cs typeface="Calibri" pitchFamily="34" charset="-120"/>
+              </a:rPr>
+              <a:t>15,200 / mo</a:t>
+            </a:r>
+            <a:endParaRPr lang="en-US" sz="1050" dirty="0"/>
+          </a:p>
+        </p:txBody>
+      </p:sp>
+      <p:sp>
+        <p:nvSpPr>
+          <p:cNvPr id="25" name="Shape 23"/>
+          <p:cNvSpPr/>
+          <p:nvPr/>
+        </p:nvSpPr>
+        <p:spPr>
+          <a:xfrm>
+            <a:off x="9964674" y="2148840"/>
+            <a:ext cx="1660093" cy="2148840"/>
+          </a:xfrm>
+          <a:prstGeom prst="roundRect">
+            <a:avLst>
+              <a:gd name="adj" fmla="val 6059"/>
+            </a:avLst>
+          </a:prstGeom>
+          <a:solidFill>
+            <a:srgbClr val="123027"/>
+          </a:solidFill>
+          <a:ln w="12700">
+            <a:solidFill>
+              <a:srgbClr val="2A4034"/>
+            </a:solidFill>
+            <a:prstDash val="solid"/>
+          </a:ln>
+          <a:effectLst>
+            <a:outerShdw sx="100000" sy="100000" kx="0" ky="0" algn="bl" rotWithShape="0" blurRad="127000" dist="50800" dir="5400000">
+              <a:srgbClr val="000000">
+                <a:alpha val="35000"/>
+              </a:srgbClr>
+            </a:outerShdw>
+          </a:effectLst>
+        </p:spPr>
+      </p:sp>
+      <p:sp>
+        <p:nvSpPr>
+          <p:cNvPr id="26" name="Text 24"/>
+          <p:cNvSpPr txBox="1"/>
+          <p:nvPr/>
+        </p:nvSpPr>
+        <p:spPr>
+          <a:xfrm>
+            <a:off x="10056114" y="2368296"/>
+            <a:ext cx="1477213" cy="365760"/>
+          </a:xfrm>
+          <a:prstGeom prst="rect">
+            <a:avLst/>
+          </a:prstGeom>
+          <a:noFill/>
+          <a:ln/>
+        </p:spPr>
+        <p:txBody>
+          <a:bodyPr wrap="square" lIns="0" tIns="0" rIns="0" bIns="0" rtlCol="0" anchor="ctr"/>
+          <a:lstStyle/>
+          <a:p>
+            <a:pPr algn="ctr" indent="0" marL="0">
+              <a:buNone/>
+            </a:pPr>
+            <a:r>
+              <a:rPr lang="en-US" sz="1400" b="1" dirty="0">
+                <a:solidFill>
+                  <a:srgbClr val="E9E4D5"/>
+                </a:solidFill>
+                <a:latin typeface="Arial" pitchFamily="34" charset="0"/>
+                <a:ea typeface="Arial" pitchFamily="34" charset="-122"/>
+                <a:cs typeface="Arial" pitchFamily="34" charset="-120"/>
+              </a:rPr>
+              <a:t>Enterprise</a:t>
+            </a:r>
+            <a:endParaRPr lang="en-US" sz="1400" dirty="0"/>
+          </a:p>
+        </p:txBody>
+      </p:sp>
+      <p:sp>
+        <p:nvSpPr>
+          <p:cNvPr id="27" name="Text 25"/>
+          <p:cNvSpPr txBox="1"/>
+          <p:nvPr/>
+        </p:nvSpPr>
+        <p:spPr>
+          <a:xfrm>
+            <a:off x="9992106" y="2834640"/>
+            <a:ext cx="1605229" cy="640080"/>
+          </a:xfrm>
+          <a:prstGeom prst="rect">
+            <a:avLst/>
+          </a:prstGeom>
+          <a:noFill/>
+          <a:ln/>
+        </p:spPr>
+        <p:txBody>
+          <a:bodyPr wrap="square" lIns="0" tIns="0" rIns="0" bIns="0" rtlCol="0" anchor="ctr"/>
+          <a:lstStyle/>
+          <a:p>
+            <a:pPr algn="ctr" indent="0" marL="0">
+              <a:buNone/>
+            </a:pPr>
+            <a:r>
+              <a:rPr lang="en-US" sz="1600" b="1" dirty="0">
+                <a:solidFill>
+                  <a:srgbClr val="E8A11F"/>
+                </a:solidFill>
+                <a:latin typeface="Arial" pitchFamily="34" charset="0"/>
+                <a:ea typeface="Arial" pitchFamily="34" charset="-122"/>
+                <a:cs typeface="Arial" pitchFamily="34" charset="-120"/>
+              </a:rPr>
+              <a:t>Custom</a:t>
+            </a:r>
+            <a:endParaRPr lang="en-US" sz="1600" dirty="0"/>
+          </a:p>
+        </p:txBody>
+      </p:sp>
+      <p:sp>
+        <p:nvSpPr>
+          <p:cNvPr id="28" name="Text 26"/>
+          <p:cNvSpPr txBox="1"/>
+          <p:nvPr/>
+        </p:nvSpPr>
+        <p:spPr>
+          <a:xfrm>
+            <a:off x="10037826" y="3566160"/>
+            <a:ext cx="1513789" cy="594360"/>
+          </a:xfrm>
+          <a:prstGeom prst="rect">
+            <a:avLst/>
+          </a:prstGeom>
+          <a:noFill/>
+          <a:ln/>
+        </p:spPr>
+        <p:txBody>
+          <a:bodyPr wrap="square" lIns="0" tIns="0" rIns="0" bIns="0" rtlCol="0" anchor="ctr"/>
+          <a:lstStyle/>
+          <a:p>
+            <a:pPr algn="ctr" indent="0" marL="0">
+              <a:lnSpc>
+                <a:spcPct val="105000"/>
+              </a:lnSpc>
+              <a:buNone/>
+            </a:pPr>
+            <a:r>
+              <a:rPr lang="en-US" sz="1050" dirty="0">
+                <a:solidFill>
+                  <a:srgbClr val="9BA79B"/>
+                </a:solidFill>
+                <a:latin typeface="Calibri" pitchFamily="34" charset="0"/>
+                <a:ea typeface="Calibri" pitchFamily="34" charset="-122"/>
+                <a:cs typeface="Calibri" pitchFamily="34" charset="-120"/>
+              </a:rPr>
+              <a:t>committed volume</a:t>
+            </a:r>
+            <a:endParaRPr lang="en-US" sz="1050" dirty="0"/>
+          </a:p>
+        </p:txBody>
+      </p:sp>
+      <p:sp>
+        <p:nvSpPr>
+          <p:cNvPr id="29" name="Shape 27"/>
+          <p:cNvSpPr/>
+          <p:nvPr/>
+        </p:nvSpPr>
+        <p:spPr>
+          <a:xfrm>
+            <a:off x="566928" y="4663440"/>
+            <a:ext cx="11057839" cy="1097280"/>
+          </a:xfrm>
+          <a:prstGeom prst="roundRect">
+            <a:avLst>
+              <a:gd name="adj" fmla="val 9167"/>
             </a:avLst>
           </a:prstGeom>
           <a:solidFill>
             <a:srgbClr val="081813"/>
           </a:solidFill>
-          <a:ln/>
-        </p:spPr>
-      </p:sp>
-      <p:pic>
-        <p:nvPicPr>
-          <p:cNvPr id="6" name="Image 0" descr="preencoded.png">    </p:cNvPr>
-          <p:cNvPicPr>
-            <a:picLocks noChangeAspect="1"/>
-          </p:cNvPicPr>
-          <p:nvPr/>
-        </p:nvPicPr>
-        <p:blipFill>
-          <a:blip r:embed="rId1"/>
-          <a:stretch>
-            <a:fillRect/>
-          </a:stretch>
-        </p:blipFill>
-        <p:spPr>
-          <a:xfrm>
-            <a:off x="914400" y="2715768"/>
-            <a:ext cx="329184" cy="329184"/>
-          </a:xfrm>
-          <a:prstGeom prst="rect">
-            <a:avLst/>
-          </a:prstGeom>
-        </p:spPr>
-      </p:pic>
-      <p:sp>
-        <p:nvSpPr>
-          <p:cNvPr id="7" name="Text 4"/>
-          <p:cNvSpPr txBox="1"/>
-          <p:nvPr/>
-        </p:nvSpPr>
-        <p:spPr>
-          <a:xfrm>
-            <a:off x="1536192" y="2514600"/>
-            <a:ext cx="4206240" cy="365760"/>
-          </a:xfrm>
-          <a:prstGeom prst="rect">
-            <a:avLst/>
-          </a:prstGeom>
-          <a:noFill/>
-          <a:ln/>
-        </p:spPr>
-        <p:txBody>
-          <a:bodyPr wrap="square" lIns="0" tIns="0" rIns="0" bIns="0" rtlCol="0" anchor="ctr"/>
-          <a:lstStyle/>
-          <a:p>
-            <a:pPr indent="0" marL="0">
-              <a:buNone/>
-            </a:pPr>
-            <a:r>
-              <a:rPr lang="en-US" sz="1550" b="1" dirty="0">
-                <a:solidFill>
-                  <a:srgbClr val="081813"/>
-                </a:solidFill>
-                <a:latin typeface="Arial" pitchFamily="34" charset="0"/>
-                <a:ea typeface="Arial" pitchFamily="34" charset="-122"/>
-                <a:cs typeface="Arial" pitchFamily="34" charset="-120"/>
-              </a:rPr>
-              <a:t>Runs now, not someday</a:t>
-            </a:r>
-            <a:endParaRPr lang="en-US" sz="1550" dirty="0"/>
-          </a:p>
-        </p:txBody>
-      </p:sp>
-      <p:sp>
-        <p:nvSpPr>
-          <p:cNvPr id="8" name="Text 5"/>
-          <p:cNvSpPr txBox="1"/>
-          <p:nvPr/>
-        </p:nvSpPr>
-        <p:spPr>
-          <a:xfrm>
-            <a:off x="1536192" y="2898648"/>
-            <a:ext cx="4224528" cy="685800"/>
+          <a:ln w="12700">
+            <a:solidFill>
+              <a:srgbClr val="2A4034"/>
+            </a:solidFill>
+            <a:prstDash val="solid"/>
+          </a:ln>
+          <a:effectLst>
+            <a:outerShdw sx="100000" sy="100000" kx="0" ky="0" algn="bl" rotWithShape="0" blurRad="127000" dist="50800" dir="5400000">
+              <a:srgbClr val="000000">
+                <a:alpha val="35000"/>
+              </a:srgbClr>
+            </a:outerShdw>
+          </a:effectLst>
+        </p:spPr>
+      </p:sp>
+      <p:sp>
+        <p:nvSpPr>
+          <p:cNvPr id="30" name="Text 28"/>
+          <p:cNvSpPr txBox="1"/>
+          <p:nvPr/>
+        </p:nvSpPr>
+        <p:spPr>
+          <a:xfrm>
+            <a:off x="886968" y="4864608"/>
+            <a:ext cx="10417759" cy="731520"/>
           </a:xfrm>
           <a:prstGeom prst="rect">
             <a:avLst/>
@@ -3161,490 +4031,45 @@
           <a:p>
             <a:pPr indent="0" marL="0">
               <a:lnSpc>
-                <a:spcPct val="108000"/>
+                <a:spcPct val="112000"/>
               </a:lnSpc>
               <a:buNone/>
             </a:pPr>
             <a:r>
-              <a:rPr lang="en-US" sz="1230" dirty="0">
-                <a:solidFill>
-                  <a:srgbClr val="5A6A5E"/>
+              <a:rPr lang="en-US" sz="1350" b="1" i="1" dirty="0">
+                <a:solidFill>
+                  <a:srgbClr val="F2B944"/>
                 </a:solidFill>
                 <a:latin typeface="Calibri" pitchFamily="34" charset="0"/>
                 <a:ea typeface="Calibri" pitchFamily="34" charset="-122"/>
                 <a:cs typeface="Calibri" pitchFamily="34" charset="-120"/>
               </a:rPr>
-              <a:t>A zero-dependency engine already verifying across five doors — not a roadmap.</a:t>
-            </a:r>
-            <a:endParaRPr lang="en-US" sz="1230" dirty="0"/>
-          </a:p>
-        </p:txBody>
-      </p:sp>
-      <p:sp>
-        <p:nvSpPr>
-          <p:cNvPr id="9" name="Shape 6"/>
-          <p:cNvSpPr/>
-          <p:nvPr/>
-        </p:nvSpPr>
-        <p:spPr>
-          <a:xfrm>
-            <a:off x="6144768" y="2331720"/>
-            <a:ext cx="5349240" cy="1371600"/>
-          </a:xfrm>
-          <a:prstGeom prst="roundRect">
-            <a:avLst>
-              <a:gd name="adj" fmla="val 6667"/>
-            </a:avLst>
-          </a:prstGeom>
-          <a:solidFill>
-            <a:srgbClr val="FFFFFF"/>
-          </a:solidFill>
-          <a:ln w="12700">
-            <a:solidFill>
-              <a:srgbClr val="E4DCC6"/>
-            </a:solidFill>
-            <a:prstDash val="solid"/>
-          </a:ln>
-        </p:spPr>
-      </p:sp>
-      <p:sp>
-        <p:nvSpPr>
-          <p:cNvPr id="10" name="Shape 7"/>
-          <p:cNvSpPr/>
-          <p:nvPr/>
-        </p:nvSpPr>
-        <p:spPr>
-          <a:xfrm>
-            <a:off x="6382512" y="2606040"/>
-            <a:ext cx="548640" cy="548640"/>
-          </a:xfrm>
-          <a:prstGeom prst="roundRect">
-            <a:avLst>
-              <a:gd name="adj" fmla="val 16667"/>
-            </a:avLst>
-          </a:prstGeom>
-          <a:solidFill>
-            <a:srgbClr val="081813"/>
-          </a:solidFill>
-          <a:ln/>
-        </p:spPr>
-      </p:sp>
-      <p:pic>
-        <p:nvPicPr>
-          <p:cNvPr id="11" name="Image 1" descr="preencoded.png">    </p:cNvPr>
-          <p:cNvPicPr>
-            <a:picLocks noChangeAspect="1"/>
-          </p:cNvPicPr>
-          <p:nvPr/>
-        </p:nvPicPr>
-        <p:blipFill>
-          <a:blip r:embed="rId2"/>
-          <a:stretch>
-            <a:fillRect/>
-          </a:stretch>
-        </p:blipFill>
-        <p:spPr>
-          <a:xfrm>
-            <a:off x="6492240" y="2715768"/>
-            <a:ext cx="329184" cy="329184"/>
-          </a:xfrm>
-          <a:prstGeom prst="rect">
-            <a:avLst/>
-          </a:prstGeom>
-        </p:spPr>
-      </p:pic>
-      <p:sp>
-        <p:nvSpPr>
-          <p:cNvPr id="12" name="Text 8"/>
-          <p:cNvSpPr txBox="1"/>
-          <p:nvPr/>
-        </p:nvSpPr>
-        <p:spPr>
-          <a:xfrm>
-            <a:off x="7114032" y="2514600"/>
-            <a:ext cx="4206240" cy="365760"/>
-          </a:xfrm>
-          <a:prstGeom prst="rect">
-            <a:avLst/>
-          </a:prstGeom>
-          <a:noFill/>
-          <a:ln/>
-        </p:spPr>
-        <p:txBody>
-          <a:bodyPr wrap="square" lIns="0" tIns="0" rIns="0" bIns="0" rtlCol="0" anchor="ctr"/>
-          <a:lstStyle/>
-          <a:p>
-            <a:pPr indent="0" marL="0">
-              <a:buNone/>
-            </a:pPr>
-            <a:r>
-              <a:rPr lang="en-US" sz="1550" b="1" dirty="0">
-                <a:solidFill>
-                  <a:srgbClr val="081813"/>
-                </a:solidFill>
-                <a:latin typeface="Arial" pitchFamily="34" charset="0"/>
-                <a:ea typeface="Arial" pitchFamily="34" charset="-122"/>
-                <a:cs typeface="Arial" pitchFamily="34" charset="-120"/>
-              </a:rPr>
-              <a:t>Honest by construction</a:t>
-            </a:r>
-            <a:endParaRPr lang="en-US" sz="1550" dirty="0"/>
-          </a:p>
-        </p:txBody>
-      </p:sp>
-      <p:sp>
-        <p:nvSpPr>
-          <p:cNvPr id="13" name="Text 9"/>
-          <p:cNvSpPr txBox="1"/>
-          <p:nvPr/>
-        </p:nvSpPr>
-        <p:spPr>
-          <a:xfrm>
-            <a:off x="7114032" y="2898648"/>
-            <a:ext cx="4224528" cy="685800"/>
-          </a:xfrm>
-          <a:prstGeom prst="rect">
-            <a:avLst/>
-          </a:prstGeom>
-          <a:noFill/>
-          <a:ln/>
-        </p:spPr>
-        <p:txBody>
-          <a:bodyPr wrap="square" lIns="0" tIns="0" rIns="0" bIns="0" rtlCol="0" anchor="ctr"/>
-          <a:lstStyle/>
-          <a:p>
+              <a:t>“Pay only when your merchant gets paid.”  </a:t>
+            </a:r>
             <a:pPr indent="0" marL="0">
               <a:lnSpc>
-                <a:spcPct val="108000"/>
+                <a:spcPct val="112000"/>
               </a:lnSpc>
               <a:buNone/>
             </a:pPr>
             <a:r>
-              <a:rPr lang="en-US" sz="1230" dirty="0">
-                <a:solidFill>
-                  <a:srgbClr val="5A6A5E"/>
+              <a:rPr lang="en-US" sz="1350" dirty="0">
+                <a:solidFill>
+                  <a:srgbClr val="E9E4D5"/>
                 </a:solidFill>
                 <a:latin typeface="Calibri" pitchFamily="34" charset="0"/>
                 <a:ea typeface="Calibri" pitchFamily="34" charset="-122"/>
                 <a:cs typeface="Calibri" pitchFamily="34" charset="-120"/>
               </a:rPr>
-              <a:t>No fabricated proof; the coverage numbers come straight from the live registry.</a:t>
-            </a:r>
-            <a:endParaRPr lang="en-US" sz="1230" dirty="0"/>
-          </a:p>
-        </p:txBody>
-      </p:sp>
-      <p:sp>
-        <p:nvSpPr>
-          <p:cNvPr id="14" name="Shape 10"/>
-          <p:cNvSpPr/>
-          <p:nvPr/>
-        </p:nvSpPr>
-        <p:spPr>
-          <a:xfrm>
-            <a:off x="566928" y="3931920"/>
-            <a:ext cx="5349240" cy="1371600"/>
-          </a:xfrm>
-          <a:prstGeom prst="roundRect">
-            <a:avLst>
-              <a:gd name="adj" fmla="val 6667"/>
-            </a:avLst>
-          </a:prstGeom>
-          <a:solidFill>
-            <a:srgbClr val="FFFFFF"/>
-          </a:solidFill>
-          <a:ln w="12700">
-            <a:solidFill>
-              <a:srgbClr val="E4DCC6"/>
-            </a:solidFill>
-            <a:prstDash val="solid"/>
-          </a:ln>
-        </p:spPr>
-      </p:sp>
-      <p:sp>
-        <p:nvSpPr>
-          <p:cNvPr id="15" name="Shape 11"/>
-          <p:cNvSpPr/>
-          <p:nvPr/>
-        </p:nvSpPr>
-        <p:spPr>
-          <a:xfrm>
-            <a:off x="804672" y="4206240"/>
-            <a:ext cx="548640" cy="548640"/>
-          </a:xfrm>
-          <a:prstGeom prst="roundRect">
-            <a:avLst>
-              <a:gd name="adj" fmla="val 16667"/>
-            </a:avLst>
-          </a:prstGeom>
-          <a:solidFill>
-            <a:srgbClr val="081813"/>
-          </a:solidFill>
-          <a:ln/>
-        </p:spPr>
-      </p:sp>
-      <p:pic>
-        <p:nvPicPr>
-          <p:cNvPr id="16" name="Image 2" descr="preencoded.png">    </p:cNvPr>
-          <p:cNvPicPr>
-            <a:picLocks noChangeAspect="1"/>
-          </p:cNvPicPr>
-          <p:nvPr/>
-        </p:nvPicPr>
-        <p:blipFill>
-          <a:blip r:embed="rId3"/>
-          <a:stretch>
-            <a:fillRect/>
-          </a:stretch>
-        </p:blipFill>
-        <p:spPr>
-          <a:xfrm>
-            <a:off x="914400" y="4315968"/>
-            <a:ext cx="329184" cy="329184"/>
-          </a:xfrm>
-          <a:prstGeom prst="rect">
-            <a:avLst/>
-          </a:prstGeom>
-        </p:spPr>
-      </p:pic>
-      <p:sp>
-        <p:nvSpPr>
-          <p:cNvPr id="17" name="Text 12"/>
-          <p:cNvSpPr txBox="1"/>
-          <p:nvPr/>
-        </p:nvSpPr>
-        <p:spPr>
-          <a:xfrm>
-            <a:off x="1536192" y="4114800"/>
-            <a:ext cx="4206240" cy="365760"/>
-          </a:xfrm>
-          <a:prstGeom prst="rect">
-            <a:avLst/>
-          </a:prstGeom>
-          <a:noFill/>
-          <a:ln/>
-        </p:spPr>
-        <p:txBody>
-          <a:bodyPr wrap="square" lIns="0" tIns="0" rIns="0" bIns="0" rtlCol="0" anchor="ctr"/>
-          <a:lstStyle/>
-          <a:p>
-            <a:pPr indent="0" marL="0">
-              <a:buNone/>
-            </a:pPr>
-            <a:r>
-              <a:rPr lang="en-US" sz="1550" b="1" dirty="0">
-                <a:solidFill>
-                  <a:srgbClr val="081813"/>
-                </a:solidFill>
-                <a:latin typeface="Arial" pitchFamily="34" charset="0"/>
-                <a:ea typeface="Arial" pitchFamily="34" charset="-122"/>
-                <a:cs typeface="Arial" pitchFamily="34" charset="-120"/>
-              </a:rPr>
-              <a:t>You never move money</a:t>
-            </a:r>
-            <a:endParaRPr lang="en-US" sz="1550" dirty="0"/>
-          </a:p>
-        </p:txBody>
-      </p:sp>
-      <p:sp>
-        <p:nvSpPr>
-          <p:cNvPr id="18" name="Text 13"/>
-          <p:cNvSpPr txBox="1"/>
-          <p:nvPr/>
-        </p:nvSpPr>
-        <p:spPr>
-          <a:xfrm>
-            <a:off x="1536192" y="4498848"/>
-            <a:ext cx="4224528" cy="685800"/>
-          </a:xfrm>
-          <a:prstGeom prst="rect">
-            <a:avLst/>
-          </a:prstGeom>
-          <a:noFill/>
-          <a:ln/>
-        </p:spPr>
-        <p:txBody>
-          <a:bodyPr wrap="square" lIns="0" tIns="0" rIns="0" bIns="0" rtlCol="0" anchor="ctr"/>
-          <a:lstStyle/>
-          <a:p>
-            <a:pPr indent="0" marL="0">
-              <a:lnSpc>
-                <a:spcPct val="108000"/>
-              </a:lnSpc>
-              <a:buNone/>
-            </a:pPr>
-            <a:r>
-              <a:rPr lang="en-US" sz="1230" dirty="0">
-                <a:solidFill>
-                  <a:srgbClr val="5A6A5E"/>
-                </a:solidFill>
-                <a:latin typeface="Calibri" pitchFamily="34" charset="0"/>
-                <a:ea typeface="Calibri" pitchFamily="34" charset="-122"/>
-                <a:cs typeface="Calibri" pitchFamily="34" charset="-120"/>
-              </a:rPr>
-              <a:t>KODA verifies payments and makes you first to know — funds go straight to your wallet.</a:t>
-            </a:r>
-            <a:endParaRPr lang="en-US" sz="1230" dirty="0"/>
-          </a:p>
-        </p:txBody>
-      </p:sp>
-      <p:sp>
-        <p:nvSpPr>
-          <p:cNvPr id="19" name="Shape 14"/>
-          <p:cNvSpPr/>
-          <p:nvPr/>
-        </p:nvSpPr>
-        <p:spPr>
-          <a:xfrm>
-            <a:off x="6144768" y="3931920"/>
-            <a:ext cx="5349240" cy="1371600"/>
-          </a:xfrm>
-          <a:prstGeom prst="roundRect">
-            <a:avLst>
-              <a:gd name="adj" fmla="val 6667"/>
-            </a:avLst>
-          </a:prstGeom>
-          <a:solidFill>
-            <a:srgbClr val="FFFFFF"/>
-          </a:solidFill>
-          <a:ln w="12700">
-            <a:solidFill>
-              <a:srgbClr val="E4DCC6"/>
-            </a:solidFill>
-            <a:prstDash val="solid"/>
-          </a:ln>
-        </p:spPr>
-      </p:sp>
-      <p:sp>
-        <p:nvSpPr>
-          <p:cNvPr id="20" name="Shape 15"/>
-          <p:cNvSpPr/>
-          <p:nvPr/>
-        </p:nvSpPr>
-        <p:spPr>
-          <a:xfrm>
-            <a:off x="6382512" y="4206240"/>
-            <a:ext cx="548640" cy="548640"/>
-          </a:xfrm>
-          <a:prstGeom prst="roundRect">
-            <a:avLst>
-              <a:gd name="adj" fmla="val 16667"/>
-            </a:avLst>
-          </a:prstGeom>
-          <a:solidFill>
-            <a:srgbClr val="081813"/>
-          </a:solidFill>
-          <a:ln/>
-        </p:spPr>
-      </p:sp>
-      <p:pic>
-        <p:nvPicPr>
-          <p:cNvPr id="21" name="Image 3" descr="preencoded.png">    </p:cNvPr>
-          <p:cNvPicPr>
-            <a:picLocks noChangeAspect="1"/>
-          </p:cNvPicPr>
-          <p:nvPr/>
-        </p:nvPicPr>
-        <p:blipFill>
-          <a:blip r:embed="rId4"/>
-          <a:stretch>
-            <a:fillRect/>
-          </a:stretch>
-        </p:blipFill>
-        <p:spPr>
-          <a:xfrm>
-            <a:off x="6492240" y="4315968"/>
-            <a:ext cx="329184" cy="329184"/>
-          </a:xfrm>
-          <a:prstGeom prst="rect">
-            <a:avLst/>
-          </a:prstGeom>
-        </p:spPr>
-      </p:pic>
-      <p:sp>
-        <p:nvSpPr>
-          <p:cNvPr id="22" name="Text 16"/>
-          <p:cNvSpPr txBox="1"/>
-          <p:nvPr/>
-        </p:nvSpPr>
-        <p:spPr>
-          <a:xfrm>
-            <a:off x="7114032" y="4114800"/>
-            <a:ext cx="4206240" cy="365760"/>
-          </a:xfrm>
-          <a:prstGeom prst="rect">
-            <a:avLst/>
-          </a:prstGeom>
-          <a:noFill/>
-          <a:ln/>
-        </p:spPr>
-        <p:txBody>
-          <a:bodyPr wrap="square" lIns="0" tIns="0" rIns="0" bIns="0" rtlCol="0" anchor="ctr"/>
-          <a:lstStyle/>
-          <a:p>
-            <a:pPr indent="0" marL="0">
-              <a:buNone/>
-            </a:pPr>
-            <a:r>
-              <a:rPr lang="en-US" sz="1550" b="1" dirty="0">
-                <a:solidFill>
-                  <a:srgbClr val="081813"/>
-                </a:solidFill>
-                <a:latin typeface="Arial" pitchFamily="34" charset="0"/>
-                <a:ea typeface="Arial" pitchFamily="34" charset="-122"/>
-                <a:cs typeface="Arial" pitchFamily="34" charset="-120"/>
-              </a:rPr>
-              <a:t>Africa-wide by design</a:t>
-            </a:r>
-            <a:endParaRPr lang="en-US" sz="1550" dirty="0"/>
-          </a:p>
-        </p:txBody>
-      </p:sp>
-      <p:sp>
-        <p:nvSpPr>
-          <p:cNvPr id="23" name="Text 17"/>
-          <p:cNvSpPr txBox="1"/>
-          <p:nvPr/>
-        </p:nvSpPr>
-        <p:spPr>
-          <a:xfrm>
-            <a:off x="7114032" y="4498848"/>
-            <a:ext cx="4224528" cy="685800"/>
-          </a:xfrm>
-          <a:prstGeom prst="rect">
-            <a:avLst/>
-          </a:prstGeom>
-          <a:noFill/>
-          <a:ln/>
-        </p:spPr>
-        <p:txBody>
-          <a:bodyPr wrap="square" lIns="0" tIns="0" rIns="0" bIns="0" rtlCol="0" anchor="ctr"/>
-          <a:lstStyle/>
-          <a:p>
-            <a:pPr indent="0" marL="0">
-              <a:lnSpc>
-                <a:spcPct val="108000"/>
-              </a:lnSpc>
-              <a:buNone/>
-            </a:pPr>
-            <a:r>
-              <a:rPr lang="en-US" sz="1230" dirty="0">
-                <a:solidFill>
-                  <a:srgbClr val="5A6A5E"/>
-                </a:solidFill>
-                <a:latin typeface="Calibri" pitchFamily="34" charset="0"/>
-                <a:ea typeface="Calibri" pitchFamily="34" charset="-122"/>
-                <a:cs typeface="Calibri" pitchFamily="34" charset="-120"/>
-              </a:rPr>
-              <a:t>DRC-first, and every operator sharing one SMS grammar unlocks its whole map at once.</a:t>
-            </a:r>
-            <a:endParaRPr lang="en-US" sz="1230" dirty="0"/>
-          </a:p>
-        </p:txBody>
-      </p:sp>
-      <p:sp>
-        <p:nvSpPr>
-          <p:cNvPr id="24" name="Text 18"/>
+              <a:t>Start free forever — 10 verifications a month, no card. Beyond your quota, prepaid ACU (topped up via mobile money, verified by KODA’s own engine) covers overage. A plan’s included rate always beats pay-as-you-go.</a:t>
+            </a:r>
+            <a:endParaRPr lang="en-US" sz="1350" dirty="0"/>
+          </a:p>
+        </p:txBody>
+      </p:sp>
+      <p:sp>
+        <p:nvSpPr>
+          <p:cNvPr id="31" name="Text 29"/>
           <p:cNvSpPr txBox="1"/>
           <p:nvPr/>
         </p:nvSpPr>
@@ -3663,19 +4088,33 @@
           <a:bodyPr wrap="square" lIns="0" tIns="0" rIns="0" bIns="0" rtlCol="0" anchor="ctr"/>
           <a:lstStyle/>
           <a:p>
-            <a:pPr indent="0" marL="0">
-              <a:buNone/>
-            </a:pPr>
-            <a:r>
-              <a:rPr lang="en-US" sz="950" dirty="0">
-                <a:solidFill>
-                  <a:srgbClr val="8A968C"/>
+            <a:pPr algn="l" indent="0" marL="0">
+              <a:buNone/>
+            </a:pPr>
+            <a:r>
+              <a:rPr lang="en-US" sz="950" b="1" dirty="0">
+                <a:solidFill>
+                  <a:srgbClr val="E8A11F"/>
                 </a:solidFill>
                 <a:latin typeface="Courier New" pitchFamily="34" charset="0"/>
                 <a:ea typeface="Courier New" pitchFamily="34" charset="-122"/>
                 <a:cs typeface="Courier New" pitchFamily="34" charset="-120"/>
               </a:rPr>
-              <a:t>kodajnn.com   ·   Groupe Nseya Digital  ·  Kinshasa, DR Congo</a:t>
+              <a:t>kodajnn.com</a:t>
+            </a:r>
+            <a:pPr algn="l" indent="0" marL="0">
+              <a:buNone/>
+            </a:pPr>
+            <a:r>
+              <a:rPr lang="en-US" sz="950" dirty="0">
+                <a:solidFill>
+                  <a:srgbClr val="9BA79B"/>
+                </a:solidFill>
+                <a:latin typeface="Courier New" pitchFamily="34" charset="0"/>
+                <a:ea typeface="Courier New" pitchFamily="34" charset="-122"/>
+                <a:cs typeface="Courier New" pitchFamily="34" charset="-120"/>
+              </a:rPr>
+              <a:t>   ·   Groupe Nseya Digital  ·  Kinshasa, DR Congo</a:t>
             </a:r>
             <a:endParaRPr lang="en-US" sz="950" dirty="0"/>
           </a:p>
@@ -3721,8 +4160,47 @@
         </p:nvSpPr>
         <p:spPr>
           <a:xfrm>
-            <a:off x="566928" y="1371600"/>
-            <a:ext cx="7315200" cy="1005840"/>
+            <a:off x="566928" y="640080"/>
+            <a:ext cx="9144000" cy="274320"/>
+          </a:xfrm>
+          <a:prstGeom prst="rect">
+            <a:avLst/>
+          </a:prstGeom>
+          <a:noFill/>
+          <a:ln/>
+        </p:spPr>
+        <p:txBody>
+          <a:bodyPr wrap="square" lIns="0" tIns="0" rIns="0" bIns="0" rtlCol="0" anchor="ctr"/>
+          <a:lstStyle/>
+          <a:p>
+            <a:pPr algn="l" indent="0" marL="0">
+              <a:buNone/>
+            </a:pPr>
+            <a:r>
+              <a:rPr lang="en-US" sz="1150" b="1" spc="300" kern="0" dirty="0">
+                <a:solidFill>
+                  <a:srgbClr val="E8A11F"/>
+                </a:solidFill>
+                <a:latin typeface="Courier New" pitchFamily="34" charset="0"/>
+                <a:ea typeface="Courier New" pitchFamily="34" charset="-122"/>
+                <a:cs typeface="Courier New" pitchFamily="34" charset="-120"/>
+              </a:rPr>
+              <a:t>START IN THE NEXT 10 MINUTES</a:t>
+            </a:r>
+            <a:endParaRPr lang="en-US" sz="1150" dirty="0"/>
+          </a:p>
+        </p:txBody>
+      </p:sp>
+      <p:sp>
+        <p:nvSpPr>
+          <p:cNvPr id="3" name="Text 1"/>
+          <p:cNvSpPr txBox="1"/>
+          <p:nvPr/>
+        </p:nvSpPr>
+        <p:spPr>
+          <a:xfrm>
+            <a:off x="566928" y="960120"/>
+            <a:ext cx="10972800" cy="640080"/>
           </a:xfrm>
           <a:prstGeom prst="rect">
             <a:avLst/>
@@ -3738,69 +4216,123 @@
               <a:buNone/>
             </a:pPr>
             <a:r>
-              <a:rPr lang="en-US" sz="6000" b="1" spc="500" kern="0" dirty="0">
-                <a:solidFill>
-                  <a:srgbClr val="E8A11F"/>
+              <a:rPr lang="en-US" sz="3400" b="1" dirty="0">
+                <a:solidFill>
+                  <a:srgbClr val="E9E4D5"/>
                 </a:solidFill>
                 <a:latin typeface="Arial" pitchFamily="34" charset="0"/>
                 <a:ea typeface="Arial" pitchFamily="34" charset="-122"/>
                 <a:cs typeface="Arial" pitchFamily="34" charset="-120"/>
               </a:rPr>
-              <a:t>KODA</a:t>
-            </a:r>
-            <a:endParaRPr lang="en-US" sz="6000" dirty="0"/>
-          </a:p>
-        </p:txBody>
-      </p:sp>
-      <p:sp>
-        <p:nvSpPr>
-          <p:cNvPr id="3" name="Text 1"/>
-          <p:cNvSpPr txBox="1"/>
-          <p:nvPr/>
-        </p:nvSpPr>
-        <p:spPr>
-          <a:xfrm>
-            <a:off x="566928" y="2514600"/>
-            <a:ext cx="10972800" cy="914400"/>
-          </a:xfrm>
-          <a:prstGeom prst="rect">
-            <a:avLst/>
-          </a:prstGeom>
-          <a:noFill/>
-          <a:ln/>
-        </p:spPr>
-        <p:txBody>
-          <a:bodyPr wrap="square" lIns="0" tIns="0" rIns="0" bIns="0" rtlCol="0" anchor="ctr"/>
-          <a:lstStyle/>
-          <a:p>
-            <a:pPr indent="0" marL="0">
-              <a:buNone/>
-            </a:pPr>
-            <a:r>
-              <a:rPr lang="en-US" sz="4600" b="1" dirty="0">
-                <a:solidFill>
-                  <a:srgbClr val="E9E4D5"/>
+              <a:t>Free forever. No card. No contract.</a:t>
+            </a:r>
+            <a:endParaRPr lang="en-US" sz="3400" dirty="0"/>
+          </a:p>
+        </p:txBody>
+      </p:sp>
+      <p:sp>
+        <p:nvSpPr>
+          <p:cNvPr id="4" name="Shape 2"/>
+          <p:cNvSpPr/>
+          <p:nvPr/>
+        </p:nvSpPr>
+        <p:spPr>
+          <a:xfrm>
+            <a:off x="566928" y="2286000"/>
+            <a:ext cx="3503066" cy="2651760"/>
+          </a:xfrm>
+          <a:prstGeom prst="roundRect">
+            <a:avLst>
+              <a:gd name="adj" fmla="val 3793"/>
+            </a:avLst>
+          </a:prstGeom>
+          <a:solidFill>
+            <a:srgbClr val="123027"/>
+          </a:solidFill>
+          <a:ln w="12700">
+            <a:solidFill>
+              <a:srgbClr val="2A4034"/>
+            </a:solidFill>
+            <a:prstDash val="solid"/>
+          </a:ln>
+          <a:effectLst>
+            <a:outerShdw sx="100000" sy="100000" kx="0" ky="0" algn="bl" rotWithShape="0" blurRad="127000" dist="50800" dir="5400000">
+              <a:srgbClr val="000000">
+                <a:alpha val="35000"/>
+              </a:srgbClr>
+            </a:outerShdw>
+          </a:effectLst>
+        </p:spPr>
+      </p:sp>
+      <p:sp>
+        <p:nvSpPr>
+          <p:cNvPr id="5" name="Shape 3"/>
+          <p:cNvSpPr/>
+          <p:nvPr/>
+        </p:nvSpPr>
+        <p:spPr>
+          <a:xfrm>
+            <a:off x="841248" y="2578608"/>
+            <a:ext cx="658368" cy="658368"/>
+          </a:xfrm>
+          <a:prstGeom prst="ellipse">
+            <a:avLst/>
+          </a:prstGeom>
+          <a:solidFill>
+            <a:srgbClr val="E8A11F"/>
+          </a:solidFill>
+          <a:ln/>
+        </p:spPr>
+      </p:sp>
+      <p:sp>
+        <p:nvSpPr>
+          <p:cNvPr id="6" name="Text 4"/>
+          <p:cNvSpPr txBox="1"/>
+          <p:nvPr/>
+        </p:nvSpPr>
+        <p:spPr>
+          <a:xfrm>
+            <a:off x="841248" y="2578608"/>
+            <a:ext cx="658368" cy="658368"/>
+          </a:xfrm>
+          <a:prstGeom prst="rect">
+            <a:avLst/>
+          </a:prstGeom>
+          <a:noFill/>
+          <a:ln/>
+        </p:spPr>
+        <p:txBody>
+          <a:bodyPr wrap="square" lIns="0" tIns="0" rIns="0" bIns="0" rtlCol="0" anchor="ctr"/>
+          <a:lstStyle/>
+          <a:p>
+            <a:pPr algn="ctr" indent="0" marL="0">
+              <a:buNone/>
+            </a:pPr>
+            <a:r>
+              <a:rPr lang="en-US" sz="2600" b="1" dirty="0">
+                <a:solidFill>
+                  <a:srgbClr val="081813"/>
                 </a:solidFill>
                 <a:latin typeface="Arial" pitchFamily="34" charset="0"/>
                 <a:ea typeface="Arial" pitchFamily="34" charset="-122"/>
                 <a:cs typeface="Arial" pitchFamily="34" charset="-120"/>
               </a:rPr>
-              <a:t>Verify your first payment free.</a:t>
-            </a:r>
-            <a:endParaRPr lang="en-US" sz="4600" dirty="0"/>
-          </a:p>
-        </p:txBody>
-      </p:sp>
-      <p:sp>
-        <p:nvSpPr>
-          <p:cNvPr id="4" name="Text 2"/>
-          <p:cNvSpPr txBox="1"/>
-          <p:nvPr/>
-        </p:nvSpPr>
-        <p:spPr>
-          <a:xfrm>
-            <a:off x="566928" y="3520440"/>
-            <a:ext cx="10972800" cy="548640"/>
+              <a:t>1</a:t>
+            </a:r>
+            <a:endParaRPr lang="en-US" sz="2600" dirty="0"/>
+          </a:p>
+        </p:txBody>
+      </p:sp>
+      <p:sp>
+        <p:nvSpPr>
+          <p:cNvPr id="7" name="Text 5"/>
+          <p:cNvSpPr txBox="1"/>
+          <p:nvPr/>
+        </p:nvSpPr>
+        <p:spPr>
+          <a:xfrm>
+            <a:off x="841248" y="3383280"/>
+            <a:ext cx="2954426" cy="640080"/>
           </a:xfrm>
           <a:prstGeom prst="rect">
             <a:avLst/>
@@ -3816,17 +4348,693 @@
               <a:buNone/>
             </a:pPr>
             <a:r>
-              <a:rPr lang="en-US" sz="1900" i="1" dirty="0">
+              <a:rPr lang="en-US" sz="1700" b="1" dirty="0">
                 <a:solidFill>
                   <a:srgbClr val="F2B944"/>
+                </a:solidFill>
+                <a:latin typeface="Arial" pitchFamily="34" charset="0"/>
+                <a:ea typeface="Arial" pitchFamily="34" charset="-122"/>
+                <a:cs typeface="Arial" pitchFamily="34" charset="-120"/>
+              </a:rPr>
+              <a:t>Sign up free</a:t>
+            </a:r>
+            <a:endParaRPr lang="en-US" sz="1700" dirty="0"/>
+          </a:p>
+        </p:txBody>
+      </p:sp>
+      <p:sp>
+        <p:nvSpPr>
+          <p:cNvPr id="8" name="Text 6"/>
+          <p:cNvSpPr txBox="1"/>
+          <p:nvPr/>
+        </p:nvSpPr>
+        <p:spPr>
+          <a:xfrm>
+            <a:off x="841248" y="3977640"/>
+            <a:ext cx="2954426" cy="822960"/>
+          </a:xfrm>
+          <a:prstGeom prst="rect">
+            <a:avLst/>
+          </a:prstGeom>
+          <a:noFill/>
+          <a:ln/>
+        </p:spPr>
+        <p:txBody>
+          <a:bodyPr wrap="square" lIns="0" tIns="0" rIns="0" bIns="0" rtlCol="0" anchor="ctr"/>
+          <a:lstStyle/>
+          <a:p>
+            <a:pPr indent="0" marL="0">
+              <a:lnSpc>
+                <a:spcPct val="112000"/>
+              </a:lnSpc>
+              <a:buNone/>
+            </a:pPr>
+            <a:r>
+              <a:rPr lang="en-US" sz="1250" dirty="0">
+                <a:solidFill>
+                  <a:srgbClr val="9BA79B"/>
                 </a:solidFill>
                 <a:latin typeface="Calibri" pitchFamily="34" charset="0"/>
                 <a:ea typeface="Calibri" pitchFamily="34" charset="-122"/>
                 <a:cs typeface="Calibri" pitchFamily="34" charset="-120"/>
               </a:rPr>
-              <a:t>A screenshot can be faked. The SMS can’t.</a:t>
-            </a:r>
-            <a:endParaRPr lang="en-US" sz="1900" dirty="0"/>
+              <a:t>Create your account in a minute — 10 verifications every month, free for life.</a:t>
+            </a:r>
+            <a:endParaRPr lang="en-US" sz="1250" dirty="0"/>
+          </a:p>
+        </p:txBody>
+      </p:sp>
+      <p:sp>
+        <p:nvSpPr>
+          <p:cNvPr id="9" name="Shape 7"/>
+          <p:cNvSpPr/>
+          <p:nvPr/>
+        </p:nvSpPr>
+        <p:spPr>
+          <a:xfrm>
+            <a:off x="4344314" y="2286000"/>
+            <a:ext cx="3503066" cy="2651760"/>
+          </a:xfrm>
+          <a:prstGeom prst="roundRect">
+            <a:avLst>
+              <a:gd name="adj" fmla="val 3793"/>
+            </a:avLst>
+          </a:prstGeom>
+          <a:solidFill>
+            <a:srgbClr val="123027"/>
+          </a:solidFill>
+          <a:ln w="12700">
+            <a:solidFill>
+              <a:srgbClr val="2A4034"/>
+            </a:solidFill>
+            <a:prstDash val="solid"/>
+          </a:ln>
+          <a:effectLst>
+            <a:outerShdw sx="100000" sy="100000" kx="0" ky="0" algn="bl" rotWithShape="0" blurRad="127000" dist="50800" dir="5400000">
+              <a:srgbClr val="000000">
+                <a:alpha val="35000"/>
+              </a:srgbClr>
+            </a:outerShdw>
+          </a:effectLst>
+        </p:spPr>
+      </p:sp>
+      <p:sp>
+        <p:nvSpPr>
+          <p:cNvPr id="10" name="Shape 8"/>
+          <p:cNvSpPr/>
+          <p:nvPr/>
+        </p:nvSpPr>
+        <p:spPr>
+          <a:xfrm>
+            <a:off x="4618634" y="2578608"/>
+            <a:ext cx="658368" cy="658368"/>
+          </a:xfrm>
+          <a:prstGeom prst="ellipse">
+            <a:avLst/>
+          </a:prstGeom>
+          <a:solidFill>
+            <a:srgbClr val="E8A11F"/>
+          </a:solidFill>
+          <a:ln/>
+        </p:spPr>
+      </p:sp>
+      <p:sp>
+        <p:nvSpPr>
+          <p:cNvPr id="11" name="Text 9"/>
+          <p:cNvSpPr txBox="1"/>
+          <p:nvPr/>
+        </p:nvSpPr>
+        <p:spPr>
+          <a:xfrm>
+            <a:off x="4618634" y="2578608"/>
+            <a:ext cx="658368" cy="658368"/>
+          </a:xfrm>
+          <a:prstGeom prst="rect">
+            <a:avLst/>
+          </a:prstGeom>
+          <a:noFill/>
+          <a:ln/>
+        </p:spPr>
+        <p:txBody>
+          <a:bodyPr wrap="square" lIns="0" tIns="0" rIns="0" bIns="0" rtlCol="0" anchor="ctr"/>
+          <a:lstStyle/>
+          <a:p>
+            <a:pPr algn="ctr" indent="0" marL="0">
+              <a:buNone/>
+            </a:pPr>
+            <a:r>
+              <a:rPr lang="en-US" sz="2600" b="1" dirty="0">
+                <a:solidFill>
+                  <a:srgbClr val="081813"/>
+                </a:solidFill>
+                <a:latin typeface="Arial" pitchFamily="34" charset="0"/>
+                <a:ea typeface="Arial" pitchFamily="34" charset="-122"/>
+                <a:cs typeface="Arial" pitchFamily="34" charset="-120"/>
+              </a:rPr>
+              <a:t>2</a:t>
+            </a:r>
+            <a:endParaRPr lang="en-US" sz="2600" dirty="0"/>
+          </a:p>
+        </p:txBody>
+      </p:sp>
+      <p:sp>
+        <p:nvSpPr>
+          <p:cNvPr id="12" name="Text 10"/>
+          <p:cNvSpPr txBox="1"/>
+          <p:nvPr/>
+        </p:nvSpPr>
+        <p:spPr>
+          <a:xfrm>
+            <a:off x="4618634" y="3383280"/>
+            <a:ext cx="2954426" cy="640080"/>
+          </a:xfrm>
+          <a:prstGeom prst="rect">
+            <a:avLst/>
+          </a:prstGeom>
+          <a:noFill/>
+          <a:ln/>
+        </p:spPr>
+        <p:txBody>
+          <a:bodyPr wrap="square" lIns="0" tIns="0" rIns="0" bIns="0" rtlCol="0" anchor="ctr"/>
+          <a:lstStyle/>
+          <a:p>
+            <a:pPr indent="0" marL="0">
+              <a:buNone/>
+            </a:pPr>
+            <a:r>
+              <a:rPr lang="en-US" sz="1700" b="1" dirty="0">
+                <a:solidFill>
+                  <a:srgbClr val="F2B944"/>
+                </a:solidFill>
+                <a:latin typeface="Arial" pitchFamily="34" charset="0"/>
+                <a:ea typeface="Arial" pitchFamily="34" charset="-122"/>
+                <a:cs typeface="Arial" pitchFamily="34" charset="-120"/>
+              </a:rPr>
+              <a:t>Add your mobile-money number</a:t>
+            </a:r>
+            <a:endParaRPr lang="en-US" sz="1700" dirty="0"/>
+          </a:p>
+        </p:txBody>
+      </p:sp>
+      <p:sp>
+        <p:nvSpPr>
+          <p:cNvPr id="13" name="Text 11"/>
+          <p:cNvSpPr txBox="1"/>
+          <p:nvPr/>
+        </p:nvSpPr>
+        <p:spPr>
+          <a:xfrm>
+            <a:off x="4618634" y="3977640"/>
+            <a:ext cx="2954426" cy="822960"/>
+          </a:xfrm>
+          <a:prstGeom prst="rect">
+            <a:avLst/>
+          </a:prstGeom>
+          <a:noFill/>
+          <a:ln/>
+        </p:spPr>
+        <p:txBody>
+          <a:bodyPr wrap="square" lIns="0" tIns="0" rIns="0" bIns="0" rtlCol="0" anchor="ctr"/>
+          <a:lstStyle/>
+          <a:p>
+            <a:pPr indent="0" marL="0">
+              <a:lnSpc>
+                <a:spcPct val="112000"/>
+              </a:lnSpc>
+              <a:buNone/>
+            </a:pPr>
+            <a:r>
+              <a:rPr lang="en-US" sz="1250" dirty="0">
+                <a:solidFill>
+                  <a:srgbClr val="9BA79B"/>
+                </a:solidFill>
+                <a:latin typeface="Calibri" pitchFamily="34" charset="0"/>
+                <a:ea typeface="Calibri" pitchFamily="34" charset="-122"/>
+                <a:cs typeface="Calibri" pitchFamily="34" charset="-120"/>
+              </a:rPr>
+              <a:t>The merchant number the operator’s confirmation SMS already lands on.</a:t>
+            </a:r>
+            <a:endParaRPr lang="en-US" sz="1250" dirty="0"/>
+          </a:p>
+        </p:txBody>
+      </p:sp>
+      <p:sp>
+        <p:nvSpPr>
+          <p:cNvPr id="14" name="Shape 12"/>
+          <p:cNvSpPr/>
+          <p:nvPr/>
+        </p:nvSpPr>
+        <p:spPr>
+          <a:xfrm>
+            <a:off x="8121701" y="2286000"/>
+            <a:ext cx="3503066" cy="2651760"/>
+          </a:xfrm>
+          <a:prstGeom prst="roundRect">
+            <a:avLst>
+              <a:gd name="adj" fmla="val 3793"/>
+            </a:avLst>
+          </a:prstGeom>
+          <a:solidFill>
+            <a:srgbClr val="123027"/>
+          </a:solidFill>
+          <a:ln w="12700">
+            <a:solidFill>
+              <a:srgbClr val="2A4034"/>
+            </a:solidFill>
+            <a:prstDash val="solid"/>
+          </a:ln>
+          <a:effectLst>
+            <a:outerShdw sx="100000" sy="100000" kx="0" ky="0" algn="bl" rotWithShape="0" blurRad="127000" dist="50800" dir="5400000">
+              <a:srgbClr val="000000">
+                <a:alpha val="35000"/>
+              </a:srgbClr>
+            </a:outerShdw>
+          </a:effectLst>
+        </p:spPr>
+      </p:sp>
+      <p:sp>
+        <p:nvSpPr>
+          <p:cNvPr id="15" name="Shape 13"/>
+          <p:cNvSpPr/>
+          <p:nvPr/>
+        </p:nvSpPr>
+        <p:spPr>
+          <a:xfrm>
+            <a:off x="8396021" y="2578608"/>
+            <a:ext cx="658368" cy="658368"/>
+          </a:xfrm>
+          <a:prstGeom prst="ellipse">
+            <a:avLst/>
+          </a:prstGeom>
+          <a:solidFill>
+            <a:srgbClr val="E8A11F"/>
+          </a:solidFill>
+          <a:ln/>
+        </p:spPr>
+      </p:sp>
+      <p:sp>
+        <p:nvSpPr>
+          <p:cNvPr id="16" name="Text 14"/>
+          <p:cNvSpPr txBox="1"/>
+          <p:nvPr/>
+        </p:nvSpPr>
+        <p:spPr>
+          <a:xfrm>
+            <a:off x="8396021" y="2578608"/>
+            <a:ext cx="658368" cy="658368"/>
+          </a:xfrm>
+          <a:prstGeom prst="rect">
+            <a:avLst/>
+          </a:prstGeom>
+          <a:noFill/>
+          <a:ln/>
+        </p:spPr>
+        <p:txBody>
+          <a:bodyPr wrap="square" lIns="0" tIns="0" rIns="0" bIns="0" rtlCol="0" anchor="ctr"/>
+          <a:lstStyle/>
+          <a:p>
+            <a:pPr algn="ctr" indent="0" marL="0">
+              <a:buNone/>
+            </a:pPr>
+            <a:r>
+              <a:rPr lang="en-US" sz="2600" b="1" dirty="0">
+                <a:solidFill>
+                  <a:srgbClr val="081813"/>
+                </a:solidFill>
+                <a:latin typeface="Arial" pitchFamily="34" charset="0"/>
+                <a:ea typeface="Arial" pitchFamily="34" charset="-122"/>
+                <a:cs typeface="Arial" pitchFamily="34" charset="-120"/>
+              </a:rPr>
+              <a:t>3</a:t>
+            </a:r>
+            <a:endParaRPr lang="en-US" sz="2600" dirty="0"/>
+          </a:p>
+        </p:txBody>
+      </p:sp>
+      <p:sp>
+        <p:nvSpPr>
+          <p:cNvPr id="17" name="Text 15"/>
+          <p:cNvSpPr txBox="1"/>
+          <p:nvPr/>
+        </p:nvSpPr>
+        <p:spPr>
+          <a:xfrm>
+            <a:off x="8396021" y="3383280"/>
+            <a:ext cx="2954426" cy="640080"/>
+          </a:xfrm>
+          <a:prstGeom prst="rect">
+            <a:avLst/>
+          </a:prstGeom>
+          <a:noFill/>
+          <a:ln/>
+        </p:spPr>
+        <p:txBody>
+          <a:bodyPr wrap="square" lIns="0" tIns="0" rIns="0" bIns="0" rtlCol="0" anchor="ctr"/>
+          <a:lstStyle/>
+          <a:p>
+            <a:pPr indent="0" marL="0">
+              <a:buNone/>
+            </a:pPr>
+            <a:r>
+              <a:rPr lang="en-US" sz="1700" b="1" dirty="0">
+                <a:solidFill>
+                  <a:srgbClr val="F2B944"/>
+                </a:solidFill>
+                <a:latin typeface="Arial" pitchFamily="34" charset="0"/>
+                <a:ea typeface="Arial" pitchFamily="34" charset="-122"/>
+                <a:cs typeface="Arial" pitchFamily="34" charset="-120"/>
+              </a:rPr>
+              <a:t>Verify your first payment</a:t>
+            </a:r>
+            <a:endParaRPr lang="en-US" sz="1700" dirty="0"/>
+          </a:p>
+        </p:txBody>
+      </p:sp>
+      <p:sp>
+        <p:nvSpPr>
+          <p:cNvPr id="18" name="Text 16"/>
+          <p:cNvSpPr txBox="1"/>
+          <p:nvPr/>
+        </p:nvSpPr>
+        <p:spPr>
+          <a:xfrm>
+            <a:off x="8396021" y="3977640"/>
+            <a:ext cx="2954426" cy="822960"/>
+          </a:xfrm>
+          <a:prstGeom prst="rect">
+            <a:avLst/>
+          </a:prstGeom>
+          <a:noFill/>
+          <a:ln/>
+        </p:spPr>
+        <p:txBody>
+          <a:bodyPr wrap="square" lIns="0" tIns="0" rIns="0" bIns="0" rtlCol="0" anchor="ctr"/>
+          <a:lstStyle/>
+          <a:p>
+            <a:pPr indent="0" marL="0">
+              <a:lnSpc>
+                <a:spcPct val="112000"/>
+              </a:lnSpc>
+              <a:buNone/>
+            </a:pPr>
+            <a:r>
+              <a:rPr lang="en-US" sz="1250" dirty="0">
+                <a:solidFill>
+                  <a:srgbClr val="9BA79B"/>
+                </a:solidFill>
+                <a:latin typeface="Calibri" pitchFamily="34" charset="0"/>
+                <a:ea typeface="Calibri" pitchFamily="34" charset="-122"/>
+                <a:cs typeface="Calibri" pitchFamily="34" charset="-120"/>
+              </a:rPr>
+              <a:t>Paste the customer’s code — a fraud-checked verdict in about three seconds.</a:t>
+            </a:r>
+            <a:endParaRPr lang="en-US" sz="1250" dirty="0"/>
+          </a:p>
+        </p:txBody>
+      </p:sp>
+      <p:sp>
+        <p:nvSpPr>
+          <p:cNvPr id="19" name="Shape 17"/>
+          <p:cNvSpPr/>
+          <p:nvPr/>
+        </p:nvSpPr>
+        <p:spPr>
+          <a:xfrm>
+            <a:off x="566928" y="5257800"/>
+            <a:ext cx="4206240" cy="566928"/>
+          </a:xfrm>
+          <a:prstGeom prst="roundRect">
+            <a:avLst>
+              <a:gd name="adj" fmla="val 50000"/>
+            </a:avLst>
+          </a:prstGeom>
+          <a:solidFill>
+            <a:srgbClr val="E8A11F"/>
+          </a:solidFill>
+          <a:ln/>
+        </p:spPr>
+      </p:sp>
+      <p:sp>
+        <p:nvSpPr>
+          <p:cNvPr id="20" name="Text 18"/>
+          <p:cNvSpPr txBox="1"/>
+          <p:nvPr/>
+        </p:nvSpPr>
+        <p:spPr>
+          <a:xfrm>
+            <a:off x="566928" y="5257800"/>
+            <a:ext cx="4206240" cy="566928"/>
+          </a:xfrm>
+          <a:prstGeom prst="rect">
+            <a:avLst/>
+          </a:prstGeom>
+          <a:noFill/>
+          <a:ln/>
+        </p:spPr>
+        <p:txBody>
+          <a:bodyPr wrap="square" lIns="0" tIns="0" rIns="0" bIns="0" rtlCol="0" anchor="ctr"/>
+          <a:lstStyle/>
+          <a:p>
+            <a:pPr algn="ctr" indent="0" marL="0">
+              <a:buNone/>
+            </a:pPr>
+            <a:r>
+              <a:rPr lang="en-US" sz="1500" b="1" dirty="0">
+                <a:solidFill>
+                  <a:srgbClr val="081813"/>
+                </a:solidFill>
+                <a:latin typeface="Arial" pitchFamily="34" charset="0"/>
+                <a:ea typeface="Arial" pitchFamily="34" charset="-122"/>
+                <a:cs typeface="Arial" pitchFamily="34" charset="-120"/>
+              </a:rPr>
+              <a:t>Start free  →  kodajnn.com/app</a:t>
+            </a:r>
+            <a:endParaRPr lang="en-US" sz="1500" dirty="0"/>
+          </a:p>
+        </p:txBody>
+      </p:sp>
+      <p:sp>
+        <p:nvSpPr>
+          <p:cNvPr id="21" name="Text 19"/>
+          <p:cNvSpPr txBox="1"/>
+          <p:nvPr/>
+        </p:nvSpPr>
+        <p:spPr>
+          <a:xfrm>
+            <a:off x="566928" y="6400800"/>
+            <a:ext cx="11057839" cy="274320"/>
+          </a:xfrm>
+          <a:prstGeom prst="rect">
+            <a:avLst/>
+          </a:prstGeom>
+          <a:noFill/>
+          <a:ln/>
+        </p:spPr>
+        <p:txBody>
+          <a:bodyPr wrap="square" lIns="0" tIns="0" rIns="0" bIns="0" rtlCol="0" anchor="ctr"/>
+          <a:lstStyle/>
+          <a:p>
+            <a:pPr algn="l" indent="0" marL="0">
+              <a:buNone/>
+            </a:pPr>
+            <a:r>
+              <a:rPr lang="en-US" sz="950" b="1" dirty="0">
+                <a:solidFill>
+                  <a:srgbClr val="E8A11F"/>
+                </a:solidFill>
+                <a:latin typeface="Courier New" pitchFamily="34" charset="0"/>
+                <a:ea typeface="Courier New" pitchFamily="34" charset="-122"/>
+                <a:cs typeface="Courier New" pitchFamily="34" charset="-120"/>
+              </a:rPr>
+              <a:t>kodajnn.com</a:t>
+            </a:r>
+            <a:pPr algn="l" indent="0" marL="0">
+              <a:buNone/>
+            </a:pPr>
+            <a:r>
+              <a:rPr lang="en-US" sz="950" dirty="0">
+                <a:solidFill>
+                  <a:srgbClr val="9BA79B"/>
+                </a:solidFill>
+                <a:latin typeface="Courier New" pitchFamily="34" charset="0"/>
+                <a:ea typeface="Courier New" pitchFamily="34" charset="-122"/>
+                <a:cs typeface="Courier New" pitchFamily="34" charset="-120"/>
+              </a:rPr>
+              <a:t>   ·   Groupe Nseya Digital  ·  Kinshasa, DR Congo</a:t>
+            </a:r>
+            <a:endParaRPr lang="en-US" sz="950" dirty="0"/>
+          </a:p>
+        </p:txBody>
+      </p:sp>
+    </p:spTree>
+  </p:cSld>
+  <p:clrMapOvr>
+    <a:masterClrMapping/>
+  </p:clrMapOvr>
+</p:sld>
+</file>
+
+<file path=ppt/slides/slide13.xml><?xml version="1.0" encoding="utf-8"?>
+<p:sld xmlns:a="http://schemas.openxmlformats.org/drawingml/2006/main" xmlns:r="http://schemas.openxmlformats.org/officeDocument/2006/relationships" xmlns:p="http://schemas.openxmlformats.org/presentationml/2006/main">
+  <p:cSld name="Slide 13">
+    <p:bg>
+      <p:bgPr>
+        <a:solidFill>
+          <a:srgbClr val="081813"/>
+        </a:solidFill>
+      </p:bgPr>
+    </p:bg>
+    <p:spTree>
+      <p:nvGrpSpPr>
+        <p:cNvPr id="1" name=""/>
+        <p:cNvGrpSpPr/>
+        <p:nvPr/>
+      </p:nvGrpSpPr>
+      <p:grpSpPr>
+        <a:xfrm>
+          <a:off x="0" y="0"/>
+          <a:ext cx="0" cy="0"/>
+          <a:chOff x="0" y="0"/>
+          <a:chExt cx="0" cy="0"/>
+        </a:xfrm>
+      </p:grpSpPr>
+      <p:sp>
+        <p:nvSpPr>
+          <p:cNvPr id="2" name="Text 0"/>
+          <p:cNvSpPr txBox="1"/>
+          <p:nvPr/>
+        </p:nvSpPr>
+        <p:spPr>
+          <a:xfrm>
+            <a:off x="566928" y="1234440"/>
+            <a:ext cx="7315200" cy="1005840"/>
+          </a:xfrm>
+          <a:prstGeom prst="rect">
+            <a:avLst/>
+          </a:prstGeom>
+          <a:noFill/>
+          <a:ln/>
+        </p:spPr>
+        <p:txBody>
+          <a:bodyPr wrap="square" lIns="0" tIns="0" rIns="0" bIns="0" rtlCol="0" anchor="ctr"/>
+          <a:lstStyle/>
+          <a:p>
+            <a:pPr indent="0" marL="0">
+              <a:buNone/>
+            </a:pPr>
+            <a:r>
+              <a:rPr lang="en-US" sz="5800" b="1" spc="500" kern="0" dirty="0">
+                <a:solidFill>
+                  <a:srgbClr val="E8A11F"/>
+                </a:solidFill>
+                <a:latin typeface="Arial" pitchFamily="34" charset="0"/>
+                <a:ea typeface="Arial" pitchFamily="34" charset="-122"/>
+                <a:cs typeface="Arial" pitchFamily="34" charset="-120"/>
+              </a:rPr>
+              <a:t>KODA</a:t>
+            </a:r>
+            <a:endParaRPr lang="en-US" sz="5800" dirty="0"/>
+          </a:p>
+        </p:txBody>
+      </p:sp>
+      <p:sp>
+        <p:nvSpPr>
+          <p:cNvPr id="3" name="Text 1"/>
+          <p:cNvSpPr txBox="1"/>
+          <p:nvPr/>
+        </p:nvSpPr>
+        <p:spPr>
+          <a:xfrm>
+            <a:off x="566928" y="2331720"/>
+            <a:ext cx="10972800" cy="1371600"/>
+          </a:xfrm>
+          <a:prstGeom prst="rect">
+            <a:avLst/>
+          </a:prstGeom>
+          <a:noFill/>
+          <a:ln/>
+        </p:spPr>
+        <p:txBody>
+          <a:bodyPr wrap="square" lIns="0" tIns="0" rIns="0" bIns="0" rtlCol="0" anchor="ctr"/>
+          <a:lstStyle/>
+          <a:p>
+            <a:pPr indent="0" marL="0">
+              <a:lnSpc>
+                <a:spcPct val="98000"/>
+              </a:lnSpc>
+              <a:buNone/>
+            </a:pPr>
+            <a:r>
+              <a:rPr lang="en-US" sz="4200" b="1" dirty="0">
+                <a:solidFill>
+                  <a:srgbClr val="E9E4D5"/>
+                </a:solidFill>
+                <a:latin typeface="Arial" pitchFamily="34" charset="0"/>
+                <a:ea typeface="Arial" pitchFamily="34" charset="-122"/>
+                <a:cs typeface="Arial" pitchFamily="34" charset="-120"/>
+              </a:rPr>
+              <a:t>Verify your first payment free —</a:t>
+            </a:r>
+            <a:endParaRPr lang="en-US" sz="4200" dirty="0"/>
+          </a:p>
+          <a:p>
+            <a:pPr indent="0" marL="0">
+              <a:lnSpc>
+                <a:spcPct val="98000"/>
+              </a:lnSpc>
+              <a:buNone/>
+            </a:pPr>
+            <a:r>
+              <a:rPr lang="en-US" sz="4200" b="1" dirty="0">
+                <a:solidFill>
+                  <a:srgbClr val="E9E4D5"/>
+                </a:solidFill>
+                <a:latin typeface="Arial" pitchFamily="34" charset="0"/>
+                <a:ea typeface="Arial" pitchFamily="34" charset="-122"/>
+                <a:cs typeface="Arial" pitchFamily="34" charset="-120"/>
+              </a:rPr>
+              <a:t>right now.</a:t>
+            </a:r>
+            <a:endParaRPr lang="en-US" sz="4200" dirty="0"/>
+          </a:p>
+        </p:txBody>
+      </p:sp>
+      <p:sp>
+        <p:nvSpPr>
+          <p:cNvPr id="4" name="Text 2"/>
+          <p:cNvSpPr txBox="1"/>
+          <p:nvPr/>
+        </p:nvSpPr>
+        <p:spPr>
+          <a:xfrm>
+            <a:off x="566928" y="3794760"/>
+            <a:ext cx="10972800" cy="457200"/>
+          </a:xfrm>
+          <a:prstGeom prst="rect">
+            <a:avLst/>
+          </a:prstGeom>
+          <a:noFill/>
+          <a:ln/>
+        </p:spPr>
+        <p:txBody>
+          <a:bodyPr wrap="square" lIns="0" tIns="0" rIns="0" bIns="0" rtlCol="0" anchor="ctr"/>
+          <a:lstStyle/>
+          <a:p>
+            <a:pPr indent="0" marL="0">
+              <a:buNone/>
+            </a:pPr>
+            <a:r>
+              <a:rPr lang="en-US" sz="1700" i="1" dirty="0">
+                <a:solidFill>
+                  <a:srgbClr val="F2B944"/>
+                </a:solidFill>
+                <a:latin typeface="Calibri" pitchFamily="34" charset="0"/>
+                <a:ea typeface="Calibri" pitchFamily="34" charset="-122"/>
+                <a:cs typeface="Calibri" pitchFamily="34" charset="-120"/>
+              </a:rPr>
+              <a:t>A screenshot can be faked. The SMS can’t.  ·  Free forever, no card required.</a:t>
+            </a:r>
+            <a:endParaRPr lang="en-US" sz="1700" dirty="0"/>
           </a:p>
         </p:txBody>
       </p:sp>
@@ -3838,7 +5046,7 @@
         </p:nvSpPr>
         <p:spPr>
           <a:xfrm>
-            <a:off x="566928" y="4663440"/>
+            <a:off x="566928" y="4617720"/>
             <a:ext cx="3383280" cy="914400"/>
           </a:xfrm>
           <a:prstGeom prst="roundRect">
@@ -3872,7 +5080,7 @@
         </p:nvSpPr>
         <p:spPr>
           <a:xfrm>
-            <a:off x="841248" y="4828032"/>
+            <a:off x="841248" y="4782312"/>
             <a:ext cx="2834640" cy="274320"/>
           </a:xfrm>
           <a:prstGeom prst="rect">
@@ -3911,7 +5119,7 @@
         </p:nvSpPr>
         <p:spPr>
           <a:xfrm>
-            <a:off x="841248" y="5084064"/>
+            <a:off x="841248" y="5038344"/>
             <a:ext cx="2926080" cy="365760"/>
           </a:xfrm>
           <a:prstGeom prst="rect">
@@ -3950,7 +5158,7 @@
         </p:nvSpPr>
         <p:spPr>
           <a:xfrm>
-            <a:off x="4224528" y="4663440"/>
+            <a:off x="4224528" y="4617720"/>
             <a:ext cx="3383280" cy="914400"/>
           </a:xfrm>
           <a:prstGeom prst="roundRect">
@@ -3984,7 +5192,7 @@
         </p:nvSpPr>
         <p:spPr>
           <a:xfrm>
-            <a:off x="4498848" y="4828032"/>
+            <a:off x="4498848" y="4782312"/>
             <a:ext cx="2834640" cy="274320"/>
           </a:xfrm>
           <a:prstGeom prst="rect">
@@ -4023,7 +5231,7 @@
         </p:nvSpPr>
         <p:spPr>
           <a:xfrm>
-            <a:off x="4498848" y="5084064"/>
+            <a:off x="4498848" y="5038344"/>
             <a:ext cx="2926080" cy="365760"/>
           </a:xfrm>
           <a:prstGeom prst="rect">
@@ -4062,7 +5270,7 @@
         </p:nvSpPr>
         <p:spPr>
           <a:xfrm>
-            <a:off x="7882128" y="4663440"/>
+            <a:off x="7882128" y="4617720"/>
             <a:ext cx="3383280" cy="914400"/>
           </a:xfrm>
           <a:prstGeom prst="roundRect">
@@ -4096,7 +5304,7 @@
         </p:nvSpPr>
         <p:spPr>
           <a:xfrm>
-            <a:off x="8156448" y="4828032"/>
+            <a:off x="8156448" y="4782312"/>
             <a:ext cx="2834640" cy="274320"/>
           </a:xfrm>
           <a:prstGeom prst="rect">
@@ -4135,7 +5343,7 @@
         </p:nvSpPr>
         <p:spPr>
           <a:xfrm>
-            <a:off x="8156448" y="5084064"/>
+            <a:off x="8156448" y="5038344"/>
             <a:ext cx="2926080" cy="365760"/>
           </a:xfrm>
           <a:prstGeom prst="rect">
@@ -4174,7 +5382,7 @@
         </p:nvSpPr>
         <p:spPr>
           <a:xfrm>
-            <a:off x="566928" y="6400800"/>
+            <a:off x="566928" y="6419088"/>
             <a:ext cx="11057839" cy="274320"/>
           </a:xfrm>
           <a:prstGeom prst="rect">
@@ -4199,7 +5407,7 @@
                 <a:ea typeface="Courier New" pitchFamily="34" charset="-122"/>
                 <a:cs typeface="Courier New" pitchFamily="34" charset="-120"/>
               </a:rPr>
-              <a:t>KODA — Groupe Nseya Digital / JNN Global Ltd  ·  Kinshasa, DR Congo  ·  a payment verification service; it never holds, moves or settles funds.</a:t>
+              <a:t>KODA — a payment verification service; it never holds, moves or settles funds. Groupe Nseya Digital / JNN Global Ltd · Kinshasa, DR Congo.</a:t>
             </a:r>
             <a:endParaRPr lang="en-US" sz="850" dirty="0"/>
           </a:p>
@@ -4246,7 +5454,7 @@
         <p:spPr>
           <a:xfrm>
             <a:off x="566928" y="640080"/>
-            <a:ext cx="7315200" cy="274320"/>
+            <a:ext cx="9144000" cy="274320"/>
           </a:xfrm>
           <a:prstGeom prst="rect">
             <a:avLst/>
@@ -4304,7 +5512,7 @@
               <a:buNone/>
             </a:pPr>
             <a:r>
-              <a:rPr lang="en-US" sz="4000" b="1" dirty="0">
+              <a:rPr lang="en-US" sz="3800" b="1" dirty="0">
                 <a:solidFill>
                   <a:srgbClr val="E9E4D5"/>
                 </a:solidFill>
@@ -4312,9 +5520,9 @@
                 <a:ea typeface="Arial" pitchFamily="34" charset="-122"/>
                 <a:cs typeface="Arial" pitchFamily="34" charset="-120"/>
               </a:rPr>
-              <a:t>Commerce still ends with</a:t>
-            </a:r>
-            <a:endParaRPr lang="en-US" sz="4000" dirty="0"/>
+              <a:t>Every fake screenshot is money</a:t>
+            </a:r>
+            <a:endParaRPr lang="en-US" sz="3800" dirty="0"/>
           </a:p>
           <a:p>
             <a:pPr indent="0" marL="0">
@@ -4324,7 +5532,7 @@
               <a:buNone/>
             </a:pPr>
             <a:r>
-              <a:rPr lang="en-US" sz="4000" b="1" dirty="0">
+              <a:rPr lang="en-US" sz="3800" b="1" dirty="0">
                 <a:solidFill>
                   <a:srgbClr val="E9E4D5"/>
                 </a:solidFill>
@@ -4332,9 +5540,9 @@
                 <a:ea typeface="Arial" pitchFamily="34" charset="-122"/>
                 <a:cs typeface="Arial" pitchFamily="34" charset="-120"/>
               </a:rPr>
-              <a:t>“send me a screenshot.”</a:t>
-            </a:r>
-            <a:endParaRPr lang="en-US" sz="4000" dirty="0"/>
+              <a:t>out of your pocket.</a:t>
+            </a:r>
+            <a:endParaRPr lang="en-US" sz="3800" dirty="0"/>
           </a:p>
         </p:txBody>
       </p:sp>
@@ -4431,8 +5639,8 @@
         </p:nvSpPr>
         <p:spPr>
           <a:xfrm>
-            <a:off x="1591056" y="2843784"/>
-            <a:ext cx="5486400" cy="365760"/>
+            <a:off x="1591056" y="2834640"/>
+            <a:ext cx="5532120" cy="365760"/>
           </a:xfrm>
           <a:prstGeom prst="rect">
             <a:avLst/>
@@ -4448,7 +5656,7 @@
               <a:buNone/>
             </a:pPr>
             <a:r>
-              <a:rPr lang="en-US" sz="1600" b="1" dirty="0">
+              <a:rPr lang="en-US" sz="1550" b="1" dirty="0">
                 <a:solidFill>
                   <a:srgbClr val="E9E4D5"/>
                 </a:solidFill>
@@ -4456,9 +5664,9 @@
                 <a:ea typeface="Arial" pitchFamily="34" charset="-122"/>
                 <a:cs typeface="Arial" pitchFamily="34" charset="-120"/>
               </a:rPr>
-              <a:t>A screenshot proves nothing</a:t>
-            </a:r>
-            <a:endParaRPr lang="en-US" sz="1600" dirty="0"/>
+              <a:t>You can’t tell what’s real</a:t>
+            </a:r>
+            <a:endParaRPr lang="en-US" sz="1550" dirty="0"/>
           </a:p>
         </p:txBody>
       </p:sp>
@@ -4470,8 +5678,8 @@
         </p:nvSpPr>
         <p:spPr>
           <a:xfrm>
-            <a:off x="1591056" y="3200400"/>
-            <a:ext cx="5532120" cy="457200"/>
+            <a:off x="1591056" y="3191256"/>
+            <a:ext cx="5577840" cy="502920"/>
           </a:xfrm>
           <a:prstGeom prst="rect">
             <a:avLst/>
@@ -4484,10 +5692,13 @@
           <a:lstStyle/>
           <a:p>
             <a:pPr indent="0" marL="0">
-              <a:buNone/>
-            </a:pPr>
-            <a:r>
-              <a:rPr lang="en-US" sz="1250" dirty="0">
+              <a:lnSpc>
+                <a:spcPct val="105000"/>
+              </a:lnSpc>
+              <a:buNone/>
+            </a:pPr>
+            <a:r>
+              <a:rPr lang="en-US" sz="1200" dirty="0">
                 <a:solidFill>
                   <a:srgbClr val="9BA79B"/>
                 </a:solidFill>
@@ -4495,9 +5706,9 @@
                 <a:ea typeface="Calibri" pitchFamily="34" charset="-122"/>
                 <a:cs typeface="Calibri" pitchFamily="34" charset="-120"/>
               </a:rPr>
-              <a:t>It can be edited, reused, or invented in seconds — and the merchant can’t tell.</a:t>
-            </a:r>
-            <a:endParaRPr lang="en-US" sz="1250" dirty="0"/>
+              <a:t>A screenshot is edited, reused or invented in seconds — and it looks exactly like a genuine one.</a:t>
+            </a:r>
+            <a:endParaRPr lang="en-US" sz="1200" dirty="0"/>
           </a:p>
         </p:txBody>
       </p:sp>
@@ -4594,8 +5805,8 @@
         </p:nvSpPr>
         <p:spPr>
           <a:xfrm>
-            <a:off x="1591056" y="4050792"/>
-            <a:ext cx="5486400" cy="365760"/>
+            <a:off x="1591056" y="4041648"/>
+            <a:ext cx="5532120" cy="365760"/>
           </a:xfrm>
           <a:prstGeom prst="rect">
             <a:avLst/>
@@ -4611,7 +5822,7 @@
               <a:buNone/>
             </a:pPr>
             <a:r>
-              <a:rPr lang="en-US" sz="1600" b="1" dirty="0">
+              <a:rPr lang="en-US" sz="1550" b="1" dirty="0">
                 <a:solidFill>
                   <a:srgbClr val="E9E4D5"/>
                 </a:solidFill>
@@ -4619,9 +5830,9 @@
                 <a:ea typeface="Arial" pitchFamily="34" charset="-122"/>
                 <a:cs typeface="Arial" pitchFamily="34" charset="-120"/>
               </a:rPr>
-              <a:t>Goods leave before money lands</a:t>
-            </a:r>
-            <a:endParaRPr lang="en-US" sz="1600" dirty="0"/>
+              <a:t>The goods leave, the money doesn’t</a:t>
+            </a:r>
+            <a:endParaRPr lang="en-US" sz="1550" dirty="0"/>
           </a:p>
         </p:txBody>
       </p:sp>
@@ -4633,8 +5844,8 @@
         </p:nvSpPr>
         <p:spPr>
           <a:xfrm>
-            <a:off x="1591056" y="4407408"/>
-            <a:ext cx="5532120" cy="457200"/>
+            <a:off x="1591056" y="4398264"/>
+            <a:ext cx="5577840" cy="502920"/>
           </a:xfrm>
           <a:prstGeom prst="rect">
             <a:avLst/>
@@ -4647,10 +5858,13 @@
           <a:lstStyle/>
           <a:p>
             <a:pPr indent="0" marL="0">
-              <a:buNone/>
-            </a:pPr>
-            <a:r>
-              <a:rPr lang="en-US" sz="1250" dirty="0">
+              <a:lnSpc>
+                <a:spcPct val="105000"/>
+              </a:lnSpc>
+              <a:buNone/>
+            </a:pPr>
+            <a:r>
+              <a:rPr lang="en-US" sz="1200" dirty="0">
                 <a:solidFill>
                   <a:srgbClr val="9BA79B"/>
                 </a:solidFill>
@@ -4658,9 +5872,9 @@
                 <a:ea typeface="Calibri" pitchFamily="34" charset="-122"/>
                 <a:cs typeface="Calibri" pitchFamily="34" charset="-120"/>
               </a:rPr>
-              <a:t>Release against a fake confirmation and the loss is immediate and total.</a:t>
-            </a:r>
-            <a:endParaRPr lang="en-US" sz="1250" dirty="0"/>
+              <a:t>Release the order against a fake confirmation and the loss is yours — instantly, and in full.</a:t>
+            </a:r>
+            <a:endParaRPr lang="en-US" sz="1200" dirty="0"/>
           </a:p>
         </p:txBody>
       </p:sp>
@@ -4757,8 +5971,8 @@
         </p:nvSpPr>
         <p:spPr>
           <a:xfrm>
-            <a:off x="1591056" y="5257800"/>
-            <a:ext cx="5486400" cy="365760"/>
+            <a:off x="1591056" y="5248656"/>
+            <a:ext cx="5532120" cy="365760"/>
           </a:xfrm>
           <a:prstGeom prst="rect">
             <a:avLst/>
@@ -4774,7 +5988,7 @@
               <a:buNone/>
             </a:pPr>
             <a:r>
-              <a:rPr lang="en-US" sz="1600" b="1" dirty="0">
+              <a:rPr lang="en-US" sz="1550" b="1" dirty="0">
                 <a:solidFill>
                   <a:srgbClr val="E9E4D5"/>
                 </a:solidFill>
@@ -4782,9 +5996,9 @@
                 <a:ea typeface="Arial" pitchFamily="34" charset="-122"/>
                 <a:cs typeface="Arial" pitchFamily="34" charset="-120"/>
               </a:rPr>
-              <a:t>Reconciliation is manual</a:t>
-            </a:r>
-            <a:endParaRPr lang="en-US" sz="1600" dirty="0"/>
+              <a:t>Checking by hand burns your day</a:t>
+            </a:r>
+            <a:endParaRPr lang="en-US" sz="1550" dirty="0"/>
           </a:p>
         </p:txBody>
       </p:sp>
@@ -4796,8 +6010,8 @@
         </p:nvSpPr>
         <p:spPr>
           <a:xfrm>
-            <a:off x="1591056" y="5614416"/>
-            <a:ext cx="5532120" cy="457200"/>
+            <a:off x="1591056" y="5605272"/>
+            <a:ext cx="5577840" cy="502920"/>
           </a:xfrm>
           <a:prstGeom prst="rect">
             <a:avLst/>
@@ -4810,10 +6024,13 @@
           <a:lstStyle/>
           <a:p>
             <a:pPr indent="0" marL="0">
-              <a:buNone/>
-            </a:pPr>
-            <a:r>
-              <a:rPr lang="en-US" sz="1250" dirty="0">
+              <a:lnSpc>
+                <a:spcPct val="105000"/>
+              </a:lnSpc>
+              <a:buNone/>
+            </a:pPr>
+            <a:r>
+              <a:rPr lang="en-US" sz="1200" dirty="0">
                 <a:solidFill>
                   <a:srgbClr val="9BA79B"/>
                 </a:solidFill>
@@ -4821,9 +6038,9 @@
                 <a:ea typeface="Calibri" pitchFamily="34" charset="-122"/>
                 <a:cs typeface="Calibri" pitchFamily="34" charset="-120"/>
               </a:rPr>
-              <a:t>Matching payments to orders by hand is slow, error-prone, and doesn’t scale.</a:t>
-            </a:r>
-            <a:endParaRPr lang="en-US" sz="1250" dirty="0"/>
+              <a:t>Scrolling SMS and matching payments one by one doesn’t scale past a handful of sales.</a:t>
+            </a:r>
+            <a:endParaRPr lang="en-US" sz="1200" dirty="0"/>
           </a:p>
         </p:txBody>
       </p:sp>
@@ -4894,7 +6111,7 @@
                 <a:ea typeface="Courier New" pitchFamily="34" charset="-122"/>
                 <a:cs typeface="Courier New" pitchFamily="34" charset="-120"/>
               </a:rPr>
-              <a:t>CUSTOMER</a:t>
+              <a:t>YOUR CUSTOMER</a:t>
             </a:r>
             <a:endParaRPr lang="en-US" sz="900" dirty="0"/>
           </a:p>
@@ -5040,7 +6257,7 @@
         </p:nvSpPr>
         <p:spPr>
           <a:xfrm>
-            <a:off x="8046720" y="5120640"/>
+            <a:off x="8046720" y="5166360"/>
             <a:ext cx="3291840" cy="640080"/>
           </a:xfrm>
           <a:prstGeom prst="rect">
@@ -5065,7 +6282,7 @@
                 <a:ea typeface="Calibri" pitchFamily="34" charset="-122"/>
                 <a:cs typeface="Calibri" pitchFamily="34" charset="-120"/>
               </a:rPr>
-              <a:t>Every merchant, every day — with no way to know.</a:t>
+              <a:t>You, every day — with no way to know.</a:t>
             </a:r>
             <a:endParaRPr lang="en-US" sz="1250" dirty="0"/>
           </a:p>
@@ -5165,7 +6382,7 @@
         <p:spPr>
           <a:xfrm>
             <a:off x="566928" y="640080"/>
-            <a:ext cx="7315200" cy="274320"/>
+            <a:ext cx="9144000" cy="274320"/>
           </a:xfrm>
           <a:prstGeom prst="rect">
             <a:avLst/>
@@ -5189,7 +6406,7 @@
                 <a:ea typeface="Courier New" pitchFamily="34" charset="-122"/>
                 <a:cs typeface="Courier New" pitchFamily="34" charset="-120"/>
               </a:rPr>
-              <a:t>WHY IT STAYS UNSOLVED</a:t>
+              <a:t>WHY YOU’RE STUCK WITH SCREENSHOTS</a:t>
             </a:r>
             <a:endParaRPr lang="en-US" sz="1150" dirty="0"/>
           </a:p>
@@ -5223,7 +6440,7 @@
               <a:buNone/>
             </a:pPr>
             <a:r>
-              <a:rPr lang="en-US" sz="3800" b="1" dirty="0">
+              <a:rPr lang="en-US" sz="3600" b="1" dirty="0">
                 <a:solidFill>
                   <a:srgbClr val="E9E4D5"/>
                 </a:solidFill>
@@ -5231,9 +6448,9 @@
                 <a:ea typeface="Arial" pitchFamily="34" charset="-122"/>
                 <a:cs typeface="Arial" pitchFamily="34" charset="-120"/>
               </a:rPr>
-              <a:t>The “proper” fix takes 6–18 months —</a:t>
-            </a:r>
-            <a:endParaRPr lang="en-US" sz="3800" dirty="0"/>
+              <a:t>The “real” fix is a telco contract</a:t>
+            </a:r>
+            <a:endParaRPr lang="en-US" sz="3600" dirty="0"/>
           </a:p>
           <a:p>
             <a:pPr indent="0" marL="0">
@@ -5243,7 +6460,7 @@
               <a:buNone/>
             </a:pPr>
             <a:r>
-              <a:rPr lang="en-US" sz="3800" b="1" dirty="0">
+              <a:rPr lang="en-US" sz="3600" b="1" dirty="0">
                 <a:solidFill>
                   <a:srgbClr val="E9E4D5"/>
                 </a:solidFill>
@@ -5251,9 +6468,9 @@
                 <a:ea typeface="Arial" pitchFamily="34" charset="-122"/>
                 <a:cs typeface="Arial" pitchFamily="34" charset="-120"/>
               </a:rPr>
-              <a:t>per telco, per country.</a:t>
-            </a:r>
-            <a:endParaRPr lang="en-US" sz="3800" dirty="0"/>
+              <a:t>you’ll never get.</a:t>
+            </a:r>
+            <a:endParaRPr lang="en-US" sz="3600" dirty="0"/>
           </a:p>
         </p:txBody>
       </p:sp>
@@ -5265,8 +6482,8 @@
         </p:nvSpPr>
         <p:spPr>
           <a:xfrm>
-            <a:off x="566928" y="2651760"/>
-            <a:ext cx="6492240" cy="2011680"/>
+            <a:off x="566928" y="2697480"/>
+            <a:ext cx="6492240" cy="2103120"/>
           </a:xfrm>
           <a:prstGeom prst="rect">
             <a:avLst/>
@@ -5296,7 +6513,7 @@
                 <a:ea typeface="Calibri" pitchFamily="34" charset="-122"/>
                 <a:cs typeface="Calibri" pitchFamily="34" charset="-120"/>
               </a:rPr>
-              <a:t>The conventional route: negotiate B2B API access with every operator.</a:t>
+              <a:t>Direct operator API access means 6–18 months of B2B negotiation — per telco, per country.</a:t>
             </a:r>
             <a:endParaRPr lang="en-US" sz="1550" dirty="0"/>
           </a:p>
@@ -5319,7 +6536,7 @@
                 <a:ea typeface="Calibri" pitchFamily="34" charset="-122"/>
                 <a:cs typeface="Calibri" pitchFamily="34" charset="-120"/>
               </a:rPr>
-              <a:t>Long contracts. Country-by-country. And frequent flat rejection for the SMEs who need it most.</a:t>
+              <a:t>And small and mid-size merchants are routinely turned away at the door.</a:t>
             </a:r>
             <a:endParaRPr lang="en-US" sz="1550" dirty="0"/>
           </a:p>
@@ -5331,15 +6548,15 @@
               <a:buNone/>
             </a:pPr>
             <a:r>
-              <a:rPr lang="en-US" sz="1550" dirty="0">
-                <a:solidFill>
-                  <a:srgbClr val="9BA79B"/>
+              <a:rPr lang="en-US" sz="1550" b="1" dirty="0">
+                <a:solidFill>
+                  <a:srgbClr val="F2B944"/>
                 </a:solidFill>
                 <a:latin typeface="Calibri" pitchFamily="34" charset="0"/>
                 <a:ea typeface="Calibri" pitchFamily="34" charset="-122"/>
                 <a:cs typeface="Calibri" pitchFamily="34" charset="-120"/>
               </a:rPr>
-              <a:t>So most mobile-money commerce never gets it — and falls back to the screenshot.</a:t>
+              <a:t>So millions of sellers are left with the screenshot. Until now.</a:t>
             </a:r>
             <a:endParaRPr lang="en-US" sz="1550" dirty="0"/>
           </a:p>
@@ -5751,7 +6968,7 @@
         <p:spPr>
           <a:xfrm>
             <a:off x="566928" y="1051560"/>
-            <a:ext cx="7315200" cy="274320"/>
+            <a:ext cx="9144000" cy="274320"/>
           </a:xfrm>
           <a:prstGeom prst="rect">
             <a:avLst/>
@@ -5899,7 +7116,7 @@
                 <a:ea typeface="Calibri" pitchFamily="34" charset="-122"/>
                 <a:cs typeface="Calibri" pitchFamily="34" charset="-120"/>
               </a:rPr>
-              <a:t>KODA reads the SMS the merchant already receives — reference, amount, sender, running balance — and turns it into verifiable, replay-locked truth. No operator integration. Ever.</a:t>
+              <a:t>KODA reads the SMS you already receive — reference, amount, sender, running balance — and turns it into verifiable, replay-locked truth. No operator integration. Ever.</a:t>
             </a:r>
             <a:endParaRPr lang="en-US" sz="1800" dirty="0"/>
           </a:p>
@@ -5946,7 +7163,7 @@
         <p:spPr>
           <a:xfrm>
             <a:off x="566928" y="640080"/>
-            <a:ext cx="7315200" cy="274320"/>
+            <a:ext cx="9144000" cy="274320"/>
           </a:xfrm>
           <a:prstGeom prst="rect">
             <a:avLst/>
@@ -6155,8 +7372,8 @@
         </p:nvSpPr>
         <p:spPr>
           <a:xfrm>
-            <a:off x="804672" y="3794760"/>
-            <a:ext cx="2083232" cy="1371600"/>
+            <a:off x="804672" y="3840480"/>
+            <a:ext cx="2083232" cy="1325880"/>
           </a:xfrm>
           <a:prstGeom prst="rect">
             <a:avLst/>
@@ -6329,8 +7546,8 @@
         </p:nvSpPr>
         <p:spPr>
           <a:xfrm>
-            <a:off x="3637712" y="3794760"/>
-            <a:ext cx="2083232" cy="1371600"/>
+            <a:off x="3637712" y="3840480"/>
+            <a:ext cx="2083232" cy="1325880"/>
           </a:xfrm>
           <a:prstGeom prst="rect">
             <a:avLst/>
@@ -6357,7 +7574,7 @@
                 <a:ea typeface="Calibri" pitchFamily="34" charset="-122"/>
                 <a:cs typeface="Calibri" pitchFamily="34" charset="-120"/>
               </a:rPr>
-              <a:t>The confirmation SMS arrives on the merchant’s own phone, as always.</a:t>
+              <a:t>The confirmation SMS arrives on your phone, exactly as it always does.</a:t>
             </a:r>
             <a:endParaRPr lang="en-US" sz="1250" dirty="0"/>
           </a:p>
@@ -6503,8 +7720,8 @@
         </p:nvSpPr>
         <p:spPr>
           <a:xfrm>
-            <a:off x="6470752" y="3794760"/>
-            <a:ext cx="2083232" cy="1371600"/>
+            <a:off x="6470752" y="3840480"/>
+            <a:ext cx="2083232" cy="1325880"/>
           </a:xfrm>
           <a:prstGeom prst="rect">
             <a:avLst/>
@@ -6677,8 +7894,8 @@
         </p:nvSpPr>
         <p:spPr>
           <a:xfrm>
-            <a:off x="9303791" y="3794760"/>
-            <a:ext cx="2083232" cy="1371600"/>
+            <a:off x="9303791" y="3840480"/>
+            <a:ext cx="2083232" cy="1325880"/>
           </a:xfrm>
           <a:prstGeom prst="rect">
             <a:avLst/>
@@ -6805,7 +8022,7 @@
         <p:spPr>
           <a:xfrm>
             <a:off x="566928" y="640080"/>
-            <a:ext cx="7315200" cy="274320"/>
+            <a:ext cx="9144000" cy="274320"/>
           </a:xfrm>
           <a:prstGeom prst="rect">
             <a:avLst/>
@@ -6829,7 +8046,7 @@
                 <a:ea typeface="Courier New" pitchFamily="34" charset="-122"/>
                 <a:cs typeface="Courier New" pitchFamily="34" charset="-120"/>
               </a:rPr>
-              <a:t>MEETS EVERY MERCHANT</a:t>
+              <a:t>THE ONLY REQUIREMENT</a:t>
             </a:r>
             <a:endParaRPr lang="en-US" sz="1150" dirty="0"/>
           </a:p>
@@ -6844,7 +8061,7 @@
         <p:spPr>
           <a:xfrm>
             <a:off x="566928" y="960120"/>
-            <a:ext cx="7315200" cy="640080"/>
+            <a:ext cx="11064240" cy="685800"/>
           </a:xfrm>
           <a:prstGeom prst="rect">
             <a:avLst/>
@@ -6860,7 +8077,7 @@
               <a:buNone/>
             </a:pPr>
             <a:r>
-              <a:rPr lang="en-US" sz="3400" b="1" dirty="0">
+              <a:rPr lang="en-US" sz="3100" b="1" dirty="0">
                 <a:solidFill>
                   <a:srgbClr val="E9E4D5"/>
                 </a:solidFill>
@@ -6868,9 +8085,9 @@
                 <a:ea typeface="Arial" pitchFamily="34" charset="-122"/>
                 <a:cs typeface="Arial" pitchFamily="34" charset="-120"/>
               </a:rPr>
-              <a:t>One engine. Five doors.</a:t>
-            </a:r>
-            <a:endParaRPr lang="en-US" sz="3400" dirty="0"/>
+              <a:t>If your operator texts YOU when you’re paid, KODA works.</a:t>
+            </a:r>
+            <a:endParaRPr lang="en-US" sz="3100" dirty="0"/>
           </a:p>
         </p:txBody>
       </p:sp>
@@ -6882,8 +8099,8 @@
         </p:nvSpPr>
         <p:spPr>
           <a:xfrm>
-            <a:off x="566928" y="1572768"/>
-            <a:ext cx="10515600" cy="457200"/>
+            <a:off x="566928" y="1691640"/>
+            <a:ext cx="10881360" cy="457200"/>
           </a:xfrm>
           <a:prstGeom prst="rect">
             <a:avLst/>
@@ -6907,7 +8124,7 @@
                 <a:ea typeface="Calibri" pitchFamily="34" charset="-122"/>
                 <a:cs typeface="Calibri" pitchFamily="34" charset="-120"/>
               </a:rPr>
-              <a:t>From a smartphone checkout to a feature phone with no internet — the customer confirms however they can.</a:t>
+              <a:t>KODA verifies against the confirmation SMS your mobile-money operator already sends to your merchant number. The whole checklist:</a:t>
             </a:r>
             <a:endParaRPr lang="en-US" sz="1450" dirty="0"/>
           </a:p>
@@ -6921,12 +8138,12 @@
         </p:nvSpPr>
         <p:spPr>
           <a:xfrm>
-            <a:off x="566928" y="2331720"/>
-            <a:ext cx="2006742" cy="3017520"/>
+            <a:off x="566928" y="2423160"/>
+            <a:ext cx="3503066" cy="2880360"/>
           </a:xfrm>
           <a:prstGeom prst="roundRect">
             <a:avLst>
-              <a:gd name="adj" fmla="val 5012"/>
+              <a:gd name="adj" fmla="val 3492"/>
             </a:avLst>
           </a:prstGeom>
           <a:solidFill>
@@ -6955,12 +8172,12 @@
         </p:nvSpPr>
         <p:spPr>
           <a:xfrm>
-            <a:off x="822960" y="2624328"/>
-            <a:ext cx="603504" cy="603504"/>
+            <a:off x="841248" y="2715768"/>
+            <a:ext cx="658368" cy="658368"/>
           </a:xfrm>
           <a:prstGeom prst="roundRect">
             <a:avLst>
-              <a:gd name="adj" fmla="val 15152"/>
+              <a:gd name="adj" fmla="val 13889"/>
             </a:avLst>
           </a:prstGeom>
           <a:solidFill>
@@ -6990,8 +8207,8 @@
         </p:blipFill>
         <p:spPr>
           <a:xfrm>
-            <a:off x="943661" y="2745029"/>
-            <a:ext cx="362102" cy="362102"/>
+            <a:off x="972922" y="2847442"/>
+            <a:ext cx="395021" cy="395021"/>
           </a:xfrm>
           <a:prstGeom prst="rect">
             <a:avLst/>
@@ -7006,8 +8223,8 @@
         </p:nvSpPr>
         <p:spPr>
           <a:xfrm>
-            <a:off x="786384" y="3383280"/>
-            <a:ext cx="1567830" cy="411480"/>
+            <a:off x="841248" y="3566160"/>
+            <a:ext cx="2954426" cy="685800"/>
           </a:xfrm>
           <a:prstGeom prst="rect">
             <a:avLst/>
@@ -7023,7 +8240,7 @@
               <a:buNone/>
             </a:pPr>
             <a:r>
-              <a:rPr lang="en-US" sz="1550" b="1" dirty="0">
+              <a:rPr lang="en-US" sz="1600" b="1" dirty="0">
                 <a:solidFill>
                   <a:srgbClr val="F2B944"/>
                 </a:solidFill>
@@ -7031,9 +8248,9 @@
                 <a:ea typeface="Arial" pitchFamily="34" charset="-122"/>
                 <a:cs typeface="Arial" pitchFamily="34" charset="-120"/>
               </a:rPr>
-              <a:t>Manual</a:t>
-            </a:r>
-            <a:endParaRPr lang="en-US" sz="1550" dirty="0"/>
+              <a:t>You accept mobile money</a:t>
+            </a:r>
+            <a:endParaRPr lang="en-US" sz="1600" dirty="0"/>
           </a:p>
         </p:txBody>
       </p:sp>
@@ -7045,8 +8262,8 @@
         </p:nvSpPr>
         <p:spPr>
           <a:xfrm>
-            <a:off x="786384" y="3813048"/>
-            <a:ext cx="1567830" cy="1371600"/>
+            <a:off x="841248" y="4251960"/>
+            <a:ext cx="2954426" cy="960120"/>
           </a:xfrm>
           <a:prstGeom prst="rect">
             <a:avLst/>
@@ -7060,12 +8277,12 @@
           <a:p>
             <a:pPr indent="0" marL="0">
               <a:lnSpc>
-                <a:spcPct val="110000"/>
+                <a:spcPct val="112000"/>
               </a:lnSpc>
               <a:buNone/>
             </a:pPr>
             <a:r>
-              <a:rPr lang="en-US" sz="1180" dirty="0">
+              <a:rPr lang="en-US" sz="1250" dirty="0">
                 <a:solidFill>
                   <a:srgbClr val="9BA79B"/>
                 </a:solidFill>
@@ -7073,9 +8290,9 @@
                 <a:ea typeface="Calibri" pitchFamily="34" charset="-122"/>
                 <a:cs typeface="Calibri" pitchFamily="34" charset="-120"/>
               </a:rPr>
-              <a:t>Paste the code in the Verify Console — no code to write.</a:t>
-            </a:r>
-            <a:endParaRPr lang="en-US" sz="1180" dirty="0"/>
+              <a:t>Orange Money, M-Pesa, Airtel, Afrimoney, MTN, Wave — and 200+ more operators.</a:t>
+            </a:r>
+            <a:endParaRPr lang="en-US" sz="1250" dirty="0"/>
           </a:p>
         </p:txBody>
       </p:sp>
@@ -7087,12 +8304,12 @@
         </p:nvSpPr>
         <p:spPr>
           <a:xfrm>
-            <a:off x="2829702" y="2331720"/>
-            <a:ext cx="2006742" cy="3017520"/>
+            <a:off x="4344314" y="2423160"/>
+            <a:ext cx="3503066" cy="2880360"/>
           </a:xfrm>
           <a:prstGeom prst="roundRect">
             <a:avLst>
-              <a:gd name="adj" fmla="val 5012"/>
+              <a:gd name="adj" fmla="val 3492"/>
             </a:avLst>
           </a:prstGeom>
           <a:solidFill>
@@ -7121,12 +8338,12 @@
         </p:nvSpPr>
         <p:spPr>
           <a:xfrm>
-            <a:off x="3085734" y="2624328"/>
-            <a:ext cx="603504" cy="603504"/>
+            <a:off x="4618634" y="2715768"/>
+            <a:ext cx="658368" cy="658368"/>
           </a:xfrm>
           <a:prstGeom prst="roundRect">
             <a:avLst>
-              <a:gd name="adj" fmla="val 15152"/>
+              <a:gd name="adj" fmla="val 13889"/>
             </a:avLst>
           </a:prstGeom>
           <a:solidFill>
@@ -7156,8 +8373,8 @@
         </p:blipFill>
         <p:spPr>
           <a:xfrm>
-            <a:off x="3206435" y="2745029"/>
-            <a:ext cx="362102" cy="362102"/>
+            <a:off x="4750308" y="2847442"/>
+            <a:ext cx="395021" cy="395021"/>
           </a:xfrm>
           <a:prstGeom prst="rect">
             <a:avLst/>
@@ -7172,8 +8389,8 @@
         </p:nvSpPr>
         <p:spPr>
           <a:xfrm>
-            <a:off x="3049158" y="3383280"/>
-            <a:ext cx="1567830" cy="411480"/>
+            <a:off x="4618634" y="3566160"/>
+            <a:ext cx="2954426" cy="685800"/>
           </a:xfrm>
           <a:prstGeom prst="rect">
             <a:avLst/>
@@ -7189,7 +8406,7 @@
               <a:buNone/>
             </a:pPr>
             <a:r>
-              <a:rPr lang="en-US" sz="1550" b="1" dirty="0">
+              <a:rPr lang="en-US" sz="1600" b="1" dirty="0">
                 <a:solidFill>
                   <a:srgbClr val="F2B944"/>
                 </a:solidFill>
@@ -7197,9 +8414,9 @@
                 <a:ea typeface="Arial" pitchFamily="34" charset="-122"/>
                 <a:cs typeface="Arial" pitchFamily="34" charset="-120"/>
               </a:rPr>
-              <a:t>WhatsApp</a:t>
-            </a:r>
-            <a:endParaRPr lang="en-US" sz="1550" dirty="0"/>
+              <a:t>The confirmation SMS lands on your phone</a:t>
+            </a:r>
+            <a:endParaRPr lang="en-US" sz="1600" dirty="0"/>
           </a:p>
         </p:txBody>
       </p:sp>
@@ -7211,8 +8428,8 @@
         </p:nvSpPr>
         <p:spPr>
           <a:xfrm>
-            <a:off x="3049158" y="3813048"/>
-            <a:ext cx="1567830" cy="1371600"/>
+            <a:off x="4618634" y="4251960"/>
+            <a:ext cx="2954426" cy="960120"/>
           </a:xfrm>
           <a:prstGeom prst="rect">
             <a:avLst/>
@@ -7226,12 +8443,12 @@
           <a:p>
             <a:pPr indent="0" marL="0">
               <a:lnSpc>
-                <a:spcPct val="110000"/>
+                <a:spcPct val="112000"/>
               </a:lnSpc>
               <a:buNone/>
             </a:pPr>
             <a:r>
-              <a:rPr lang="en-US" sz="1180" dirty="0">
+              <a:rPr lang="en-US" sz="1250" dirty="0">
                 <a:solidFill>
                   <a:srgbClr val="9BA79B"/>
                 </a:solidFill>
@@ -7239,9 +8456,9 @@
                 <a:ea typeface="Calibri" pitchFamily="34" charset="-122"/>
                 <a:cs typeface="Calibri" pitchFamily="34" charset="-120"/>
               </a:rPr>
-              <a:t>The code dropped in the chat is verified in-channel.</a:t>
-            </a:r>
-            <a:endParaRPr lang="en-US" sz="1180" dirty="0"/>
+              <a:t>The one your operator sends to your merchant number every time you’re paid.</a:t>
+            </a:r>
+            <a:endParaRPr lang="en-US" sz="1250" dirty="0"/>
           </a:p>
         </p:txBody>
       </p:sp>
@@ -7253,12 +8470,12 @@
         </p:nvSpPr>
         <p:spPr>
           <a:xfrm>
-            <a:off x="5092476" y="2331720"/>
-            <a:ext cx="2006742" cy="3017520"/>
+            <a:off x="8121701" y="2423160"/>
+            <a:ext cx="3503066" cy="2880360"/>
           </a:xfrm>
           <a:prstGeom prst="roundRect">
             <a:avLst>
-              <a:gd name="adj" fmla="val 5012"/>
+              <a:gd name="adj" fmla="val 3492"/>
             </a:avLst>
           </a:prstGeom>
           <a:solidFill>
@@ -7287,12 +8504,12 @@
         </p:nvSpPr>
         <p:spPr>
           <a:xfrm>
-            <a:off x="5348508" y="2624328"/>
-            <a:ext cx="603504" cy="603504"/>
+            <a:off x="8396021" y="2715768"/>
+            <a:ext cx="658368" cy="658368"/>
           </a:xfrm>
           <a:prstGeom prst="roundRect">
             <a:avLst>
-              <a:gd name="adj" fmla="val 15152"/>
+              <a:gd name="adj" fmla="val 13889"/>
             </a:avLst>
           </a:prstGeom>
           <a:solidFill>
@@ -7322,8 +8539,8 @@
         </p:blipFill>
         <p:spPr>
           <a:xfrm>
-            <a:off x="5469209" y="2745029"/>
-            <a:ext cx="362102" cy="362102"/>
+            <a:off x="8527694" y="2847442"/>
+            <a:ext cx="395021" cy="395021"/>
           </a:xfrm>
           <a:prstGeom prst="rect">
             <a:avLst/>
@@ -7338,8 +8555,8 @@
         </p:nvSpPr>
         <p:spPr>
           <a:xfrm>
-            <a:off x="5311932" y="3383280"/>
-            <a:ext cx="1567830" cy="411480"/>
+            <a:off x="8396021" y="3566160"/>
+            <a:ext cx="2954426" cy="685800"/>
           </a:xfrm>
           <a:prstGeom prst="rect">
             <a:avLst/>
@@ -7355,7 +8572,7 @@
               <a:buNone/>
             </a:pPr>
             <a:r>
-              <a:rPr lang="en-US" sz="1550" b="1" dirty="0">
+              <a:rPr lang="en-US" sz="1600" b="1" dirty="0">
                 <a:solidFill>
                   <a:srgbClr val="F2B944"/>
                 </a:solidFill>
@@ -7363,9 +8580,9 @@
                 <a:ea typeface="Arial" pitchFamily="34" charset="-122"/>
                 <a:cs typeface="Arial" pitchFamily="34" charset="-120"/>
               </a:rPr>
-              <a:t>API / drop-in</a:t>
-            </a:r>
-            <a:endParaRPr lang="en-US" sz="1550" dirty="0"/>
+              <a:t>That’s it — you’re ready</a:t>
+            </a:r>
+            <a:endParaRPr lang="en-US" sz="1600" dirty="0"/>
           </a:p>
         </p:txBody>
       </p:sp>
@@ -7377,8 +8594,8 @@
         </p:nvSpPr>
         <p:spPr>
           <a:xfrm>
-            <a:off x="5311932" y="3813048"/>
-            <a:ext cx="1567830" cy="1371600"/>
+            <a:off x="8396021" y="4251960"/>
+            <a:ext cx="2954426" cy="960120"/>
           </a:xfrm>
           <a:prstGeom prst="rect">
             <a:avLst/>
@@ -7392,12 +8609,12 @@
           <a:p>
             <a:pPr indent="0" marL="0">
               <a:lnSpc>
-                <a:spcPct val="110000"/>
+                <a:spcPct val="112000"/>
               </a:lnSpc>
               <a:buNone/>
             </a:pPr>
             <a:r>
-              <a:rPr lang="en-US" sz="1180" dirty="0">
+              <a:rPr lang="en-US" sz="1250" dirty="0">
                 <a:solidFill>
                   <a:srgbClr val="9BA79B"/>
                 </a:solidFill>
@@ -7405,347 +8622,15 @@
                 <a:ea typeface="Calibri" pitchFamily="34" charset="-122"/>
                 <a:cs typeface="Calibri" pitchFamily="34" charset="-120"/>
               </a:rPr>
-              <a:t>Three endpoints, a widget, and signed webhooks.</a:t>
-            </a:r>
-            <a:endParaRPr lang="en-US" sz="1180" dirty="0"/>
-          </a:p>
-        </p:txBody>
-      </p:sp>
-      <p:sp>
-        <p:nvSpPr>
-          <p:cNvPr id="20" name="Shape 15"/>
-          <p:cNvSpPr/>
-          <p:nvPr/>
-        </p:nvSpPr>
-        <p:spPr>
-          <a:xfrm>
-            <a:off x="7355251" y="2331720"/>
-            <a:ext cx="2006742" cy="3017520"/>
-          </a:xfrm>
-          <a:prstGeom prst="roundRect">
-            <a:avLst>
-              <a:gd name="adj" fmla="val 5012"/>
-            </a:avLst>
-          </a:prstGeom>
-          <a:solidFill>
-            <a:srgbClr val="123027"/>
-          </a:solidFill>
-          <a:ln w="12700">
-            <a:solidFill>
-              <a:srgbClr val="2A4034"/>
-            </a:solidFill>
-            <a:prstDash val="solid"/>
-          </a:ln>
-          <a:effectLst>
-            <a:outerShdw sx="100000" sy="100000" kx="0" ky="0" algn="bl" rotWithShape="0" blurRad="127000" dist="50800" dir="5400000">
-              <a:srgbClr val="000000">
-                <a:alpha val="35000"/>
-              </a:srgbClr>
-            </a:outerShdw>
-          </a:effectLst>
-        </p:spPr>
-      </p:sp>
-      <p:sp>
-        <p:nvSpPr>
-          <p:cNvPr id="21" name="Shape 16"/>
-          <p:cNvSpPr/>
-          <p:nvPr/>
-        </p:nvSpPr>
-        <p:spPr>
-          <a:xfrm>
-            <a:off x="7611283" y="2624328"/>
-            <a:ext cx="603504" cy="603504"/>
-          </a:xfrm>
-          <a:prstGeom prst="roundRect">
-            <a:avLst>
-              <a:gd name="adj" fmla="val 15152"/>
-            </a:avLst>
-          </a:prstGeom>
-          <a:solidFill>
-            <a:srgbClr val="17392E"/>
-          </a:solidFill>
-          <a:ln w="12700">
-            <a:solidFill>
-              <a:srgbClr val="E8A11F"/>
-            </a:solidFill>
-            <a:prstDash val="solid"/>
-          </a:ln>
-        </p:spPr>
-      </p:sp>
-      <p:pic>
-        <p:nvPicPr>
-          <p:cNvPr id="22" name="Image 3" descr="preencoded.png">    </p:cNvPr>
-          <p:cNvPicPr>
-            <a:picLocks noChangeAspect="1"/>
-          </p:cNvPicPr>
-          <p:nvPr/>
-        </p:nvPicPr>
-        <p:blipFill>
-          <a:blip r:embed="rId4"/>
-          <a:stretch>
-            <a:fillRect/>
-          </a:stretch>
-        </p:blipFill>
-        <p:spPr>
-          <a:xfrm>
-            <a:off x="7731984" y="2745029"/>
-            <a:ext cx="362102" cy="362102"/>
-          </a:xfrm>
-          <a:prstGeom prst="rect">
-            <a:avLst/>
-          </a:prstGeom>
-        </p:spPr>
-      </p:pic>
-      <p:sp>
-        <p:nvSpPr>
-          <p:cNvPr id="23" name="Text 17"/>
-          <p:cNvSpPr txBox="1"/>
-          <p:nvPr/>
-        </p:nvSpPr>
-        <p:spPr>
-          <a:xfrm>
-            <a:off x="7574707" y="3383280"/>
-            <a:ext cx="1567830" cy="411480"/>
-          </a:xfrm>
-          <a:prstGeom prst="rect">
-            <a:avLst/>
-          </a:prstGeom>
-          <a:noFill/>
-          <a:ln/>
-        </p:spPr>
-        <p:txBody>
-          <a:bodyPr wrap="square" lIns="0" tIns="0" rIns="0" bIns="0" rtlCol="0" anchor="ctr"/>
-          <a:lstStyle/>
-          <a:p>
-            <a:pPr indent="0" marL="0">
-              <a:buNone/>
-            </a:pPr>
-            <a:r>
-              <a:rPr lang="en-US" sz="1550" b="1" dirty="0">
-                <a:solidFill>
-                  <a:srgbClr val="F2B944"/>
-                </a:solidFill>
-                <a:latin typeface="Arial" pitchFamily="34" charset="0"/>
-                <a:ea typeface="Arial" pitchFamily="34" charset="-122"/>
-                <a:cs typeface="Arial" pitchFamily="34" charset="-120"/>
-              </a:rPr>
-              <a:t>USSD</a:t>
-            </a:r>
-            <a:endParaRPr lang="en-US" sz="1550" dirty="0"/>
-          </a:p>
-        </p:txBody>
-      </p:sp>
-      <p:sp>
-        <p:nvSpPr>
-          <p:cNvPr id="24" name="Text 18"/>
-          <p:cNvSpPr txBox="1"/>
-          <p:nvPr/>
-        </p:nvSpPr>
-        <p:spPr>
-          <a:xfrm>
-            <a:off x="7574707" y="3813048"/>
-            <a:ext cx="1567830" cy="1371600"/>
-          </a:xfrm>
-          <a:prstGeom prst="rect">
-            <a:avLst/>
-          </a:prstGeom>
-          <a:noFill/>
-          <a:ln/>
-        </p:spPr>
-        <p:txBody>
-          <a:bodyPr wrap="square" lIns="0" tIns="0" rIns="0" bIns="0" rtlCol="0" anchor="ctr"/>
-          <a:lstStyle/>
-          <a:p>
-            <a:pPr indent="0" marL="0">
-              <a:lnSpc>
-                <a:spcPct val="110000"/>
-              </a:lnSpc>
-              <a:buNone/>
-            </a:pPr>
-            <a:r>
-              <a:rPr lang="en-US" sz="1180" dirty="0">
-                <a:solidFill>
-                  <a:srgbClr val="9BA79B"/>
-                </a:solidFill>
-                <a:latin typeface="Calibri" pitchFamily="34" charset="0"/>
-                <a:ea typeface="Calibri" pitchFamily="34" charset="-122"/>
-                <a:cs typeface="Calibri" pitchFamily="34" charset="-120"/>
-              </a:rPr>
-              <a:t>Dial a shortcode — any phone, no internet.</a:t>
-            </a:r>
-            <a:endParaRPr lang="en-US" sz="1180" dirty="0"/>
-          </a:p>
-        </p:txBody>
-      </p:sp>
-      <p:sp>
-        <p:nvSpPr>
-          <p:cNvPr id="25" name="Shape 19"/>
-          <p:cNvSpPr/>
-          <p:nvPr/>
-        </p:nvSpPr>
-        <p:spPr>
-          <a:xfrm>
-            <a:off x="9618025" y="2331720"/>
-            <a:ext cx="2006742" cy="3017520"/>
-          </a:xfrm>
-          <a:prstGeom prst="roundRect">
-            <a:avLst>
-              <a:gd name="adj" fmla="val 5012"/>
-            </a:avLst>
-          </a:prstGeom>
-          <a:solidFill>
-            <a:srgbClr val="123027"/>
-          </a:solidFill>
-          <a:ln w="12700">
-            <a:solidFill>
-              <a:srgbClr val="2A4034"/>
-            </a:solidFill>
-            <a:prstDash val="solid"/>
-          </a:ln>
-          <a:effectLst>
-            <a:outerShdw sx="100000" sy="100000" kx="0" ky="0" algn="bl" rotWithShape="0" blurRad="127000" dist="50800" dir="5400000">
-              <a:srgbClr val="000000">
-                <a:alpha val="35000"/>
-              </a:srgbClr>
-            </a:outerShdw>
-          </a:effectLst>
-        </p:spPr>
-      </p:sp>
-      <p:sp>
-        <p:nvSpPr>
-          <p:cNvPr id="26" name="Shape 20"/>
-          <p:cNvSpPr/>
-          <p:nvPr/>
-        </p:nvSpPr>
-        <p:spPr>
-          <a:xfrm>
-            <a:off x="9874057" y="2624328"/>
-            <a:ext cx="603504" cy="603504"/>
-          </a:xfrm>
-          <a:prstGeom prst="roundRect">
-            <a:avLst>
-              <a:gd name="adj" fmla="val 15152"/>
-            </a:avLst>
-          </a:prstGeom>
-          <a:solidFill>
-            <a:srgbClr val="17392E"/>
-          </a:solidFill>
-          <a:ln w="12700">
-            <a:solidFill>
-              <a:srgbClr val="E8A11F"/>
-            </a:solidFill>
-            <a:prstDash val="solid"/>
-          </a:ln>
-        </p:spPr>
-      </p:sp>
-      <p:pic>
-        <p:nvPicPr>
-          <p:cNvPr id="27" name="Image 4" descr="preencoded.png">    </p:cNvPr>
-          <p:cNvPicPr>
-            <a:picLocks noChangeAspect="1"/>
-          </p:cNvPicPr>
-          <p:nvPr/>
-        </p:nvPicPr>
-        <p:blipFill>
-          <a:blip r:embed="rId5"/>
-          <a:stretch>
-            <a:fillRect/>
-          </a:stretch>
-        </p:blipFill>
-        <p:spPr>
-          <a:xfrm>
-            <a:off x="9994758" y="2745029"/>
-            <a:ext cx="362102" cy="362102"/>
-          </a:xfrm>
-          <a:prstGeom prst="rect">
-            <a:avLst/>
-          </a:prstGeom>
-        </p:spPr>
-      </p:pic>
-      <p:sp>
-        <p:nvSpPr>
-          <p:cNvPr id="28" name="Text 21"/>
-          <p:cNvSpPr txBox="1"/>
-          <p:nvPr/>
-        </p:nvSpPr>
-        <p:spPr>
-          <a:xfrm>
-            <a:off x="9837481" y="3383280"/>
-            <a:ext cx="1567830" cy="411480"/>
-          </a:xfrm>
-          <a:prstGeom prst="rect">
-            <a:avLst/>
-          </a:prstGeom>
-          <a:noFill/>
-          <a:ln/>
-        </p:spPr>
-        <p:txBody>
-          <a:bodyPr wrap="square" lIns="0" tIns="0" rIns="0" bIns="0" rtlCol="0" anchor="ctr"/>
-          <a:lstStyle/>
-          <a:p>
-            <a:pPr indent="0" marL="0">
-              <a:buNone/>
-            </a:pPr>
-            <a:r>
-              <a:rPr lang="en-US" sz="1550" b="1" dirty="0">
-                <a:solidFill>
-                  <a:srgbClr val="F2B944"/>
-                </a:solidFill>
-                <a:latin typeface="Arial" pitchFamily="34" charset="0"/>
-                <a:ea typeface="Arial" pitchFamily="34" charset="-122"/>
-                <a:cs typeface="Arial" pitchFamily="34" charset="-120"/>
-              </a:rPr>
-              <a:t>Inbound SMS</a:t>
-            </a:r>
-            <a:endParaRPr lang="en-US" sz="1550" dirty="0"/>
-          </a:p>
-        </p:txBody>
-      </p:sp>
-      <p:sp>
-        <p:nvSpPr>
-          <p:cNvPr id="29" name="Text 22"/>
-          <p:cNvSpPr txBox="1"/>
-          <p:nvPr/>
-        </p:nvSpPr>
-        <p:spPr>
-          <a:xfrm>
-            <a:off x="9837481" y="3813048"/>
-            <a:ext cx="1567830" cy="1371600"/>
-          </a:xfrm>
-          <a:prstGeom prst="rect">
-            <a:avLst/>
-          </a:prstGeom>
-          <a:noFill/>
-          <a:ln/>
-        </p:spPr>
-        <p:txBody>
-          <a:bodyPr wrap="square" lIns="0" tIns="0" rIns="0" bIns="0" rtlCol="0" anchor="ctr"/>
-          <a:lstStyle/>
-          <a:p>
-            <a:pPr indent="0" marL="0">
-              <a:lnSpc>
-                <a:spcPct val="110000"/>
-              </a:lnSpc>
-              <a:buNone/>
-            </a:pPr>
-            <a:r>
-              <a:rPr lang="en-US" sz="1180" dirty="0">
-                <a:solidFill>
-                  <a:srgbClr val="9BA79B"/>
-                </a:solidFill>
-                <a:latin typeface="Calibri" pitchFamily="34" charset="0"/>
-                <a:ea typeface="Calibri" pitchFamily="34" charset="-122"/>
-                <a:cs typeface="Calibri" pitchFamily="34" charset="-120"/>
-              </a:rPr>
-              <a:t>Text the code (or forward the SMS) to verify.</a:t>
-            </a:r>
-            <a:endParaRPr lang="en-US" sz="1180" dirty="0"/>
-          </a:p>
-        </p:txBody>
-      </p:sp>
-      <p:sp>
-        <p:nvSpPr>
-          <p:cNvPr id="30" name="Text 23"/>
+              <a:t>No new SIM. No new number. Nothing for your customer to download or install.</a:t>
+            </a:r>
+            <a:endParaRPr lang="en-US" sz="1250" dirty="0"/>
+          </a:p>
+        </p:txBody>
+      </p:sp>
+      <p:sp>
+        <p:nvSpPr>
+          <p:cNvPr id="20" name="Text 15"/>
           <p:cNvSpPr txBox="1"/>
           <p:nvPr/>
         </p:nvSpPr>
@@ -7837,7 +8722,7 @@
         <p:spPr>
           <a:xfrm>
             <a:off x="566928" y="640080"/>
-            <a:ext cx="7315200" cy="274320"/>
+            <a:ext cx="9144000" cy="274320"/>
           </a:xfrm>
           <a:prstGeom prst="rect">
             <a:avLst/>
@@ -7861,7 +8746,7 @@
                 <a:ea typeface="Courier New" pitchFamily="34" charset="-122"/>
                 <a:cs typeface="Courier New" pitchFamily="34" charset="-120"/>
               </a:rPr>
-              <a:t>ANTI-FRAUD, BY DESIGN</a:t>
+              <a:t>MEETS EVERY MERCHANT</a:t>
             </a:r>
             <a:endParaRPr lang="en-US" sz="1150" dirty="0"/>
           </a:p>
@@ -7876,7 +8761,7 @@
         <p:spPr>
           <a:xfrm>
             <a:off x="566928" y="960120"/>
-            <a:ext cx="7315200" cy="731520"/>
+            <a:ext cx="7315200" cy="640080"/>
           </a:xfrm>
           <a:prstGeom prst="rect">
             <a:avLst/>
@@ -7892,7 +8777,7 @@
               <a:buNone/>
             </a:pPr>
             <a:r>
-              <a:rPr lang="en-US" sz="4000" b="1" dirty="0">
+              <a:rPr lang="en-US" sz="3400" b="1" dirty="0">
                 <a:solidFill>
                   <a:srgbClr val="E9E4D5"/>
                 </a:solidFill>
@@ -7900,9 +8785,9 @@
                 <a:ea typeface="Arial" pitchFamily="34" charset="-122"/>
                 <a:cs typeface="Arial" pitchFamily="34" charset="-120"/>
               </a:rPr>
-              <a:t>Built to be lied to.</a:t>
-            </a:r>
-            <a:endParaRPr lang="en-US" sz="4000" dirty="0"/>
+              <a:t>One engine. Five doors.</a:t>
+            </a:r>
+            <a:endParaRPr lang="en-US" sz="3400" dirty="0"/>
           </a:p>
         </p:txBody>
       </p:sp>
@@ -7914,8 +8799,8 @@
         </p:nvSpPr>
         <p:spPr>
           <a:xfrm>
-            <a:off x="566928" y="1691640"/>
-            <a:ext cx="10515600" cy="457200"/>
+            <a:off x="566928" y="1572768"/>
+            <a:ext cx="10881360" cy="457200"/>
           </a:xfrm>
           <a:prstGeom prst="rect">
             <a:avLst/>
@@ -7931,7 +8816,7 @@
               <a:buNone/>
             </a:pPr>
             <a:r>
-              <a:rPr lang="en-US" sz="1500" dirty="0">
+              <a:rPr lang="en-US" sz="1450" dirty="0">
                 <a:solidFill>
                   <a:srgbClr val="9BA79B"/>
                 </a:solidFill>
@@ -7939,9 +8824,9 @@
                 <a:ea typeface="Calibri" pitchFamily="34" charset="-122"/>
                 <a:cs typeface="Calibri" pitchFamily="34" charset="-120"/>
               </a:rPr>
-              <a:t>The truth is merchant-side and operator-issued — never anything the buyer can type or edit.</a:t>
-            </a:r>
-            <a:endParaRPr lang="en-US" sz="1500" dirty="0"/>
+              <a:t>From a smartphone checkout to a feature phone with no internet — your customer confirms however they can.</a:t>
+            </a:r>
+            <a:endParaRPr lang="en-US" sz="1450" dirty="0"/>
           </a:p>
         </p:txBody>
       </p:sp>
@@ -7953,12 +8838,12 @@
         </p:nvSpPr>
         <p:spPr>
           <a:xfrm>
-            <a:off x="566928" y="2286000"/>
-            <a:ext cx="5349240" cy="1417320"/>
+            <a:off x="566928" y="2331720"/>
+            <a:ext cx="2006742" cy="3017520"/>
           </a:xfrm>
           <a:prstGeom prst="roundRect">
             <a:avLst>
-              <a:gd name="adj" fmla="val 7097"/>
+              <a:gd name="adj" fmla="val 5012"/>
             </a:avLst>
           </a:prstGeom>
           <a:solidFill>
@@ -7987,12 +8872,12 @@
         </p:nvSpPr>
         <p:spPr>
           <a:xfrm>
-            <a:off x="822960" y="2542032"/>
-            <a:ext cx="548640" cy="548640"/>
+            <a:off x="822960" y="2624328"/>
+            <a:ext cx="603504" cy="603504"/>
           </a:xfrm>
           <a:prstGeom prst="roundRect">
             <a:avLst>
-              <a:gd name="adj" fmla="val 16667"/>
+              <a:gd name="adj" fmla="val 15152"/>
             </a:avLst>
           </a:prstGeom>
           <a:solidFill>
@@ -8022,8 +8907,8 @@
         </p:blipFill>
         <p:spPr>
           <a:xfrm>
-            <a:off x="932688" y="2651760"/>
-            <a:ext cx="329184" cy="329184"/>
+            <a:off x="943661" y="2745029"/>
+            <a:ext cx="362102" cy="362102"/>
           </a:xfrm>
           <a:prstGeom prst="rect">
             <a:avLst/>
@@ -8038,8 +8923,8 @@
         </p:nvSpPr>
         <p:spPr>
           <a:xfrm>
-            <a:off x="1572768" y="2468880"/>
-            <a:ext cx="4206240" cy="365760"/>
+            <a:off x="786384" y="3383280"/>
+            <a:ext cx="1567830" cy="411480"/>
           </a:xfrm>
           <a:prstGeom prst="rect">
             <a:avLst/>
@@ -8055,7 +8940,7 @@
               <a:buNone/>
             </a:pPr>
             <a:r>
-              <a:rPr lang="en-US" sz="1600" b="1" dirty="0">
+              <a:rPr lang="en-US" sz="1550" b="1" dirty="0">
                 <a:solidFill>
                   <a:srgbClr val="F2B944"/>
                 </a:solidFill>
@@ -8063,9 +8948,9 @@
                 <a:ea typeface="Arial" pitchFamily="34" charset="-122"/>
                 <a:cs typeface="Arial" pitchFamily="34" charset="-120"/>
               </a:rPr>
-              <a:t>Single-use, forever</a:t>
-            </a:r>
-            <a:endParaRPr lang="en-US" sz="1600" dirty="0"/>
+              <a:t>Manual</a:t>
+            </a:r>
+            <a:endParaRPr lang="en-US" sz="1550" dirty="0"/>
           </a:p>
         </p:txBody>
       </p:sp>
@@ -8077,8 +8962,8 @@
         </p:nvSpPr>
         <p:spPr>
           <a:xfrm>
-            <a:off x="1572768" y="2852928"/>
-            <a:ext cx="4224528" cy="731520"/>
+            <a:off x="786384" y="3813048"/>
+            <a:ext cx="1567830" cy="1371600"/>
           </a:xfrm>
           <a:prstGeom prst="rect">
             <a:avLst/>
@@ -8092,12 +8977,12 @@
           <a:p>
             <a:pPr indent="0" marL="0">
               <a:lnSpc>
-                <a:spcPct val="108000"/>
+                <a:spcPct val="110000"/>
               </a:lnSpc>
               <a:buNone/>
             </a:pPr>
             <a:r>
-              <a:rPr lang="en-US" sz="1230" dirty="0">
+              <a:rPr lang="en-US" sz="1180" dirty="0">
                 <a:solidFill>
                   <a:srgbClr val="9BA79B"/>
                 </a:solidFill>
@@ -8105,9 +8990,9 @@
                 <a:ea typeface="Calibri" pitchFamily="34" charset="-122"/>
                 <a:cs typeface="Calibri" pitchFamily="34" charset="-120"/>
               </a:rPr>
-              <a:t>One reference confirms one payment and is locked for life — replays are rejected.</a:t>
-            </a:r>
-            <a:endParaRPr lang="en-US" sz="1230" dirty="0"/>
+              <a:t>Paste the code in the Verify Console — no code to write.</a:t>
+            </a:r>
+            <a:endParaRPr lang="en-US" sz="1180" dirty="0"/>
           </a:p>
         </p:txBody>
       </p:sp>
@@ -8119,12 +9004,12 @@
         </p:nvSpPr>
         <p:spPr>
           <a:xfrm>
-            <a:off x="6144768" y="2286000"/>
-            <a:ext cx="5349240" cy="1417320"/>
+            <a:off x="2829702" y="2331720"/>
+            <a:ext cx="2006742" cy="3017520"/>
           </a:xfrm>
           <a:prstGeom prst="roundRect">
             <a:avLst>
-              <a:gd name="adj" fmla="val 7097"/>
+              <a:gd name="adj" fmla="val 5012"/>
             </a:avLst>
           </a:prstGeom>
           <a:solidFill>
@@ -8153,12 +9038,12 @@
         </p:nvSpPr>
         <p:spPr>
           <a:xfrm>
-            <a:off x="6400800" y="2542032"/>
-            <a:ext cx="548640" cy="548640"/>
+            <a:off x="3085734" y="2624328"/>
+            <a:ext cx="603504" cy="603504"/>
           </a:xfrm>
           <a:prstGeom prst="roundRect">
             <a:avLst>
-              <a:gd name="adj" fmla="val 16667"/>
+              <a:gd name="adj" fmla="val 15152"/>
             </a:avLst>
           </a:prstGeom>
           <a:solidFill>
@@ -8188,8 +9073,8 @@
         </p:blipFill>
         <p:spPr>
           <a:xfrm>
-            <a:off x="6510528" y="2651760"/>
-            <a:ext cx="329184" cy="329184"/>
+            <a:off x="3206435" y="2745029"/>
+            <a:ext cx="362102" cy="362102"/>
           </a:xfrm>
           <a:prstGeom prst="rect">
             <a:avLst/>
@@ -8204,8 +9089,8 @@
         </p:nvSpPr>
         <p:spPr>
           <a:xfrm>
-            <a:off x="7150608" y="2468880"/>
-            <a:ext cx="4206240" cy="365760"/>
+            <a:off x="3049158" y="3383280"/>
+            <a:ext cx="1567830" cy="411480"/>
           </a:xfrm>
           <a:prstGeom prst="rect">
             <a:avLst/>
@@ -8221,7 +9106,7 @@
               <a:buNone/>
             </a:pPr>
             <a:r>
-              <a:rPr lang="en-US" sz="1600" b="1" dirty="0">
+              <a:rPr lang="en-US" sz="1550" b="1" dirty="0">
                 <a:solidFill>
                   <a:srgbClr val="F2B944"/>
                 </a:solidFill>
@@ -8229,9 +9114,9 @@
                 <a:ea typeface="Arial" pitchFamily="34" charset="-122"/>
                 <a:cs typeface="Arial" pitchFamily="34" charset="-120"/>
               </a:rPr>
-              <a:t>Balance-chain forgery test</a:t>
-            </a:r>
-            <a:endParaRPr lang="en-US" sz="1600" dirty="0"/>
+              <a:t>WhatsApp</a:t>
+            </a:r>
+            <a:endParaRPr lang="en-US" sz="1550" dirty="0"/>
           </a:p>
         </p:txBody>
       </p:sp>
@@ -8243,8 +9128,8 @@
         </p:nvSpPr>
         <p:spPr>
           <a:xfrm>
-            <a:off x="7150608" y="2852928"/>
-            <a:ext cx="4224528" cy="731520"/>
+            <a:off x="3049158" y="3813048"/>
+            <a:ext cx="1567830" cy="1371600"/>
           </a:xfrm>
           <a:prstGeom prst="rect">
             <a:avLst/>
@@ -8258,12 +9143,12 @@
           <a:p>
             <a:pPr indent="0" marL="0">
               <a:lnSpc>
-                <a:spcPct val="108000"/>
+                <a:spcPct val="110000"/>
               </a:lnSpc>
               <a:buNone/>
             </a:pPr>
             <a:r>
-              <a:rPr lang="en-US" sz="1230" dirty="0">
+              <a:rPr lang="en-US" sz="1180" dirty="0">
                 <a:solidFill>
                   <a:srgbClr val="9BA79B"/>
                 </a:solidFill>
@@ -8271,9 +9156,9 @@
                 <a:ea typeface="Calibri" pitchFamily="34" charset="-122"/>
                 <a:cs typeface="Calibri" pitchFamily="34" charset="-120"/>
               </a:rPr>
-              <a:t>On device streams, the running balances must add up — a forged SMS breaks the chain.</a:t>
-            </a:r>
-            <a:endParaRPr lang="en-US" sz="1230" dirty="0"/>
+              <a:t>The code dropped in the chat is verified in-channel.</a:t>
+            </a:r>
+            <a:endParaRPr lang="en-US" sz="1180" dirty="0"/>
           </a:p>
         </p:txBody>
       </p:sp>
@@ -8285,12 +9170,12 @@
         </p:nvSpPr>
         <p:spPr>
           <a:xfrm>
-            <a:off x="566928" y="3886200"/>
-            <a:ext cx="5349240" cy="1417320"/>
+            <a:off x="5092476" y="2331720"/>
+            <a:ext cx="2006742" cy="3017520"/>
           </a:xfrm>
           <a:prstGeom prst="roundRect">
             <a:avLst>
-              <a:gd name="adj" fmla="val 7097"/>
+              <a:gd name="adj" fmla="val 5012"/>
             </a:avLst>
           </a:prstGeom>
           <a:solidFill>
@@ -8319,12 +9204,12 @@
         </p:nvSpPr>
         <p:spPr>
           <a:xfrm>
-            <a:off x="822960" y="4142232"/>
-            <a:ext cx="548640" cy="548640"/>
+            <a:off x="5348508" y="2624328"/>
+            <a:ext cx="603504" cy="603504"/>
           </a:xfrm>
           <a:prstGeom prst="roundRect">
             <a:avLst>
-              <a:gd name="adj" fmla="val 16667"/>
+              <a:gd name="adj" fmla="val 15152"/>
             </a:avLst>
           </a:prstGeom>
           <a:solidFill>
@@ -8354,8 +9239,8 @@
         </p:blipFill>
         <p:spPr>
           <a:xfrm>
-            <a:off x="932688" y="4251960"/>
-            <a:ext cx="329184" cy="329184"/>
+            <a:off x="5469209" y="2745029"/>
+            <a:ext cx="362102" cy="362102"/>
           </a:xfrm>
           <a:prstGeom prst="rect">
             <a:avLst/>
@@ -8370,8 +9255,8 @@
         </p:nvSpPr>
         <p:spPr>
           <a:xfrm>
-            <a:off x="1572768" y="4069080"/>
-            <a:ext cx="4206240" cy="365760"/>
+            <a:off x="5311932" y="3383280"/>
+            <a:ext cx="1567830" cy="411480"/>
           </a:xfrm>
           <a:prstGeom prst="rect">
             <a:avLst/>
@@ -8387,7 +9272,7 @@
               <a:buNone/>
             </a:pPr>
             <a:r>
-              <a:rPr lang="en-US" sz="1600" b="1" dirty="0">
+              <a:rPr lang="en-US" sz="1550" b="1" dirty="0">
                 <a:solidFill>
                   <a:srgbClr val="F2B944"/>
                 </a:solidFill>
@@ -8395,9 +9280,9 @@
                 <a:ea typeface="Arial" pitchFamily="34" charset="-122"/>
                 <a:cs typeface="Arial" pitchFamily="34" charset="-120"/>
               </a:rPr>
-              <a:t>Amount &amp; currency guards</a:t>
-            </a:r>
-            <a:endParaRPr lang="en-US" sz="1600" dirty="0"/>
+              <a:t>API / drop-in</a:t>
+            </a:r>
+            <a:endParaRPr lang="en-US" sz="1550" dirty="0"/>
           </a:p>
         </p:txBody>
       </p:sp>
@@ -8409,8 +9294,8 @@
         </p:nvSpPr>
         <p:spPr>
           <a:xfrm>
-            <a:off x="1572768" y="4453128"/>
-            <a:ext cx="4224528" cy="731520"/>
+            <a:off x="5311932" y="3813048"/>
+            <a:ext cx="1567830" cy="1371600"/>
           </a:xfrm>
           <a:prstGeom prst="rect">
             <a:avLst/>
@@ -8424,12 +9309,12 @@
           <a:p>
             <a:pPr indent="0" marL="0">
               <a:lnSpc>
-                <a:spcPct val="108000"/>
+                <a:spcPct val="110000"/>
               </a:lnSpc>
               <a:buNone/>
             </a:pPr>
             <a:r>
-              <a:rPr lang="en-US" sz="1230" dirty="0">
+              <a:rPr lang="en-US" sz="1180" dirty="0">
                 <a:solidFill>
                   <a:srgbClr val="9BA79B"/>
                 </a:solidFill>
@@ -8437,9 +9322,9 @@
                 <a:ea typeface="Calibri" pitchFamily="34" charset="-122"/>
                 <a:cs typeface="Calibri" pitchFamily="34" charset="-120"/>
               </a:rPr>
-              <a:t>A code only clears if the amount, currency and window all line up with the order.</a:t>
-            </a:r>
-            <a:endParaRPr lang="en-US" sz="1230" dirty="0"/>
+              <a:t>Three endpoints, a widget, and signed webhooks.</a:t>
+            </a:r>
+            <a:endParaRPr lang="en-US" sz="1180" dirty="0"/>
           </a:p>
         </p:txBody>
       </p:sp>
@@ -8451,12 +9336,12 @@
         </p:nvSpPr>
         <p:spPr>
           <a:xfrm>
-            <a:off x="6144768" y="3886200"/>
-            <a:ext cx="5349240" cy="1417320"/>
+            <a:off x="7355251" y="2331720"/>
+            <a:ext cx="2006742" cy="3017520"/>
           </a:xfrm>
           <a:prstGeom prst="roundRect">
             <a:avLst>
-              <a:gd name="adj" fmla="val 7097"/>
+              <a:gd name="adj" fmla="val 5012"/>
             </a:avLst>
           </a:prstGeom>
           <a:solidFill>
@@ -8485,12 +9370,12 @@
         </p:nvSpPr>
         <p:spPr>
           <a:xfrm>
-            <a:off x="6400800" y="4142232"/>
-            <a:ext cx="548640" cy="548640"/>
+            <a:off x="7611283" y="2624328"/>
+            <a:ext cx="603504" cy="603504"/>
           </a:xfrm>
           <a:prstGeom prst="roundRect">
             <a:avLst>
-              <a:gd name="adj" fmla="val 16667"/>
+              <a:gd name="adj" fmla="val 15152"/>
             </a:avLst>
           </a:prstGeom>
           <a:solidFill>
@@ -8520,8 +9405,8 @@
         </p:blipFill>
         <p:spPr>
           <a:xfrm>
-            <a:off x="6510528" y="4251960"/>
-            <a:ext cx="329184" cy="329184"/>
+            <a:off x="7731984" y="2745029"/>
+            <a:ext cx="362102" cy="362102"/>
           </a:xfrm>
           <a:prstGeom prst="rect">
             <a:avLst/>
@@ -8536,8 +9421,8 @@
         </p:nvSpPr>
         <p:spPr>
           <a:xfrm>
-            <a:off x="7150608" y="4069080"/>
-            <a:ext cx="4206240" cy="365760"/>
+            <a:off x="7574707" y="3383280"/>
+            <a:ext cx="1567830" cy="411480"/>
           </a:xfrm>
           <a:prstGeom prst="rect">
             <a:avLst/>
@@ -8553,7 +9438,7 @@
               <a:buNone/>
             </a:pPr>
             <a:r>
-              <a:rPr lang="en-US" sz="1600" b="1" dirty="0">
+              <a:rPr lang="en-US" sz="1550" b="1" dirty="0">
                 <a:solidFill>
                   <a:srgbClr val="F2B944"/>
                 </a:solidFill>
@@ -8561,9 +9446,9 @@
                 <a:ea typeface="Arial" pitchFamily="34" charset="-122"/>
                 <a:cs typeface="Arial" pitchFamily="34" charset="-120"/>
               </a:rPr>
-              <a:t>Three honest confirmation tiers</a:t>
-            </a:r>
-            <a:endParaRPr lang="en-US" sz="1600" dirty="0"/>
+              <a:t>USSD</a:t>
+            </a:r>
+            <a:endParaRPr lang="en-US" sz="1550" dirty="0"/>
           </a:p>
         </p:txBody>
       </p:sp>
@@ -8575,8 +9460,8 @@
         </p:nvSpPr>
         <p:spPr>
           <a:xfrm>
-            <a:off x="7150608" y="4453128"/>
-            <a:ext cx="4224528" cy="731520"/>
+            <a:off x="7574707" y="3813048"/>
+            <a:ext cx="1567830" cy="1371600"/>
           </a:xfrm>
           <a:prstGeom prst="rect">
             <a:avLst/>
@@ -8590,12 +9475,12 @@
           <a:p>
             <a:pPr indent="0" marL="0">
               <a:lnSpc>
-                <a:spcPct val="108000"/>
+                <a:spcPct val="110000"/>
               </a:lnSpc>
               <a:buNone/>
             </a:pPr>
             <a:r>
-              <a:rPr lang="en-US" sz="1230" dirty="0">
+              <a:rPr lang="en-US" sz="1180" dirty="0">
                 <a:solidFill>
                   <a:srgbClr val="9BA79B"/>
                 </a:solidFill>
@@ -8603,15 +9488,181 @@
                 <a:ea typeface="Calibri" pitchFamily="34" charset="-122"/>
                 <a:cs typeface="Calibri" pitchFamily="34" charset="-120"/>
               </a:rPr>
-              <a:t>Every receipt says how strongly it’s proven — self-reported, device-anchored, or operator cross-confirmed.</a:t>
-            </a:r>
-            <a:endParaRPr lang="en-US" sz="1230" dirty="0"/>
-          </a:p>
-        </p:txBody>
-      </p:sp>
-      <p:sp>
-        <p:nvSpPr>
-          <p:cNvPr id="25" name="Text 19"/>
+              <a:t>Dial a shortcode — any phone, no internet.</a:t>
+            </a:r>
+            <a:endParaRPr lang="en-US" sz="1180" dirty="0"/>
+          </a:p>
+        </p:txBody>
+      </p:sp>
+      <p:sp>
+        <p:nvSpPr>
+          <p:cNvPr id="25" name="Shape 19"/>
+          <p:cNvSpPr/>
+          <p:nvPr/>
+        </p:nvSpPr>
+        <p:spPr>
+          <a:xfrm>
+            <a:off x="9618025" y="2331720"/>
+            <a:ext cx="2006742" cy="3017520"/>
+          </a:xfrm>
+          <a:prstGeom prst="roundRect">
+            <a:avLst>
+              <a:gd name="adj" fmla="val 5012"/>
+            </a:avLst>
+          </a:prstGeom>
+          <a:solidFill>
+            <a:srgbClr val="123027"/>
+          </a:solidFill>
+          <a:ln w="12700">
+            <a:solidFill>
+              <a:srgbClr val="2A4034"/>
+            </a:solidFill>
+            <a:prstDash val="solid"/>
+          </a:ln>
+          <a:effectLst>
+            <a:outerShdw sx="100000" sy="100000" kx="0" ky="0" algn="bl" rotWithShape="0" blurRad="127000" dist="50800" dir="5400000">
+              <a:srgbClr val="000000">
+                <a:alpha val="35000"/>
+              </a:srgbClr>
+            </a:outerShdw>
+          </a:effectLst>
+        </p:spPr>
+      </p:sp>
+      <p:sp>
+        <p:nvSpPr>
+          <p:cNvPr id="26" name="Shape 20"/>
+          <p:cNvSpPr/>
+          <p:nvPr/>
+        </p:nvSpPr>
+        <p:spPr>
+          <a:xfrm>
+            <a:off x="9874057" y="2624328"/>
+            <a:ext cx="603504" cy="603504"/>
+          </a:xfrm>
+          <a:prstGeom prst="roundRect">
+            <a:avLst>
+              <a:gd name="adj" fmla="val 15152"/>
+            </a:avLst>
+          </a:prstGeom>
+          <a:solidFill>
+            <a:srgbClr val="17392E"/>
+          </a:solidFill>
+          <a:ln w="12700">
+            <a:solidFill>
+              <a:srgbClr val="E8A11F"/>
+            </a:solidFill>
+            <a:prstDash val="solid"/>
+          </a:ln>
+        </p:spPr>
+      </p:sp>
+      <p:pic>
+        <p:nvPicPr>
+          <p:cNvPr id="27" name="Image 4" descr="preencoded.png">    </p:cNvPr>
+          <p:cNvPicPr>
+            <a:picLocks noChangeAspect="1"/>
+          </p:cNvPicPr>
+          <p:nvPr/>
+        </p:nvPicPr>
+        <p:blipFill>
+          <a:blip r:embed="rId5"/>
+          <a:stretch>
+            <a:fillRect/>
+          </a:stretch>
+        </p:blipFill>
+        <p:spPr>
+          <a:xfrm>
+            <a:off x="9994758" y="2745029"/>
+            <a:ext cx="362102" cy="362102"/>
+          </a:xfrm>
+          <a:prstGeom prst="rect">
+            <a:avLst/>
+          </a:prstGeom>
+        </p:spPr>
+      </p:pic>
+      <p:sp>
+        <p:nvSpPr>
+          <p:cNvPr id="28" name="Text 21"/>
+          <p:cNvSpPr txBox="1"/>
+          <p:nvPr/>
+        </p:nvSpPr>
+        <p:spPr>
+          <a:xfrm>
+            <a:off x="9837481" y="3383280"/>
+            <a:ext cx="1567830" cy="411480"/>
+          </a:xfrm>
+          <a:prstGeom prst="rect">
+            <a:avLst/>
+          </a:prstGeom>
+          <a:noFill/>
+          <a:ln/>
+        </p:spPr>
+        <p:txBody>
+          <a:bodyPr wrap="square" lIns="0" tIns="0" rIns="0" bIns="0" rtlCol="0" anchor="ctr"/>
+          <a:lstStyle/>
+          <a:p>
+            <a:pPr indent="0" marL="0">
+              <a:buNone/>
+            </a:pPr>
+            <a:r>
+              <a:rPr lang="en-US" sz="1550" b="1" dirty="0">
+                <a:solidFill>
+                  <a:srgbClr val="F2B944"/>
+                </a:solidFill>
+                <a:latin typeface="Arial" pitchFamily="34" charset="0"/>
+                <a:ea typeface="Arial" pitchFamily="34" charset="-122"/>
+                <a:cs typeface="Arial" pitchFamily="34" charset="-120"/>
+              </a:rPr>
+              <a:t>Inbound SMS</a:t>
+            </a:r>
+            <a:endParaRPr lang="en-US" sz="1550" dirty="0"/>
+          </a:p>
+        </p:txBody>
+      </p:sp>
+      <p:sp>
+        <p:nvSpPr>
+          <p:cNvPr id="29" name="Text 22"/>
+          <p:cNvSpPr txBox="1"/>
+          <p:nvPr/>
+        </p:nvSpPr>
+        <p:spPr>
+          <a:xfrm>
+            <a:off x="9837481" y="3813048"/>
+            <a:ext cx="1567830" cy="1371600"/>
+          </a:xfrm>
+          <a:prstGeom prst="rect">
+            <a:avLst/>
+          </a:prstGeom>
+          <a:noFill/>
+          <a:ln/>
+        </p:spPr>
+        <p:txBody>
+          <a:bodyPr wrap="square" lIns="0" tIns="0" rIns="0" bIns="0" rtlCol="0" anchor="ctr"/>
+          <a:lstStyle/>
+          <a:p>
+            <a:pPr indent="0" marL="0">
+              <a:lnSpc>
+                <a:spcPct val="110000"/>
+              </a:lnSpc>
+              <a:buNone/>
+            </a:pPr>
+            <a:r>
+              <a:rPr lang="en-US" sz="1180" dirty="0">
+                <a:solidFill>
+                  <a:srgbClr val="9BA79B"/>
+                </a:solidFill>
+                <a:latin typeface="Calibri" pitchFamily="34" charset="0"/>
+                <a:ea typeface="Calibri" pitchFamily="34" charset="-122"/>
+                <a:cs typeface="Calibri" pitchFamily="34" charset="-120"/>
+              </a:rPr>
+              <a:t>Text the code (or forward the SMS) to verify.</a:t>
+            </a:r>
+            <a:endParaRPr lang="en-US" sz="1180" dirty="0"/>
+          </a:p>
+        </p:txBody>
+      </p:sp>
+      <p:sp>
+        <p:nvSpPr>
+          <p:cNvPr id="30" name="Text 23"/>
           <p:cNvSpPr txBox="1"/>
           <p:nvPr/>
         </p:nvSpPr>
@@ -8703,7 +9754,7 @@
         <p:spPr>
           <a:xfrm>
             <a:off x="566928" y="640080"/>
-            <a:ext cx="7315200" cy="274320"/>
+            <a:ext cx="9144000" cy="274320"/>
           </a:xfrm>
           <a:prstGeom prst="rect">
             <a:avLst/>
@@ -8727,7 +9778,7 @@
                 <a:ea typeface="Courier New" pitchFamily="34" charset="-122"/>
                 <a:cs typeface="Courier New" pitchFamily="34" charset="-120"/>
               </a:rPr>
-              <a:t>GLOBAL BY CONSTRUCTION</a:t>
+              <a:t>ANTI-FRAUD, BY DESIGN</a:t>
             </a:r>
             <a:endParaRPr lang="en-US" sz="1150" dirty="0"/>
           </a:p>
@@ -8742,7 +9793,7 @@
         <p:spPr>
           <a:xfrm>
             <a:off x="566928" y="960120"/>
-            <a:ext cx="10972800" cy="640080"/>
+            <a:ext cx="7315200" cy="731520"/>
           </a:xfrm>
           <a:prstGeom prst="rect">
             <a:avLst/>
@@ -8758,7 +9809,7 @@
               <a:buNone/>
             </a:pPr>
             <a:r>
-              <a:rPr lang="en-US" sz="3000" b="1" dirty="0">
+              <a:rPr lang="en-US" sz="4000" b="1" dirty="0">
                 <a:solidFill>
                   <a:srgbClr val="E9E4D5"/>
                 </a:solidFill>
@@ -8766,26 +9817,65 @@
                 <a:ea typeface="Arial" pitchFamily="34" charset="-122"/>
                 <a:cs typeface="Arial" pitchFamily="34" charset="-120"/>
               </a:rPr>
-              <a:t>Coverage is a parsing map — not a pile of telco deals.</a:t>
-            </a:r>
-            <a:endParaRPr lang="en-US" sz="3000" dirty="0"/>
-          </a:p>
-        </p:txBody>
-      </p:sp>
-      <p:sp>
-        <p:nvSpPr>
-          <p:cNvPr id="4" name="Shape 2"/>
+              <a:t>Built to be lied to.</a:t>
+            </a:r>
+            <a:endParaRPr lang="en-US" sz="4000" dirty="0"/>
+          </a:p>
+        </p:txBody>
+      </p:sp>
+      <p:sp>
+        <p:nvSpPr>
+          <p:cNvPr id="4" name="Text 2"/>
+          <p:cNvSpPr txBox="1"/>
+          <p:nvPr/>
+        </p:nvSpPr>
+        <p:spPr>
+          <a:xfrm>
+            <a:off x="566928" y="1691640"/>
+            <a:ext cx="10881360" cy="457200"/>
+          </a:xfrm>
+          <a:prstGeom prst="rect">
+            <a:avLst/>
+          </a:prstGeom>
+          <a:noFill/>
+          <a:ln/>
+        </p:spPr>
+        <p:txBody>
+          <a:bodyPr wrap="square" lIns="0" tIns="0" rIns="0" bIns="0" rtlCol="0" anchor="ctr"/>
+          <a:lstStyle/>
+          <a:p>
+            <a:pPr indent="0" marL="0">
+              <a:buNone/>
+            </a:pPr>
+            <a:r>
+              <a:rPr lang="en-US" sz="1500" dirty="0">
+                <a:solidFill>
+                  <a:srgbClr val="9BA79B"/>
+                </a:solidFill>
+                <a:latin typeface="Calibri" pitchFamily="34" charset="0"/>
+                <a:ea typeface="Calibri" pitchFamily="34" charset="-122"/>
+                <a:cs typeface="Calibri" pitchFamily="34" charset="-120"/>
+              </a:rPr>
+              <a:t>The truth is merchant-side and operator-issued — never anything the buyer can type or edit.</a:t>
+            </a:r>
+            <a:endParaRPr lang="en-US" sz="1500" dirty="0"/>
+          </a:p>
+        </p:txBody>
+      </p:sp>
+      <p:sp>
+        <p:nvSpPr>
+          <p:cNvPr id="5" name="Shape 3"/>
           <p:cNvSpPr/>
           <p:nvPr/>
         </p:nvSpPr>
         <p:spPr>
           <a:xfrm>
-            <a:off x="566928" y="2148840"/>
-            <a:ext cx="2558720" cy="1737360"/>
+            <a:off x="566928" y="2286000"/>
+            <a:ext cx="5349240" cy="1417320"/>
           </a:xfrm>
           <a:prstGeom prst="roundRect">
             <a:avLst>
-              <a:gd name="adj" fmla="val 5789"/>
+              <a:gd name="adj" fmla="val 7097"/>
             </a:avLst>
           </a:prstGeom>
           <a:solidFill>
@@ -8808,69 +9898,123 @@
       </p:sp>
       <p:sp>
         <p:nvSpPr>
-          <p:cNvPr id="5" name="Text 3"/>
-          <p:cNvSpPr txBox="1"/>
-          <p:nvPr/>
-        </p:nvSpPr>
-        <p:spPr>
-          <a:xfrm>
-            <a:off x="658368" y="2377440"/>
-            <a:ext cx="2375840" cy="868680"/>
-          </a:xfrm>
-          <a:prstGeom prst="rect">
-            <a:avLst/>
-          </a:prstGeom>
-          <a:noFill/>
-          <a:ln/>
-        </p:spPr>
-        <p:txBody>
-          <a:bodyPr wrap="square" lIns="0" tIns="0" rIns="0" bIns="0" rtlCol="0" anchor="ctr"/>
-          <a:lstStyle/>
-          <a:p>
-            <a:pPr algn="ctr" indent="0" marL="0">
-              <a:buNone/>
-            </a:pPr>
-            <a:r>
-              <a:rPr lang="en-US" sz="6000" b="1" dirty="0">
-                <a:solidFill>
-                  <a:srgbClr val="E8A11F"/>
+          <p:cNvPr id="6" name="Shape 4"/>
+          <p:cNvSpPr/>
+          <p:nvPr/>
+        </p:nvSpPr>
+        <p:spPr>
+          <a:xfrm>
+            <a:off x="822960" y="2542032"/>
+            <a:ext cx="548640" cy="548640"/>
+          </a:xfrm>
+          <a:prstGeom prst="roundRect">
+            <a:avLst>
+              <a:gd name="adj" fmla="val 16667"/>
+            </a:avLst>
+          </a:prstGeom>
+          <a:solidFill>
+            <a:srgbClr val="17392E"/>
+          </a:solidFill>
+          <a:ln w="12700">
+            <a:solidFill>
+              <a:srgbClr val="E8A11F"/>
+            </a:solidFill>
+            <a:prstDash val="solid"/>
+          </a:ln>
+        </p:spPr>
+      </p:sp>
+      <p:pic>
+        <p:nvPicPr>
+          <p:cNvPr id="7" name="Image 0" descr="preencoded.png">    </p:cNvPr>
+          <p:cNvPicPr>
+            <a:picLocks noChangeAspect="1"/>
+          </p:cNvPicPr>
+          <p:nvPr/>
+        </p:nvPicPr>
+        <p:blipFill>
+          <a:blip r:embed="rId1"/>
+          <a:stretch>
+            <a:fillRect/>
+          </a:stretch>
+        </p:blipFill>
+        <p:spPr>
+          <a:xfrm>
+            <a:off x="932688" y="2651760"/>
+            <a:ext cx="329184" cy="329184"/>
+          </a:xfrm>
+          <a:prstGeom prst="rect">
+            <a:avLst/>
+          </a:prstGeom>
+        </p:spPr>
+      </p:pic>
+      <p:sp>
+        <p:nvSpPr>
+          <p:cNvPr id="8" name="Text 5"/>
+          <p:cNvSpPr txBox="1"/>
+          <p:nvPr/>
+        </p:nvSpPr>
+        <p:spPr>
+          <a:xfrm>
+            <a:off x="1572768" y="2468880"/>
+            <a:ext cx="4206240" cy="365760"/>
+          </a:xfrm>
+          <a:prstGeom prst="rect">
+            <a:avLst/>
+          </a:prstGeom>
+          <a:noFill/>
+          <a:ln/>
+        </p:spPr>
+        <p:txBody>
+          <a:bodyPr wrap="square" lIns="0" tIns="0" rIns="0" bIns="0" rtlCol="0" anchor="ctr"/>
+          <a:lstStyle/>
+          <a:p>
+            <a:pPr indent="0" marL="0">
+              <a:buNone/>
+            </a:pPr>
+            <a:r>
+              <a:rPr lang="en-US" sz="1600" b="1" dirty="0">
+                <a:solidFill>
+                  <a:srgbClr val="F2B944"/>
                 </a:solidFill>
                 <a:latin typeface="Arial" pitchFamily="34" charset="0"/>
                 <a:ea typeface="Arial" pitchFamily="34" charset="-122"/>
                 <a:cs typeface="Arial" pitchFamily="34" charset="-120"/>
               </a:rPr>
-              <a:t>235</a:t>
-            </a:r>
-            <a:endParaRPr lang="en-US" sz="6000" dirty="0"/>
-          </a:p>
-        </p:txBody>
-      </p:sp>
-      <p:sp>
-        <p:nvSpPr>
-          <p:cNvPr id="6" name="Text 4"/>
-          <p:cNvSpPr txBox="1"/>
-          <p:nvPr/>
-        </p:nvSpPr>
-        <p:spPr>
-          <a:xfrm>
-            <a:off x="658368" y="3319272"/>
-            <a:ext cx="2375840" cy="457200"/>
-          </a:xfrm>
-          <a:prstGeom prst="rect">
-            <a:avLst/>
-          </a:prstGeom>
-          <a:noFill/>
-          <a:ln/>
-        </p:spPr>
-        <p:txBody>
-          <a:bodyPr wrap="square" lIns="0" tIns="0" rIns="0" bIns="0" rtlCol="0" anchor="ctr"/>
-          <a:lstStyle/>
-          <a:p>
-            <a:pPr algn="ctr" indent="0" marL="0">
-              <a:buNone/>
-            </a:pPr>
-            <a:r>
-              <a:rPr lang="en-US" sz="1250" dirty="0">
+              <a:t>Single-use, forever</a:t>
+            </a:r>
+            <a:endParaRPr lang="en-US" sz="1600" dirty="0"/>
+          </a:p>
+        </p:txBody>
+      </p:sp>
+      <p:sp>
+        <p:nvSpPr>
+          <p:cNvPr id="9" name="Text 6"/>
+          <p:cNvSpPr txBox="1"/>
+          <p:nvPr/>
+        </p:nvSpPr>
+        <p:spPr>
+          <a:xfrm>
+            <a:off x="1572768" y="2852928"/>
+            <a:ext cx="4224528" cy="731520"/>
+          </a:xfrm>
+          <a:prstGeom prst="rect">
+            <a:avLst/>
+          </a:prstGeom>
+          <a:noFill/>
+          <a:ln/>
+        </p:spPr>
+        <p:txBody>
+          <a:bodyPr wrap="square" lIns="0" tIns="0" rIns="0" bIns="0" rtlCol="0" anchor="ctr"/>
+          <a:lstStyle/>
+          <a:p>
+            <a:pPr indent="0" marL="0">
+              <a:lnSpc>
+                <a:spcPct val="108000"/>
+              </a:lnSpc>
+              <a:buNone/>
+            </a:pPr>
+            <a:r>
+              <a:rPr lang="en-US" sz="1230" dirty="0">
                 <a:solidFill>
                   <a:srgbClr val="9BA79B"/>
                 </a:solidFill>
@@ -8878,26 +10022,26 @@
                 <a:ea typeface="Calibri" pitchFamily="34" charset="-122"/>
                 <a:cs typeface="Calibri" pitchFamily="34" charset="-120"/>
               </a:rPr>
-              <a:t>operators in the registry</a:t>
-            </a:r>
-            <a:endParaRPr lang="en-US" sz="1250" dirty="0"/>
-          </a:p>
-        </p:txBody>
-      </p:sp>
-      <p:sp>
-        <p:nvSpPr>
-          <p:cNvPr id="7" name="Shape 5"/>
+              <a:t>One reference confirms one payment and is locked for life — replays are rejected.</a:t>
+            </a:r>
+            <a:endParaRPr lang="en-US" sz="1230" dirty="0"/>
+          </a:p>
+        </p:txBody>
+      </p:sp>
+      <p:sp>
+        <p:nvSpPr>
+          <p:cNvPr id="10" name="Shape 7"/>
           <p:cNvSpPr/>
           <p:nvPr/>
         </p:nvSpPr>
         <p:spPr>
           <a:xfrm>
-            <a:off x="3399968" y="2148840"/>
-            <a:ext cx="2558720" cy="1737360"/>
+            <a:off x="6144768" y="2286000"/>
+            <a:ext cx="5349240" cy="1417320"/>
           </a:xfrm>
           <a:prstGeom prst="roundRect">
             <a:avLst>
-              <a:gd name="adj" fmla="val 5789"/>
+              <a:gd name="adj" fmla="val 7097"/>
             </a:avLst>
           </a:prstGeom>
           <a:solidFill>
@@ -8920,69 +10064,123 @@
       </p:sp>
       <p:sp>
         <p:nvSpPr>
-          <p:cNvPr id="8" name="Text 6"/>
-          <p:cNvSpPr txBox="1"/>
-          <p:nvPr/>
-        </p:nvSpPr>
-        <p:spPr>
-          <a:xfrm>
-            <a:off x="3491408" y="2377440"/>
-            <a:ext cx="2375840" cy="868680"/>
-          </a:xfrm>
-          <a:prstGeom prst="rect">
-            <a:avLst/>
-          </a:prstGeom>
-          <a:noFill/>
-          <a:ln/>
-        </p:spPr>
-        <p:txBody>
-          <a:bodyPr wrap="square" lIns="0" tIns="0" rIns="0" bIns="0" rtlCol="0" anchor="ctr"/>
-          <a:lstStyle/>
-          <a:p>
-            <a:pPr algn="ctr" indent="0" marL="0">
-              <a:buNone/>
-            </a:pPr>
-            <a:r>
-              <a:rPr lang="en-US" sz="6000" b="1" dirty="0">
-                <a:solidFill>
-                  <a:srgbClr val="E8A11F"/>
+          <p:cNvPr id="11" name="Shape 8"/>
+          <p:cNvSpPr/>
+          <p:nvPr/>
+        </p:nvSpPr>
+        <p:spPr>
+          <a:xfrm>
+            <a:off x="6400800" y="2542032"/>
+            <a:ext cx="548640" cy="548640"/>
+          </a:xfrm>
+          <a:prstGeom prst="roundRect">
+            <a:avLst>
+              <a:gd name="adj" fmla="val 16667"/>
+            </a:avLst>
+          </a:prstGeom>
+          <a:solidFill>
+            <a:srgbClr val="17392E"/>
+          </a:solidFill>
+          <a:ln w="12700">
+            <a:solidFill>
+              <a:srgbClr val="E8A11F"/>
+            </a:solidFill>
+            <a:prstDash val="solid"/>
+          </a:ln>
+        </p:spPr>
+      </p:sp>
+      <p:pic>
+        <p:nvPicPr>
+          <p:cNvPr id="12" name="Image 1" descr="preencoded.png">    </p:cNvPr>
+          <p:cNvPicPr>
+            <a:picLocks noChangeAspect="1"/>
+          </p:cNvPicPr>
+          <p:nvPr/>
+        </p:nvPicPr>
+        <p:blipFill>
+          <a:blip r:embed="rId2"/>
+          <a:stretch>
+            <a:fillRect/>
+          </a:stretch>
+        </p:blipFill>
+        <p:spPr>
+          <a:xfrm>
+            <a:off x="6510528" y="2651760"/>
+            <a:ext cx="329184" cy="329184"/>
+          </a:xfrm>
+          <a:prstGeom prst="rect">
+            <a:avLst/>
+          </a:prstGeom>
+        </p:spPr>
+      </p:pic>
+      <p:sp>
+        <p:nvSpPr>
+          <p:cNvPr id="13" name="Text 9"/>
+          <p:cNvSpPr txBox="1"/>
+          <p:nvPr/>
+        </p:nvSpPr>
+        <p:spPr>
+          <a:xfrm>
+            <a:off x="7150608" y="2468880"/>
+            <a:ext cx="4206240" cy="365760"/>
+          </a:xfrm>
+          <a:prstGeom prst="rect">
+            <a:avLst/>
+          </a:prstGeom>
+          <a:noFill/>
+          <a:ln/>
+        </p:spPr>
+        <p:txBody>
+          <a:bodyPr wrap="square" lIns="0" tIns="0" rIns="0" bIns="0" rtlCol="0" anchor="ctr"/>
+          <a:lstStyle/>
+          <a:p>
+            <a:pPr indent="0" marL="0">
+              <a:buNone/>
+            </a:pPr>
+            <a:r>
+              <a:rPr lang="en-US" sz="1600" b="1" dirty="0">
+                <a:solidFill>
+                  <a:srgbClr val="F2B944"/>
                 </a:solidFill>
                 <a:latin typeface="Arial" pitchFamily="34" charset="0"/>
                 <a:ea typeface="Arial" pitchFamily="34" charset="-122"/>
                 <a:cs typeface="Arial" pitchFamily="34" charset="-120"/>
               </a:rPr>
-              <a:t>95</a:t>
-            </a:r>
-            <a:endParaRPr lang="en-US" sz="6000" dirty="0"/>
-          </a:p>
-        </p:txBody>
-      </p:sp>
-      <p:sp>
-        <p:nvSpPr>
-          <p:cNvPr id="9" name="Text 7"/>
-          <p:cNvSpPr txBox="1"/>
-          <p:nvPr/>
-        </p:nvSpPr>
-        <p:spPr>
-          <a:xfrm>
-            <a:off x="3491408" y="3319272"/>
-            <a:ext cx="2375840" cy="457200"/>
-          </a:xfrm>
-          <a:prstGeom prst="rect">
-            <a:avLst/>
-          </a:prstGeom>
-          <a:noFill/>
-          <a:ln/>
-        </p:spPr>
-        <p:txBody>
-          <a:bodyPr wrap="square" lIns="0" tIns="0" rIns="0" bIns="0" rtlCol="0" anchor="ctr"/>
-          <a:lstStyle/>
-          <a:p>
-            <a:pPr algn="ctr" indent="0" marL="0">
-              <a:buNone/>
-            </a:pPr>
-            <a:r>
-              <a:rPr lang="en-US" sz="1250" dirty="0">
+              <a:t>Balance-chain forgery test</a:t>
+            </a:r>
+            <a:endParaRPr lang="en-US" sz="1600" dirty="0"/>
+          </a:p>
+        </p:txBody>
+      </p:sp>
+      <p:sp>
+        <p:nvSpPr>
+          <p:cNvPr id="14" name="Text 10"/>
+          <p:cNvSpPr txBox="1"/>
+          <p:nvPr/>
+        </p:nvSpPr>
+        <p:spPr>
+          <a:xfrm>
+            <a:off x="7150608" y="2852928"/>
+            <a:ext cx="4224528" cy="731520"/>
+          </a:xfrm>
+          <a:prstGeom prst="rect">
+            <a:avLst/>
+          </a:prstGeom>
+          <a:noFill/>
+          <a:ln/>
+        </p:spPr>
+        <p:txBody>
+          <a:bodyPr wrap="square" lIns="0" tIns="0" rIns="0" bIns="0" rtlCol="0" anchor="ctr"/>
+          <a:lstStyle/>
+          <a:p>
+            <a:pPr indent="0" marL="0">
+              <a:lnSpc>
+                <a:spcPct val="108000"/>
+              </a:lnSpc>
+              <a:buNone/>
+            </a:pPr>
+            <a:r>
+              <a:rPr lang="en-US" sz="1230" dirty="0">
                 <a:solidFill>
                   <a:srgbClr val="9BA79B"/>
                 </a:solidFill>
@@ -8990,26 +10188,26 @@
                 <a:ea typeface="Calibri" pitchFamily="34" charset="-122"/>
                 <a:cs typeface="Calibri" pitchFamily="34" charset="-120"/>
               </a:rPr>
-              <a:t>countries</a:t>
-            </a:r>
-            <a:endParaRPr lang="en-US" sz="1250" dirty="0"/>
-          </a:p>
-        </p:txBody>
-      </p:sp>
-      <p:sp>
-        <p:nvSpPr>
-          <p:cNvPr id="10" name="Shape 8"/>
+              <a:t>On device streams, the running balances must add up — a forged SMS breaks the chain.</a:t>
+            </a:r>
+            <a:endParaRPr lang="en-US" sz="1230" dirty="0"/>
+          </a:p>
+        </p:txBody>
+      </p:sp>
+      <p:sp>
+        <p:nvSpPr>
+          <p:cNvPr id="15" name="Shape 11"/>
           <p:cNvSpPr/>
           <p:nvPr/>
         </p:nvSpPr>
         <p:spPr>
           <a:xfrm>
-            <a:off x="6233008" y="2148840"/>
-            <a:ext cx="2558720" cy="1737360"/>
+            <a:off x="566928" y="3886200"/>
+            <a:ext cx="5349240" cy="1417320"/>
           </a:xfrm>
           <a:prstGeom prst="roundRect">
             <a:avLst>
-              <a:gd name="adj" fmla="val 5789"/>
+              <a:gd name="adj" fmla="val 7097"/>
             </a:avLst>
           </a:prstGeom>
           <a:solidFill>
@@ -9032,69 +10230,123 @@
       </p:sp>
       <p:sp>
         <p:nvSpPr>
-          <p:cNvPr id="11" name="Text 9"/>
-          <p:cNvSpPr txBox="1"/>
-          <p:nvPr/>
-        </p:nvSpPr>
-        <p:spPr>
-          <a:xfrm>
-            <a:off x="6324448" y="2377440"/>
-            <a:ext cx="2375840" cy="868680"/>
-          </a:xfrm>
-          <a:prstGeom prst="rect">
-            <a:avLst/>
-          </a:prstGeom>
-          <a:noFill/>
-          <a:ln/>
-        </p:spPr>
-        <p:txBody>
-          <a:bodyPr wrap="square" lIns="0" tIns="0" rIns="0" bIns="0" rtlCol="0" anchor="ctr"/>
-          <a:lstStyle/>
-          <a:p>
-            <a:pPr algn="ctr" indent="0" marL="0">
-              <a:buNone/>
-            </a:pPr>
-            <a:r>
-              <a:rPr lang="en-US" sz="6000" b="1" dirty="0">
-                <a:solidFill>
-                  <a:srgbClr val="E8A11F"/>
+          <p:cNvPr id="16" name="Shape 12"/>
+          <p:cNvSpPr/>
+          <p:nvPr/>
+        </p:nvSpPr>
+        <p:spPr>
+          <a:xfrm>
+            <a:off x="822960" y="4142232"/>
+            <a:ext cx="548640" cy="548640"/>
+          </a:xfrm>
+          <a:prstGeom prst="roundRect">
+            <a:avLst>
+              <a:gd name="adj" fmla="val 16667"/>
+            </a:avLst>
+          </a:prstGeom>
+          <a:solidFill>
+            <a:srgbClr val="17392E"/>
+          </a:solidFill>
+          <a:ln w="12700">
+            <a:solidFill>
+              <a:srgbClr val="E8A11F"/>
+            </a:solidFill>
+            <a:prstDash val="solid"/>
+          </a:ln>
+        </p:spPr>
+      </p:sp>
+      <p:pic>
+        <p:nvPicPr>
+          <p:cNvPr id="17" name="Image 2" descr="preencoded.png">    </p:cNvPr>
+          <p:cNvPicPr>
+            <a:picLocks noChangeAspect="1"/>
+          </p:cNvPicPr>
+          <p:nvPr/>
+        </p:nvPicPr>
+        <p:blipFill>
+          <a:blip r:embed="rId3"/>
+          <a:stretch>
+            <a:fillRect/>
+          </a:stretch>
+        </p:blipFill>
+        <p:spPr>
+          <a:xfrm>
+            <a:off x="932688" y="4251960"/>
+            <a:ext cx="329184" cy="329184"/>
+          </a:xfrm>
+          <a:prstGeom prst="rect">
+            <a:avLst/>
+          </a:prstGeom>
+        </p:spPr>
+      </p:pic>
+      <p:sp>
+        <p:nvSpPr>
+          <p:cNvPr id="18" name="Text 13"/>
+          <p:cNvSpPr txBox="1"/>
+          <p:nvPr/>
+        </p:nvSpPr>
+        <p:spPr>
+          <a:xfrm>
+            <a:off x="1572768" y="4069080"/>
+            <a:ext cx="4206240" cy="365760"/>
+          </a:xfrm>
+          <a:prstGeom prst="rect">
+            <a:avLst/>
+          </a:prstGeom>
+          <a:noFill/>
+          <a:ln/>
+        </p:spPr>
+        <p:txBody>
+          <a:bodyPr wrap="square" lIns="0" tIns="0" rIns="0" bIns="0" rtlCol="0" anchor="ctr"/>
+          <a:lstStyle/>
+          <a:p>
+            <a:pPr indent="0" marL="0">
+              <a:buNone/>
+            </a:pPr>
+            <a:r>
+              <a:rPr lang="en-US" sz="1600" b="1" dirty="0">
+                <a:solidFill>
+                  <a:srgbClr val="F2B944"/>
                 </a:solidFill>
                 <a:latin typeface="Arial" pitchFamily="34" charset="0"/>
                 <a:ea typeface="Arial" pitchFamily="34" charset="-122"/>
                 <a:cs typeface="Arial" pitchFamily="34" charset="-120"/>
               </a:rPr>
-              <a:t>12</a:t>
-            </a:r>
-            <a:endParaRPr lang="en-US" sz="6000" dirty="0"/>
-          </a:p>
-        </p:txBody>
-      </p:sp>
-      <p:sp>
-        <p:nvSpPr>
-          <p:cNvPr id="12" name="Text 10"/>
-          <p:cNvSpPr txBox="1"/>
-          <p:nvPr/>
-        </p:nvSpPr>
-        <p:spPr>
-          <a:xfrm>
-            <a:off x="6324448" y="3319272"/>
-            <a:ext cx="2375840" cy="457200"/>
-          </a:xfrm>
-          <a:prstGeom prst="rect">
-            <a:avLst/>
-          </a:prstGeom>
-          <a:noFill/>
-          <a:ln/>
-        </p:spPr>
-        <p:txBody>
-          <a:bodyPr wrap="square" lIns="0" tIns="0" rIns="0" bIns="0" rtlCol="0" anchor="ctr"/>
-          <a:lstStyle/>
-          <a:p>
-            <a:pPr algn="ctr" indent="0" marL="0">
-              <a:buNone/>
-            </a:pPr>
-            <a:r>
-              <a:rPr lang="en-US" sz="1250" dirty="0">
+              <a:t>Amount &amp; currency guards</a:t>
+            </a:r>
+            <a:endParaRPr lang="en-US" sz="1600" dirty="0"/>
+          </a:p>
+        </p:txBody>
+      </p:sp>
+      <p:sp>
+        <p:nvSpPr>
+          <p:cNvPr id="19" name="Text 14"/>
+          <p:cNvSpPr txBox="1"/>
+          <p:nvPr/>
+        </p:nvSpPr>
+        <p:spPr>
+          <a:xfrm>
+            <a:off x="1572768" y="4453128"/>
+            <a:ext cx="4224528" cy="731520"/>
+          </a:xfrm>
+          <a:prstGeom prst="rect">
+            <a:avLst/>
+          </a:prstGeom>
+          <a:noFill/>
+          <a:ln/>
+        </p:spPr>
+        <p:txBody>
+          <a:bodyPr wrap="square" lIns="0" tIns="0" rIns="0" bIns="0" rtlCol="0" anchor="ctr"/>
+          <a:lstStyle/>
+          <a:p>
+            <a:pPr indent="0" marL="0">
+              <a:lnSpc>
+                <a:spcPct val="108000"/>
+              </a:lnSpc>
+              <a:buNone/>
+            </a:pPr>
+            <a:r>
+              <a:rPr lang="en-US" sz="1230" dirty="0">
                 <a:solidFill>
                   <a:srgbClr val="9BA79B"/>
                 </a:solidFill>
@@ -9102,26 +10354,26 @@
                 <a:ea typeface="Calibri" pitchFamily="34" charset="-122"/>
                 <a:cs typeface="Calibri" pitchFamily="34" charset="-120"/>
               </a:rPr>
-              <a:t>world regions</a:t>
-            </a:r>
-            <a:endParaRPr lang="en-US" sz="1250" dirty="0"/>
-          </a:p>
-        </p:txBody>
-      </p:sp>
-      <p:sp>
-        <p:nvSpPr>
-          <p:cNvPr id="13" name="Shape 11"/>
+              <a:t>A code only clears if the amount, currency and window all line up with the order.</a:t>
+            </a:r>
+            <a:endParaRPr lang="en-US" sz="1230" dirty="0"/>
+          </a:p>
+        </p:txBody>
+      </p:sp>
+      <p:sp>
+        <p:nvSpPr>
+          <p:cNvPr id="20" name="Shape 15"/>
           <p:cNvSpPr/>
           <p:nvPr/>
         </p:nvSpPr>
         <p:spPr>
           <a:xfrm>
-            <a:off x="9066047" y="2148840"/>
-            <a:ext cx="2558720" cy="1737360"/>
+            <a:off x="6144768" y="3886200"/>
+            <a:ext cx="5349240" cy="1417320"/>
           </a:xfrm>
           <a:prstGeom prst="roundRect">
             <a:avLst>
-              <a:gd name="adj" fmla="val 5789"/>
+              <a:gd name="adj" fmla="val 7097"/>
             </a:avLst>
           </a:prstGeom>
           <a:solidFill>
@@ -9144,69 +10396,123 @@
       </p:sp>
       <p:sp>
         <p:nvSpPr>
-          <p:cNvPr id="14" name="Text 12"/>
-          <p:cNvSpPr txBox="1"/>
-          <p:nvPr/>
-        </p:nvSpPr>
-        <p:spPr>
-          <a:xfrm>
-            <a:off x="9157487" y="2377440"/>
-            <a:ext cx="2375840" cy="868680"/>
-          </a:xfrm>
-          <a:prstGeom prst="rect">
-            <a:avLst/>
-          </a:prstGeom>
-          <a:noFill/>
-          <a:ln/>
-        </p:spPr>
-        <p:txBody>
-          <a:bodyPr wrap="square" lIns="0" tIns="0" rIns="0" bIns="0" rtlCol="0" anchor="ctr"/>
-          <a:lstStyle/>
-          <a:p>
-            <a:pPr algn="ctr" indent="0" marL="0">
-              <a:buNone/>
-            </a:pPr>
-            <a:r>
-              <a:rPr lang="en-US" sz="6000" b="1" dirty="0">
-                <a:solidFill>
-                  <a:srgbClr val="E8A11F"/>
+          <p:cNvPr id="21" name="Shape 16"/>
+          <p:cNvSpPr/>
+          <p:nvPr/>
+        </p:nvSpPr>
+        <p:spPr>
+          <a:xfrm>
+            <a:off x="6400800" y="4142232"/>
+            <a:ext cx="548640" cy="548640"/>
+          </a:xfrm>
+          <a:prstGeom prst="roundRect">
+            <a:avLst>
+              <a:gd name="adj" fmla="val 16667"/>
+            </a:avLst>
+          </a:prstGeom>
+          <a:solidFill>
+            <a:srgbClr val="17392E"/>
+          </a:solidFill>
+          <a:ln w="12700">
+            <a:solidFill>
+              <a:srgbClr val="E8A11F"/>
+            </a:solidFill>
+            <a:prstDash val="solid"/>
+          </a:ln>
+        </p:spPr>
+      </p:sp>
+      <p:pic>
+        <p:nvPicPr>
+          <p:cNvPr id="22" name="Image 3" descr="preencoded.png">    </p:cNvPr>
+          <p:cNvPicPr>
+            <a:picLocks noChangeAspect="1"/>
+          </p:cNvPicPr>
+          <p:nvPr/>
+        </p:nvPicPr>
+        <p:blipFill>
+          <a:blip r:embed="rId4"/>
+          <a:stretch>
+            <a:fillRect/>
+          </a:stretch>
+        </p:blipFill>
+        <p:spPr>
+          <a:xfrm>
+            <a:off x="6510528" y="4251960"/>
+            <a:ext cx="329184" cy="329184"/>
+          </a:xfrm>
+          <a:prstGeom prst="rect">
+            <a:avLst/>
+          </a:prstGeom>
+        </p:spPr>
+      </p:pic>
+      <p:sp>
+        <p:nvSpPr>
+          <p:cNvPr id="23" name="Text 17"/>
+          <p:cNvSpPr txBox="1"/>
+          <p:nvPr/>
+        </p:nvSpPr>
+        <p:spPr>
+          <a:xfrm>
+            <a:off x="7150608" y="4069080"/>
+            <a:ext cx="4206240" cy="365760"/>
+          </a:xfrm>
+          <a:prstGeom prst="rect">
+            <a:avLst/>
+          </a:prstGeom>
+          <a:noFill/>
+          <a:ln/>
+        </p:spPr>
+        <p:txBody>
+          <a:bodyPr wrap="square" lIns="0" tIns="0" rIns="0" bIns="0" rtlCol="0" anchor="ctr"/>
+          <a:lstStyle/>
+          <a:p>
+            <a:pPr indent="0" marL="0">
+              <a:buNone/>
+            </a:pPr>
+            <a:r>
+              <a:rPr lang="en-US" sz="1600" b="1" dirty="0">
+                <a:solidFill>
+                  <a:srgbClr val="F2B944"/>
                 </a:solidFill>
                 <a:latin typeface="Arial" pitchFamily="34" charset="0"/>
                 <a:ea typeface="Arial" pitchFamily="34" charset="-122"/>
                 <a:cs typeface="Arial" pitchFamily="34" charset="-120"/>
               </a:rPr>
-              <a:t>111</a:t>
-            </a:r>
-            <a:endParaRPr lang="en-US" sz="6000" dirty="0"/>
-          </a:p>
-        </p:txBody>
-      </p:sp>
-      <p:sp>
-        <p:nvSpPr>
-          <p:cNvPr id="15" name="Text 13"/>
-          <p:cNvSpPr txBox="1"/>
-          <p:nvPr/>
-        </p:nvSpPr>
-        <p:spPr>
-          <a:xfrm>
-            <a:off x="9157487" y="3319272"/>
-            <a:ext cx="2375840" cy="457200"/>
-          </a:xfrm>
-          <a:prstGeom prst="rect">
-            <a:avLst/>
-          </a:prstGeom>
-          <a:noFill/>
-          <a:ln/>
-        </p:spPr>
-        <p:txBody>
-          <a:bodyPr wrap="square" lIns="0" tIns="0" rIns="0" bIns="0" rtlCol="0" anchor="ctr"/>
-          <a:lstStyle/>
-          <a:p>
-            <a:pPr algn="ctr" indent="0" marL="0">
-              <a:buNone/>
-            </a:pPr>
-            <a:r>
-              <a:rPr lang="en-US" sz="1250" dirty="0">
+              <a:t>Three honest confirmation tiers</a:t>
+            </a:r>
+            <a:endParaRPr lang="en-US" sz="1600" dirty="0"/>
+          </a:p>
+        </p:txBody>
+      </p:sp>
+      <p:sp>
+        <p:nvSpPr>
+          <p:cNvPr id="24" name="Text 18"/>
+          <p:cNvSpPr txBox="1"/>
+          <p:nvPr/>
+        </p:nvSpPr>
+        <p:spPr>
+          <a:xfrm>
+            <a:off x="7150608" y="4453128"/>
+            <a:ext cx="4224528" cy="731520"/>
+          </a:xfrm>
+          <a:prstGeom prst="rect">
+            <a:avLst/>
+          </a:prstGeom>
+          <a:noFill/>
+          <a:ln/>
+        </p:spPr>
+        <p:txBody>
+          <a:bodyPr wrap="square" lIns="0" tIns="0" rIns="0" bIns="0" rtlCol="0" anchor="ctr"/>
+          <a:lstStyle/>
+          <a:p>
+            <a:pPr indent="0" marL="0">
+              <a:lnSpc>
+                <a:spcPct val="108000"/>
+              </a:lnSpc>
+              <a:buNone/>
+            </a:pPr>
+            <a:r>
+              <a:rPr lang="en-US" sz="1230" dirty="0">
                 <a:solidFill>
                   <a:srgbClr val="9BA79B"/>
                 </a:solidFill>
@@ -9214,142 +10520,15 @@
                 <a:ea typeface="Calibri" pitchFamily="34" charset="-122"/>
                 <a:cs typeface="Calibri" pitchFamily="34" charset="-120"/>
               </a:rPr>
-              <a:t>template families</a:t>
-            </a:r>
-            <a:endParaRPr lang="en-US" sz="1250" dirty="0"/>
-          </a:p>
-        </p:txBody>
-      </p:sp>
-      <p:sp>
-        <p:nvSpPr>
-          <p:cNvPr id="16" name="Shape 14"/>
-          <p:cNvSpPr/>
-          <p:nvPr/>
-        </p:nvSpPr>
-        <p:spPr>
-          <a:xfrm>
-            <a:off x="566928" y="4160520"/>
-            <a:ext cx="11057839" cy="1600200"/>
-          </a:xfrm>
-          <a:prstGeom prst="roundRect">
-            <a:avLst>
-              <a:gd name="adj" fmla="val 6286"/>
-            </a:avLst>
-          </a:prstGeom>
-          <a:solidFill>
-            <a:srgbClr val="0C231C"/>
-          </a:solidFill>
-          <a:ln w="12700">
-            <a:solidFill>
-              <a:srgbClr val="2A4034"/>
-            </a:solidFill>
-            <a:prstDash val="solid"/>
-          </a:ln>
-          <a:effectLst>
-            <a:outerShdw sx="100000" sy="100000" kx="0" ky="0" algn="bl" rotWithShape="0" blurRad="127000" dist="50800" dir="5400000">
-              <a:srgbClr val="000000">
-                <a:alpha val="35000"/>
-              </a:srgbClr>
-            </a:outerShdw>
-          </a:effectLst>
-        </p:spPr>
-      </p:sp>
-      <p:sp>
-        <p:nvSpPr>
-          <p:cNvPr id="17" name="Text 15"/>
-          <p:cNvSpPr txBox="1"/>
-          <p:nvPr/>
-        </p:nvSpPr>
-        <p:spPr>
-          <a:xfrm>
-            <a:off x="886968" y="4389120"/>
-            <a:ext cx="10417759" cy="1143000"/>
-          </a:xfrm>
-          <a:prstGeom prst="rect">
-            <a:avLst/>
-          </a:prstGeom>
-          <a:noFill/>
-          <a:ln/>
-        </p:spPr>
-        <p:txBody>
-          <a:bodyPr wrap="square" lIns="0" tIns="0" rIns="0" bIns="0" rtlCol="0" anchor="ctr"/>
-          <a:lstStyle/>
-          <a:p>
-            <a:pPr indent="0" marL="0">
-              <a:lnSpc>
-                <a:spcPct val="115000"/>
-              </a:lnSpc>
-              <a:buNone/>
-            </a:pPr>
-            <a:r>
-              <a:rPr lang="en-US" sz="1450" b="1" dirty="0">
-                <a:solidFill>
-                  <a:srgbClr val="F2B944"/>
-                </a:solidFill>
-                <a:latin typeface="Calibri" pitchFamily="34" charset="0"/>
-                <a:ea typeface="Calibri" pitchFamily="34" charset="-122"/>
-                <a:cs typeface="Calibri" pitchFamily="34" charset="-120"/>
-              </a:rPr>
-              <a:t>6 hand-tuned LIVE packs today</a:t>
-            </a:r>
-            <a:pPr indent="0" marL="0">
-              <a:lnSpc>
-                <a:spcPct val="115000"/>
-              </a:lnSpc>
-              <a:buNone/>
-            </a:pPr>
-            <a:r>
-              <a:rPr lang="en-US" sz="1450" dirty="0">
-                <a:solidFill>
-                  <a:srgbClr val="E9E4D5"/>
-                </a:solidFill>
-                <a:latin typeface="Calibri" pitchFamily="34" charset="0"/>
-                <a:ea typeface="Calibri" pitchFamily="34" charset="-122"/>
-                <a:cs typeface="Calibri" pitchFamily="34" charset="-120"/>
-              </a:rPr>
-              <a:t>  and climbing — auto-verify, hands-free. Every other operator is </a:t>
-            </a:r>
-            <a:pPr indent="0" marL="0">
-              <a:lnSpc>
-                <a:spcPct val="115000"/>
-              </a:lnSpc>
-              <a:buNone/>
-            </a:pPr>
-            <a:r>
-              <a:rPr lang="en-US" sz="1450" b="1" dirty="0">
-                <a:solidFill>
-                  <a:srgbClr val="F2B944"/>
-                </a:solidFill>
-                <a:latin typeface="Calibri" pitchFamily="34" charset="0"/>
-                <a:ea typeface="Calibri" pitchFamily="34" charset="-122"/>
-                <a:cs typeface="Calibri" pitchFamily="34" charset="-120"/>
-              </a:rPr>
-              <a:t>template-ready</a:t>
-            </a:r>
-            <a:pPr indent="0" marL="0">
-              <a:lnSpc>
-                <a:spcPct val="115000"/>
-              </a:lnSpc>
-              <a:buNone/>
-            </a:pPr>
-            <a:r>
-              <a:rPr lang="en-US" sz="1450" dirty="0">
-                <a:solidFill>
-                  <a:srgbClr val="E9E4D5"/>
-                </a:solidFill>
-                <a:latin typeface="Calibri" pitchFamily="34" charset="0"/>
-                <a:ea typeface="Calibri" pitchFamily="34" charset="-122"/>
-                <a:cs typeface="Calibri" pitchFamily="34" charset="-120"/>
-              </a:rPr>
-              <a:t>: a multilingual generic parser already structures its SMS at a lower trust band until a precise pack ships. Nothing is claimed as fully supported when it isn’t — and no operator API is ever required.</a:t>
-            </a:r>
-            <a:endParaRPr lang="en-US" sz="1450" dirty="0"/>
-          </a:p>
-        </p:txBody>
-      </p:sp>
-      <p:sp>
-        <p:nvSpPr>
-          <p:cNvPr id="18" name="Text 16"/>
+              <a:t>Every receipt says how strongly it’s proven — self-reported, device-anchored, or operator cross-confirmed.</a:t>
+            </a:r>
+            <a:endParaRPr lang="en-US" sz="1230" dirty="0"/>
+          </a:p>
+        </p:txBody>
+      </p:sp>
+      <p:sp>
+        <p:nvSpPr>
+          <p:cNvPr id="25" name="Text 19"/>
           <p:cNvSpPr txBox="1"/>
           <p:nvPr/>
         </p:nvSpPr>
@@ -9414,7 +10593,7 @@
     <p:bg>
       <p:bgPr>
         <a:solidFill>
-          <a:srgbClr val="0C231C"/>
+          <a:srgbClr val="F5EFDF"/>
         </a:solidFill>
       </p:bgPr>
     </p:bg>
@@ -9441,7 +10620,7 @@
         <p:spPr>
           <a:xfrm>
             <a:off x="566928" y="640080"/>
-            <a:ext cx="7315200" cy="274320"/>
+            <a:ext cx="9144000" cy="274320"/>
           </a:xfrm>
           <a:prstGeom prst="rect">
             <a:avLst/>
@@ -9465,7 +10644,7 @@
                 <a:ea typeface="Courier New" pitchFamily="34" charset="-122"/>
                 <a:cs typeface="Courier New" pitchFamily="34" charset="-120"/>
               </a:rPr>
-              <a:t>THE MODEL</a:t>
+              <a:t>WHAT KODA IS — AND ISN’T</a:t>
             </a:r>
             <a:endParaRPr lang="en-US" sz="1150" dirty="0"/>
           </a:p>
@@ -9480,7 +10659,7 @@
         <p:spPr>
           <a:xfrm>
             <a:off x="566928" y="960120"/>
-            <a:ext cx="10972800" cy="640080"/>
+            <a:ext cx="11155680" cy="822960"/>
           </a:xfrm>
           <a:prstGeom prst="rect">
             <a:avLst/>
@@ -9498,13 +10677,13 @@
             <a:r>
               <a:rPr lang="en-US" sz="3200" b="1" dirty="0">
                 <a:solidFill>
-                  <a:srgbClr val="E9E4D5"/>
+                  <a:srgbClr val="081813"/>
                 </a:solidFill>
                 <a:latin typeface="Arial" pitchFamily="34" charset="0"/>
                 <a:ea typeface="Arial" pitchFamily="34" charset="-122"/>
                 <a:cs typeface="Arial" pitchFamily="34" charset="-120"/>
               </a:rPr>
-              <a:t>Free until your merchant actually gets paid.</a:t>
+              <a:t>We verify your payments. We never touch your money.</a:t>
             </a:r>
             <a:endParaRPr lang="en-US" sz="3200" dirty="0"/>
           </a:p>
@@ -9519,989 +10698,119 @@
         <p:spPr>
           <a:xfrm>
             <a:off x="566928" y="2148840"/>
-            <a:ext cx="1660093" cy="2148840"/>
+            <a:ext cx="5349240" cy="1965960"/>
           </a:xfrm>
           <a:prstGeom prst="roundRect">
             <a:avLst>
-              <a:gd name="adj" fmla="val 6059"/>
+              <a:gd name="adj" fmla="val 4651"/>
             </a:avLst>
           </a:prstGeom>
           <a:solidFill>
-            <a:srgbClr val="123027"/>
+            <a:srgbClr val="FFFFFF"/>
           </a:solidFill>
           <a:ln w="12700">
             <a:solidFill>
-              <a:srgbClr val="2A4034"/>
+              <a:srgbClr val="E4DCC6"/>
             </a:solidFill>
             <a:prstDash val="solid"/>
           </a:ln>
-          <a:effectLst>
-            <a:outerShdw sx="100000" sy="100000" kx="0" ky="0" algn="bl" rotWithShape="0" blurRad="127000" dist="50800" dir="5400000">
-              <a:srgbClr val="000000">
-                <a:alpha val="35000"/>
-              </a:srgbClr>
-            </a:outerShdw>
-          </a:effectLst>
-        </p:spPr>
-      </p:sp>
-      <p:sp>
-        <p:nvSpPr>
-          <p:cNvPr id="5" name="Text 3"/>
-          <p:cNvSpPr txBox="1"/>
-          <p:nvPr/>
-        </p:nvSpPr>
-        <p:spPr>
-          <a:xfrm>
-            <a:off x="658368" y="2368296"/>
-            <a:ext cx="1477213" cy="365760"/>
-          </a:xfrm>
-          <a:prstGeom prst="rect">
-            <a:avLst/>
-          </a:prstGeom>
-          <a:noFill/>
-          <a:ln/>
-        </p:spPr>
-        <p:txBody>
-          <a:bodyPr wrap="square" lIns="0" tIns="0" rIns="0" bIns="0" rtlCol="0" anchor="ctr"/>
-          <a:lstStyle/>
-          <a:p>
-            <a:pPr algn="ctr" indent="0" marL="0">
-              <a:buNone/>
-            </a:pPr>
-            <a:r>
-              <a:rPr lang="en-US" sz="1400" b="1" dirty="0">
-                <a:solidFill>
-                  <a:srgbClr val="E9E4D5"/>
+        </p:spPr>
+      </p:sp>
+      <p:sp>
+        <p:nvSpPr>
+          <p:cNvPr id="5" name="Shape 3"/>
+          <p:cNvSpPr/>
+          <p:nvPr/>
+        </p:nvSpPr>
+        <p:spPr>
+          <a:xfrm>
+            <a:off x="841248" y="2395728"/>
+            <a:ext cx="548640" cy="548640"/>
+          </a:xfrm>
+          <a:prstGeom prst="roundRect">
+            <a:avLst>
+              <a:gd name="adj" fmla="val 16667"/>
+            </a:avLst>
+          </a:prstGeom>
+          <a:solidFill>
+            <a:srgbClr val="081813"/>
+          </a:solidFill>
+          <a:ln/>
+        </p:spPr>
+      </p:sp>
+      <p:pic>
+        <p:nvPicPr>
+          <p:cNvPr id="6" name="Image 0" descr="preencoded.png">    </p:cNvPr>
+          <p:cNvPicPr>
+            <a:picLocks noChangeAspect="1"/>
+          </p:cNvPicPr>
+          <p:nvPr/>
+        </p:nvPicPr>
+        <p:blipFill>
+          <a:blip r:embed="rId1"/>
+          <a:stretch>
+            <a:fillRect/>
+          </a:stretch>
+        </p:blipFill>
+        <p:spPr>
+          <a:xfrm>
+            <a:off x="950976" y="2505456"/>
+            <a:ext cx="329184" cy="329184"/>
+          </a:xfrm>
+          <a:prstGeom prst="rect">
+            <a:avLst/>
+          </a:prstGeom>
+        </p:spPr>
+      </p:pic>
+      <p:sp>
+        <p:nvSpPr>
+          <p:cNvPr id="7" name="Text 4"/>
+          <p:cNvSpPr txBox="1"/>
+          <p:nvPr/>
+        </p:nvSpPr>
+        <p:spPr>
+          <a:xfrm>
+            <a:off x="1572768" y="2450592"/>
+            <a:ext cx="4114800" cy="365760"/>
+          </a:xfrm>
+          <a:prstGeom prst="rect">
+            <a:avLst/>
+          </a:prstGeom>
+          <a:noFill/>
+          <a:ln/>
+        </p:spPr>
+        <p:txBody>
+          <a:bodyPr wrap="square" lIns="0" tIns="0" rIns="0" bIns="0" rtlCol="0" anchor="ctr"/>
+          <a:lstStyle/>
+          <a:p>
+            <a:pPr indent="0" marL="0">
+              <a:buNone/>
+            </a:pPr>
+            <a:r>
+              <a:rPr lang="en-US" sz="1700" b="1" dirty="0">
+                <a:solidFill>
+                  <a:srgbClr val="081813"/>
                 </a:solidFill>
                 <a:latin typeface="Arial" pitchFamily="34" charset="0"/>
                 <a:ea typeface="Arial" pitchFamily="34" charset="-122"/>
                 <a:cs typeface="Arial" pitchFamily="34" charset="-120"/>
               </a:rPr>
-              <a:t>Marché</a:t>
-            </a:r>
-            <a:endParaRPr lang="en-US" sz="1400" dirty="0"/>
-          </a:p>
-        </p:txBody>
-      </p:sp>
-      <p:sp>
-        <p:nvSpPr>
-          <p:cNvPr id="6" name="Text 4"/>
-          <p:cNvSpPr txBox="1"/>
-          <p:nvPr/>
-        </p:nvSpPr>
-        <p:spPr>
-          <a:xfrm>
-            <a:off x="612648" y="2834640"/>
-            <a:ext cx="1568653" cy="640080"/>
-          </a:xfrm>
-          <a:prstGeom prst="rect">
-            <a:avLst/>
-          </a:prstGeom>
-          <a:noFill/>
-          <a:ln/>
-        </p:spPr>
-        <p:txBody>
-          <a:bodyPr wrap="square" lIns="0" tIns="0" rIns="0" bIns="0" rtlCol="0" anchor="ctr"/>
-          <a:lstStyle/>
-          <a:p>
-            <a:pPr algn="ctr" indent="0" marL="0">
-              <a:buNone/>
-            </a:pPr>
-            <a:r>
-              <a:rPr lang="en-US" sz="2700" b="1" dirty="0">
-                <a:solidFill>
-                  <a:srgbClr val="E8A11F"/>
-                </a:solidFill>
-                <a:latin typeface="Arial" pitchFamily="34" charset="0"/>
-                <a:ea typeface="Arial" pitchFamily="34" charset="-122"/>
-                <a:cs typeface="Arial" pitchFamily="34" charset="-120"/>
-              </a:rPr>
-              <a:t>$0</a:t>
-            </a:r>
-            <a:endParaRPr lang="en-US" sz="2700" dirty="0"/>
-          </a:p>
-        </p:txBody>
-      </p:sp>
-      <p:sp>
-        <p:nvSpPr>
-          <p:cNvPr id="7" name="Text 5"/>
-          <p:cNvSpPr txBox="1"/>
-          <p:nvPr/>
-        </p:nvSpPr>
-        <p:spPr>
-          <a:xfrm>
-            <a:off x="640080" y="3566160"/>
-            <a:ext cx="1513789" cy="594360"/>
-          </a:xfrm>
-          <a:prstGeom prst="rect">
-            <a:avLst/>
-          </a:prstGeom>
-          <a:noFill/>
-          <a:ln/>
-        </p:spPr>
-        <p:txBody>
-          <a:bodyPr wrap="square" lIns="0" tIns="0" rIns="0" bIns="0" rtlCol="0" anchor="ctr"/>
-          <a:lstStyle/>
-          <a:p>
-            <a:pPr algn="ctr" indent="0" marL="0">
-              <a:lnSpc>
-                <a:spcPct val="105000"/>
-              </a:lnSpc>
-              <a:buNone/>
-            </a:pPr>
-            <a:r>
-              <a:rPr lang="en-US" sz="1050" dirty="0">
-                <a:solidFill>
-                  <a:srgbClr val="9BA79B"/>
-                </a:solidFill>
-                <a:latin typeface="Calibri" pitchFamily="34" charset="0"/>
-                <a:ea typeface="Calibri" pitchFamily="34" charset="-122"/>
-                <a:cs typeface="Calibri" pitchFamily="34" charset="-120"/>
-              </a:rPr>
-              <a:t>10 / mo · forever</a:t>
-            </a:r>
-            <a:endParaRPr lang="en-US" sz="1050" dirty="0"/>
-          </a:p>
-        </p:txBody>
-      </p:sp>
-      <p:sp>
-        <p:nvSpPr>
-          <p:cNvPr id="8" name="Shape 6"/>
-          <p:cNvSpPr/>
-          <p:nvPr/>
-        </p:nvSpPr>
-        <p:spPr>
-          <a:xfrm>
-            <a:off x="2446477" y="2148840"/>
-            <a:ext cx="1660093" cy="2148840"/>
-          </a:xfrm>
-          <a:prstGeom prst="roundRect">
-            <a:avLst>
-              <a:gd name="adj" fmla="val 6059"/>
-            </a:avLst>
-          </a:prstGeom>
-          <a:solidFill>
-            <a:srgbClr val="123027"/>
-          </a:solidFill>
-          <a:ln w="12700">
-            <a:solidFill>
-              <a:srgbClr val="2A4034"/>
-            </a:solidFill>
-            <a:prstDash val="solid"/>
-          </a:ln>
-          <a:effectLst>
-            <a:outerShdw sx="100000" sy="100000" kx="0" ky="0" algn="bl" rotWithShape="0" blurRad="127000" dist="50800" dir="5400000">
-              <a:srgbClr val="000000">
-                <a:alpha val="35000"/>
-              </a:srgbClr>
-            </a:outerShdw>
-          </a:effectLst>
-        </p:spPr>
-      </p:sp>
-      <p:sp>
-        <p:nvSpPr>
-          <p:cNvPr id="9" name="Text 7"/>
-          <p:cNvSpPr txBox="1"/>
-          <p:nvPr/>
-        </p:nvSpPr>
-        <p:spPr>
-          <a:xfrm>
-            <a:off x="2537917" y="2368296"/>
-            <a:ext cx="1477213" cy="365760"/>
-          </a:xfrm>
-          <a:prstGeom prst="rect">
-            <a:avLst/>
-          </a:prstGeom>
-          <a:noFill/>
-          <a:ln/>
-        </p:spPr>
-        <p:txBody>
-          <a:bodyPr wrap="square" lIns="0" tIns="0" rIns="0" bIns="0" rtlCol="0" anchor="ctr"/>
-          <a:lstStyle/>
-          <a:p>
-            <a:pPr algn="ctr" indent="0" marL="0">
-              <a:buNone/>
-            </a:pPr>
-            <a:r>
-              <a:rPr lang="en-US" sz="1400" b="1" dirty="0">
-                <a:solidFill>
-                  <a:srgbClr val="E9E4D5"/>
-                </a:solidFill>
-                <a:latin typeface="Arial" pitchFamily="34" charset="0"/>
-                <a:ea typeface="Arial" pitchFamily="34" charset="-122"/>
-                <a:cs typeface="Arial" pitchFamily="34" charset="-120"/>
-              </a:rPr>
-              <a:t>Boutique</a:t>
-            </a:r>
-            <a:endParaRPr lang="en-US" sz="1400" dirty="0"/>
-          </a:p>
-        </p:txBody>
-      </p:sp>
-      <p:sp>
-        <p:nvSpPr>
-          <p:cNvPr id="10" name="Text 8"/>
-          <p:cNvSpPr txBox="1"/>
-          <p:nvPr/>
-        </p:nvSpPr>
-        <p:spPr>
-          <a:xfrm>
-            <a:off x="2492197" y="2834640"/>
-            <a:ext cx="1568653" cy="640080"/>
-          </a:xfrm>
-          <a:prstGeom prst="rect">
-            <a:avLst/>
-          </a:prstGeom>
-          <a:noFill/>
-          <a:ln/>
-        </p:spPr>
-        <p:txBody>
-          <a:bodyPr wrap="square" lIns="0" tIns="0" rIns="0" bIns="0" rtlCol="0" anchor="ctr"/>
-          <a:lstStyle/>
-          <a:p>
-            <a:pPr algn="ctr" indent="0" marL="0">
-              <a:buNone/>
-            </a:pPr>
-            <a:r>
-              <a:rPr lang="en-US" sz="2700" b="1" dirty="0">
-                <a:solidFill>
-                  <a:srgbClr val="E8A11F"/>
-                </a:solidFill>
-                <a:latin typeface="Arial" pitchFamily="34" charset="0"/>
-                <a:ea typeface="Arial" pitchFamily="34" charset="-122"/>
-                <a:cs typeface="Arial" pitchFamily="34" charset="-120"/>
-              </a:rPr>
-              <a:t>$5</a:t>
-            </a:r>
-            <a:endParaRPr lang="en-US" sz="2700" dirty="0"/>
-          </a:p>
-        </p:txBody>
-      </p:sp>
-      <p:sp>
-        <p:nvSpPr>
-          <p:cNvPr id="11" name="Text 9"/>
-          <p:cNvSpPr txBox="1"/>
-          <p:nvPr/>
-        </p:nvSpPr>
-        <p:spPr>
-          <a:xfrm>
-            <a:off x="2519629" y="3566160"/>
-            <a:ext cx="1513789" cy="594360"/>
-          </a:xfrm>
-          <a:prstGeom prst="rect">
-            <a:avLst/>
-          </a:prstGeom>
-          <a:noFill/>
-          <a:ln/>
-        </p:spPr>
-        <p:txBody>
-          <a:bodyPr wrap="square" lIns="0" tIns="0" rIns="0" bIns="0" rtlCol="0" anchor="ctr"/>
-          <a:lstStyle/>
-          <a:p>
-            <a:pPr algn="ctr" indent="0" marL="0">
-              <a:lnSpc>
-                <a:spcPct val="105000"/>
-              </a:lnSpc>
-              <a:buNone/>
-            </a:pPr>
-            <a:r>
-              <a:rPr lang="en-US" sz="1050" dirty="0">
-                <a:solidFill>
-                  <a:srgbClr val="9BA79B"/>
-                </a:solidFill>
-                <a:latin typeface="Calibri" pitchFamily="34" charset="0"/>
-                <a:ea typeface="Calibri" pitchFamily="34" charset="-122"/>
-                <a:cs typeface="Calibri" pitchFamily="34" charset="-120"/>
-              </a:rPr>
-              <a:t>190 verifs / mo</a:t>
-            </a:r>
-            <a:endParaRPr lang="en-US" sz="1050" dirty="0"/>
-          </a:p>
-        </p:txBody>
-      </p:sp>
-      <p:sp>
-        <p:nvSpPr>
-          <p:cNvPr id="12" name="Shape 10"/>
-          <p:cNvSpPr/>
-          <p:nvPr/>
-        </p:nvSpPr>
-        <p:spPr>
-          <a:xfrm>
-            <a:off x="4326026" y="2148840"/>
-            <a:ext cx="1660093" cy="2148840"/>
-          </a:xfrm>
-          <a:prstGeom prst="roundRect">
-            <a:avLst>
-              <a:gd name="adj" fmla="val 6059"/>
-            </a:avLst>
-          </a:prstGeom>
-          <a:solidFill>
-            <a:srgbClr val="17392E"/>
-          </a:solidFill>
-          <a:ln w="12700">
-            <a:solidFill>
-              <a:srgbClr val="2A4034"/>
-            </a:solidFill>
-            <a:prstDash val="solid"/>
-          </a:ln>
-          <a:effectLst>
-            <a:outerShdw sx="100000" sy="100000" kx="0" ky="0" algn="bl" rotWithShape="0" blurRad="127000" dist="50800" dir="5400000">
-              <a:srgbClr val="000000">
-                <a:alpha val="35000"/>
-              </a:srgbClr>
-            </a:outerShdw>
-          </a:effectLst>
-        </p:spPr>
-      </p:sp>
-      <p:sp>
-        <p:nvSpPr>
-          <p:cNvPr id="13" name="Shape 11"/>
-          <p:cNvSpPr/>
-          <p:nvPr/>
-        </p:nvSpPr>
-        <p:spPr>
-          <a:xfrm>
-            <a:off x="4326026" y="2148840"/>
-            <a:ext cx="1660093" cy="2148840"/>
-          </a:xfrm>
-          <a:prstGeom prst="roundRect">
-            <a:avLst>
-              <a:gd name="adj" fmla="val 6059"/>
-            </a:avLst>
-          </a:prstGeom>
-          <a:ln w="25400">
-            <a:solidFill>
-              <a:srgbClr val="E8A11F"/>
-            </a:solidFill>
-            <a:prstDash val="solid"/>
-          </a:ln>
-        </p:spPr>
-      </p:sp>
-      <p:sp>
-        <p:nvSpPr>
-          <p:cNvPr id="14" name="Text 12"/>
-          <p:cNvSpPr txBox="1"/>
-          <p:nvPr/>
-        </p:nvSpPr>
-        <p:spPr>
-          <a:xfrm>
-            <a:off x="4417466" y="2368296"/>
-            <a:ext cx="1477213" cy="365760"/>
-          </a:xfrm>
-          <a:prstGeom prst="rect">
-            <a:avLst/>
-          </a:prstGeom>
-          <a:noFill/>
-          <a:ln/>
-        </p:spPr>
-        <p:txBody>
-          <a:bodyPr wrap="square" lIns="0" tIns="0" rIns="0" bIns="0" rtlCol="0" anchor="ctr"/>
-          <a:lstStyle/>
-          <a:p>
-            <a:pPr algn="ctr" indent="0" marL="0">
-              <a:buNone/>
-            </a:pPr>
-            <a:r>
-              <a:rPr lang="en-US" sz="1400" b="1" dirty="0">
-                <a:solidFill>
-                  <a:srgbClr val="E9E4D5"/>
-                </a:solidFill>
-                <a:latin typeface="Arial" pitchFamily="34" charset="0"/>
-                <a:ea typeface="Arial" pitchFamily="34" charset="-122"/>
-                <a:cs typeface="Arial" pitchFamily="34" charset="-120"/>
-              </a:rPr>
-              <a:t>Commerce</a:t>
-            </a:r>
-            <a:endParaRPr lang="en-US" sz="1400" dirty="0"/>
-          </a:p>
-        </p:txBody>
-      </p:sp>
-      <p:sp>
-        <p:nvSpPr>
-          <p:cNvPr id="15" name="Text 13"/>
-          <p:cNvSpPr txBox="1"/>
-          <p:nvPr/>
-        </p:nvSpPr>
-        <p:spPr>
-          <a:xfrm>
-            <a:off x="4371746" y="2834640"/>
-            <a:ext cx="1568653" cy="640080"/>
-          </a:xfrm>
-          <a:prstGeom prst="rect">
-            <a:avLst/>
-          </a:prstGeom>
-          <a:noFill/>
-          <a:ln/>
-        </p:spPr>
-        <p:txBody>
-          <a:bodyPr wrap="square" lIns="0" tIns="0" rIns="0" bIns="0" rtlCol="0" anchor="ctr"/>
-          <a:lstStyle/>
-          <a:p>
-            <a:pPr algn="ctr" indent="0" marL="0">
-              <a:buNone/>
-            </a:pPr>
-            <a:r>
-              <a:rPr lang="en-US" sz="2700" b="1" dirty="0">
-                <a:solidFill>
-                  <a:srgbClr val="E8A11F"/>
-                </a:solidFill>
-                <a:latin typeface="Arial" pitchFamily="34" charset="0"/>
-                <a:ea typeface="Arial" pitchFamily="34" charset="-122"/>
-                <a:cs typeface="Arial" pitchFamily="34" charset="-120"/>
-              </a:rPr>
-              <a:t>$20</a:t>
-            </a:r>
-            <a:endParaRPr lang="en-US" sz="2700" dirty="0"/>
-          </a:p>
-        </p:txBody>
-      </p:sp>
-      <p:sp>
-        <p:nvSpPr>
-          <p:cNvPr id="16" name="Text 14"/>
-          <p:cNvSpPr txBox="1"/>
-          <p:nvPr/>
-        </p:nvSpPr>
-        <p:spPr>
-          <a:xfrm>
-            <a:off x="4399178" y="3566160"/>
-            <a:ext cx="1513789" cy="594360"/>
-          </a:xfrm>
-          <a:prstGeom prst="rect">
-            <a:avLst/>
-          </a:prstGeom>
-          <a:noFill/>
-          <a:ln/>
-        </p:spPr>
-        <p:txBody>
-          <a:bodyPr wrap="square" lIns="0" tIns="0" rIns="0" bIns="0" rtlCol="0" anchor="ctr"/>
-          <a:lstStyle/>
-          <a:p>
-            <a:pPr algn="ctr" indent="0" marL="0">
-              <a:lnSpc>
-                <a:spcPct val="105000"/>
-              </a:lnSpc>
-              <a:buNone/>
-            </a:pPr>
-            <a:r>
-              <a:rPr lang="en-US" sz="1050" dirty="0">
-                <a:solidFill>
-                  <a:srgbClr val="9BA79B"/>
-                </a:solidFill>
-                <a:latin typeface="Calibri" pitchFamily="34" charset="0"/>
-                <a:ea typeface="Calibri" pitchFamily="34" charset="-122"/>
-                <a:cs typeface="Calibri" pitchFamily="34" charset="-120"/>
-              </a:rPr>
-              <a:t>760 verifs / mo</a:t>
-            </a:r>
-            <a:endParaRPr lang="en-US" sz="1050" dirty="0"/>
-          </a:p>
-        </p:txBody>
-      </p:sp>
-      <p:sp>
-        <p:nvSpPr>
-          <p:cNvPr id="17" name="Shape 15"/>
-          <p:cNvSpPr/>
-          <p:nvPr/>
-        </p:nvSpPr>
-        <p:spPr>
-          <a:xfrm>
-            <a:off x="6205576" y="2148840"/>
-            <a:ext cx="1660093" cy="2148840"/>
-          </a:xfrm>
-          <a:prstGeom prst="roundRect">
-            <a:avLst>
-              <a:gd name="adj" fmla="val 6059"/>
-            </a:avLst>
-          </a:prstGeom>
-          <a:solidFill>
-            <a:srgbClr val="123027"/>
-          </a:solidFill>
-          <a:ln w="12700">
-            <a:solidFill>
-              <a:srgbClr val="2A4034"/>
-            </a:solidFill>
-            <a:prstDash val="solid"/>
-          </a:ln>
-          <a:effectLst>
-            <a:outerShdw sx="100000" sy="100000" kx="0" ky="0" algn="bl" rotWithShape="0" blurRad="127000" dist="50800" dir="5400000">
-              <a:srgbClr val="000000">
-                <a:alpha val="35000"/>
-              </a:srgbClr>
-            </a:outerShdw>
-          </a:effectLst>
-        </p:spPr>
-      </p:sp>
-      <p:sp>
-        <p:nvSpPr>
-          <p:cNvPr id="18" name="Text 16"/>
-          <p:cNvSpPr txBox="1"/>
-          <p:nvPr/>
-        </p:nvSpPr>
-        <p:spPr>
-          <a:xfrm>
-            <a:off x="6297016" y="2368296"/>
-            <a:ext cx="1477213" cy="365760"/>
-          </a:xfrm>
-          <a:prstGeom prst="rect">
-            <a:avLst/>
-          </a:prstGeom>
-          <a:noFill/>
-          <a:ln/>
-        </p:spPr>
-        <p:txBody>
-          <a:bodyPr wrap="square" lIns="0" tIns="0" rIns="0" bIns="0" rtlCol="0" anchor="ctr"/>
-          <a:lstStyle/>
-          <a:p>
-            <a:pPr algn="ctr" indent="0" marL="0">
-              <a:buNone/>
-            </a:pPr>
-            <a:r>
-              <a:rPr lang="en-US" sz="1400" b="1" dirty="0">
-                <a:solidFill>
-                  <a:srgbClr val="E9E4D5"/>
-                </a:solidFill>
-                <a:latin typeface="Arial" pitchFamily="34" charset="0"/>
-                <a:ea typeface="Arial" pitchFamily="34" charset="-122"/>
-                <a:cs typeface="Arial" pitchFamily="34" charset="-120"/>
-              </a:rPr>
-              <a:t>Plateforme</a:t>
-            </a:r>
-            <a:endParaRPr lang="en-US" sz="1400" dirty="0"/>
-          </a:p>
-        </p:txBody>
-      </p:sp>
-      <p:sp>
-        <p:nvSpPr>
-          <p:cNvPr id="19" name="Text 17"/>
-          <p:cNvSpPr txBox="1"/>
-          <p:nvPr/>
-        </p:nvSpPr>
-        <p:spPr>
-          <a:xfrm>
-            <a:off x="6251296" y="2834640"/>
-            <a:ext cx="1568653" cy="640080"/>
-          </a:xfrm>
-          <a:prstGeom prst="rect">
-            <a:avLst/>
-          </a:prstGeom>
-          <a:noFill/>
-          <a:ln/>
-        </p:spPr>
-        <p:txBody>
-          <a:bodyPr wrap="square" lIns="0" tIns="0" rIns="0" bIns="0" rtlCol="0" anchor="ctr"/>
-          <a:lstStyle/>
-          <a:p>
-            <a:pPr algn="ctr" indent="0" marL="0">
-              <a:buNone/>
-            </a:pPr>
-            <a:r>
-              <a:rPr lang="en-US" sz="2700" b="1" dirty="0">
-                <a:solidFill>
-                  <a:srgbClr val="E8A11F"/>
-                </a:solidFill>
-                <a:latin typeface="Arial" pitchFamily="34" charset="0"/>
-                <a:ea typeface="Arial" pitchFamily="34" charset="-122"/>
-                <a:cs typeface="Arial" pitchFamily="34" charset="-120"/>
-              </a:rPr>
-              <a:t>$100</a:t>
-            </a:r>
-            <a:endParaRPr lang="en-US" sz="2700" dirty="0"/>
-          </a:p>
-        </p:txBody>
-      </p:sp>
-      <p:sp>
-        <p:nvSpPr>
-          <p:cNvPr id="20" name="Text 18"/>
-          <p:cNvSpPr txBox="1"/>
-          <p:nvPr/>
-        </p:nvSpPr>
-        <p:spPr>
-          <a:xfrm>
-            <a:off x="6278728" y="3566160"/>
-            <a:ext cx="1513789" cy="594360"/>
-          </a:xfrm>
-          <a:prstGeom prst="rect">
-            <a:avLst/>
-          </a:prstGeom>
-          <a:noFill/>
-          <a:ln/>
-        </p:spPr>
-        <p:txBody>
-          <a:bodyPr wrap="square" lIns="0" tIns="0" rIns="0" bIns="0" rtlCol="0" anchor="ctr"/>
-          <a:lstStyle/>
-          <a:p>
-            <a:pPr algn="ctr" indent="0" marL="0">
-              <a:lnSpc>
-                <a:spcPct val="105000"/>
-              </a:lnSpc>
-              <a:buNone/>
-            </a:pPr>
-            <a:r>
-              <a:rPr lang="en-US" sz="1050" dirty="0">
-                <a:solidFill>
-                  <a:srgbClr val="9BA79B"/>
-                </a:solidFill>
-                <a:latin typeface="Calibri" pitchFamily="34" charset="0"/>
-                <a:ea typeface="Calibri" pitchFamily="34" charset="-122"/>
-                <a:cs typeface="Calibri" pitchFamily="34" charset="-120"/>
-              </a:rPr>
-              <a:t>3,800 / mo</a:t>
-            </a:r>
-            <a:endParaRPr lang="en-US" sz="1050" dirty="0"/>
-          </a:p>
-        </p:txBody>
-      </p:sp>
-      <p:sp>
-        <p:nvSpPr>
-          <p:cNvPr id="21" name="Shape 19"/>
-          <p:cNvSpPr/>
-          <p:nvPr/>
-        </p:nvSpPr>
-        <p:spPr>
-          <a:xfrm>
-            <a:off x="8085125" y="2148840"/>
-            <a:ext cx="1660093" cy="2148840"/>
-          </a:xfrm>
-          <a:prstGeom prst="roundRect">
-            <a:avLst>
-              <a:gd name="adj" fmla="val 6059"/>
-            </a:avLst>
-          </a:prstGeom>
-          <a:solidFill>
-            <a:srgbClr val="123027"/>
-          </a:solidFill>
-          <a:ln w="12700">
-            <a:solidFill>
-              <a:srgbClr val="2A4034"/>
-            </a:solidFill>
-            <a:prstDash val="solid"/>
-          </a:ln>
-          <a:effectLst>
-            <a:outerShdw sx="100000" sy="100000" kx="0" ky="0" algn="bl" rotWithShape="0" blurRad="127000" dist="50800" dir="5400000">
-              <a:srgbClr val="000000">
-                <a:alpha val="35000"/>
-              </a:srgbClr>
-            </a:outerShdw>
-          </a:effectLst>
-        </p:spPr>
-      </p:sp>
-      <p:sp>
-        <p:nvSpPr>
-          <p:cNvPr id="22" name="Text 20"/>
-          <p:cNvSpPr txBox="1"/>
-          <p:nvPr/>
-        </p:nvSpPr>
-        <p:spPr>
-          <a:xfrm>
-            <a:off x="8176565" y="2368296"/>
-            <a:ext cx="1477213" cy="365760"/>
-          </a:xfrm>
-          <a:prstGeom prst="rect">
-            <a:avLst/>
-          </a:prstGeom>
-          <a:noFill/>
-          <a:ln/>
-        </p:spPr>
-        <p:txBody>
-          <a:bodyPr wrap="square" lIns="0" tIns="0" rIns="0" bIns="0" rtlCol="0" anchor="ctr"/>
-          <a:lstStyle/>
-          <a:p>
-            <a:pPr algn="ctr" indent="0" marL="0">
-              <a:buNone/>
-            </a:pPr>
-            <a:r>
-              <a:rPr lang="en-US" sz="1400" b="1" dirty="0">
-                <a:solidFill>
-                  <a:srgbClr val="E9E4D5"/>
-                </a:solidFill>
-                <a:latin typeface="Arial" pitchFamily="34" charset="0"/>
-                <a:ea typeface="Arial" pitchFamily="34" charset="-122"/>
-                <a:cs typeface="Arial" pitchFamily="34" charset="-120"/>
-              </a:rPr>
-              <a:t>Scale</a:t>
-            </a:r>
-            <a:endParaRPr lang="en-US" sz="1400" dirty="0"/>
-          </a:p>
-        </p:txBody>
-      </p:sp>
-      <p:sp>
-        <p:nvSpPr>
-          <p:cNvPr id="23" name="Text 21"/>
-          <p:cNvSpPr txBox="1"/>
-          <p:nvPr/>
-        </p:nvSpPr>
-        <p:spPr>
-          <a:xfrm>
-            <a:off x="8130845" y="2834640"/>
-            <a:ext cx="1568653" cy="640080"/>
-          </a:xfrm>
-          <a:prstGeom prst="rect">
-            <a:avLst/>
-          </a:prstGeom>
-          <a:noFill/>
-          <a:ln/>
-        </p:spPr>
-        <p:txBody>
-          <a:bodyPr wrap="square" lIns="0" tIns="0" rIns="0" bIns="0" rtlCol="0" anchor="ctr"/>
-          <a:lstStyle/>
-          <a:p>
-            <a:pPr algn="ctr" indent="0" marL="0">
-              <a:buNone/>
-            </a:pPr>
-            <a:r>
-              <a:rPr lang="en-US" sz="2700" b="1" dirty="0">
-                <a:solidFill>
-                  <a:srgbClr val="E8A11F"/>
-                </a:solidFill>
-                <a:latin typeface="Arial" pitchFamily="34" charset="0"/>
-                <a:ea typeface="Arial" pitchFamily="34" charset="-122"/>
-                <a:cs typeface="Arial" pitchFamily="34" charset="-120"/>
-              </a:rPr>
-              <a:t>$399</a:t>
-            </a:r>
-            <a:endParaRPr lang="en-US" sz="2700" dirty="0"/>
-          </a:p>
-        </p:txBody>
-      </p:sp>
-      <p:sp>
-        <p:nvSpPr>
-          <p:cNvPr id="24" name="Text 22"/>
-          <p:cNvSpPr txBox="1"/>
-          <p:nvPr/>
-        </p:nvSpPr>
-        <p:spPr>
-          <a:xfrm>
-            <a:off x="8158277" y="3566160"/>
-            <a:ext cx="1513789" cy="594360"/>
-          </a:xfrm>
-          <a:prstGeom prst="rect">
-            <a:avLst/>
-          </a:prstGeom>
-          <a:noFill/>
-          <a:ln/>
-        </p:spPr>
-        <p:txBody>
-          <a:bodyPr wrap="square" lIns="0" tIns="0" rIns="0" bIns="0" rtlCol="0" anchor="ctr"/>
-          <a:lstStyle/>
-          <a:p>
-            <a:pPr algn="ctr" indent="0" marL="0">
-              <a:lnSpc>
-                <a:spcPct val="105000"/>
-              </a:lnSpc>
-              <a:buNone/>
-            </a:pPr>
-            <a:r>
-              <a:rPr lang="en-US" sz="1050" dirty="0">
-                <a:solidFill>
-                  <a:srgbClr val="9BA79B"/>
-                </a:solidFill>
-                <a:latin typeface="Calibri" pitchFamily="34" charset="0"/>
-                <a:ea typeface="Calibri" pitchFamily="34" charset="-122"/>
-                <a:cs typeface="Calibri" pitchFamily="34" charset="-120"/>
-              </a:rPr>
-              <a:t>15,200 / mo</a:t>
-            </a:r>
-            <a:endParaRPr lang="en-US" sz="1050" dirty="0"/>
-          </a:p>
-        </p:txBody>
-      </p:sp>
-      <p:sp>
-        <p:nvSpPr>
-          <p:cNvPr id="25" name="Shape 23"/>
-          <p:cNvSpPr/>
-          <p:nvPr/>
-        </p:nvSpPr>
-        <p:spPr>
-          <a:xfrm>
-            <a:off x="9964674" y="2148840"/>
-            <a:ext cx="1660093" cy="2148840"/>
-          </a:xfrm>
-          <a:prstGeom prst="roundRect">
-            <a:avLst>
-              <a:gd name="adj" fmla="val 6059"/>
-            </a:avLst>
-          </a:prstGeom>
-          <a:solidFill>
-            <a:srgbClr val="123027"/>
-          </a:solidFill>
-          <a:ln w="12700">
-            <a:solidFill>
-              <a:srgbClr val="2A4034"/>
-            </a:solidFill>
-            <a:prstDash val="solid"/>
-          </a:ln>
-          <a:effectLst>
-            <a:outerShdw sx="100000" sy="100000" kx="0" ky="0" algn="bl" rotWithShape="0" blurRad="127000" dist="50800" dir="5400000">
-              <a:srgbClr val="000000">
-                <a:alpha val="35000"/>
-              </a:srgbClr>
-            </a:outerShdw>
-          </a:effectLst>
-        </p:spPr>
-      </p:sp>
-      <p:sp>
-        <p:nvSpPr>
-          <p:cNvPr id="26" name="Text 24"/>
-          <p:cNvSpPr txBox="1"/>
-          <p:nvPr/>
-        </p:nvSpPr>
-        <p:spPr>
-          <a:xfrm>
-            <a:off x="10056114" y="2368296"/>
-            <a:ext cx="1477213" cy="365760"/>
-          </a:xfrm>
-          <a:prstGeom prst="rect">
-            <a:avLst/>
-          </a:prstGeom>
-          <a:noFill/>
-          <a:ln/>
-        </p:spPr>
-        <p:txBody>
-          <a:bodyPr wrap="square" lIns="0" tIns="0" rIns="0" bIns="0" rtlCol="0" anchor="ctr"/>
-          <a:lstStyle/>
-          <a:p>
-            <a:pPr algn="ctr" indent="0" marL="0">
-              <a:buNone/>
-            </a:pPr>
-            <a:r>
-              <a:rPr lang="en-US" sz="1400" b="1" dirty="0">
-                <a:solidFill>
-                  <a:srgbClr val="E9E4D5"/>
-                </a:solidFill>
-                <a:latin typeface="Arial" pitchFamily="34" charset="0"/>
-                <a:ea typeface="Arial" pitchFamily="34" charset="-122"/>
-                <a:cs typeface="Arial" pitchFamily="34" charset="-120"/>
-              </a:rPr>
-              <a:t>Enterprise</a:t>
-            </a:r>
-            <a:endParaRPr lang="en-US" sz="1400" dirty="0"/>
-          </a:p>
-        </p:txBody>
-      </p:sp>
-      <p:sp>
-        <p:nvSpPr>
-          <p:cNvPr id="27" name="Text 25"/>
-          <p:cNvSpPr txBox="1"/>
-          <p:nvPr/>
-        </p:nvSpPr>
-        <p:spPr>
-          <a:xfrm>
-            <a:off x="10010394" y="2834640"/>
-            <a:ext cx="1568653" cy="640080"/>
-          </a:xfrm>
-          <a:prstGeom prst="rect">
-            <a:avLst/>
-          </a:prstGeom>
-          <a:noFill/>
-          <a:ln/>
-        </p:spPr>
-        <p:txBody>
-          <a:bodyPr wrap="square" lIns="0" tIns="0" rIns="0" bIns="0" rtlCol="0" anchor="ctr"/>
-          <a:lstStyle/>
-          <a:p>
-            <a:pPr algn="ctr" indent="0" marL="0">
-              <a:buNone/>
-            </a:pPr>
-            <a:r>
-              <a:rPr lang="en-US" sz="2700" b="1" dirty="0">
-                <a:solidFill>
-                  <a:srgbClr val="E8A11F"/>
-                </a:solidFill>
-                <a:latin typeface="Arial" pitchFamily="34" charset="0"/>
-                <a:ea typeface="Arial" pitchFamily="34" charset="-122"/>
-                <a:cs typeface="Arial" pitchFamily="34" charset="-120"/>
-              </a:rPr>
-              <a:t>Custom</a:t>
-            </a:r>
-            <a:endParaRPr lang="en-US" sz="2700" dirty="0"/>
-          </a:p>
-        </p:txBody>
-      </p:sp>
-      <p:sp>
-        <p:nvSpPr>
-          <p:cNvPr id="28" name="Text 26"/>
-          <p:cNvSpPr txBox="1"/>
-          <p:nvPr/>
-        </p:nvSpPr>
-        <p:spPr>
-          <a:xfrm>
-            <a:off x="10037826" y="3566160"/>
-            <a:ext cx="1513789" cy="594360"/>
-          </a:xfrm>
-          <a:prstGeom prst="rect">
-            <a:avLst/>
-          </a:prstGeom>
-          <a:noFill/>
-          <a:ln/>
-        </p:spPr>
-        <p:txBody>
-          <a:bodyPr wrap="square" lIns="0" tIns="0" rIns="0" bIns="0" rtlCol="0" anchor="ctr"/>
-          <a:lstStyle/>
-          <a:p>
-            <a:pPr algn="ctr" indent="0" marL="0">
-              <a:lnSpc>
-                <a:spcPct val="105000"/>
-              </a:lnSpc>
-              <a:buNone/>
-            </a:pPr>
-            <a:r>
-              <a:rPr lang="en-US" sz="1050" dirty="0">
-                <a:solidFill>
-                  <a:srgbClr val="9BA79B"/>
-                </a:solidFill>
-                <a:latin typeface="Calibri" pitchFamily="34" charset="0"/>
-                <a:ea typeface="Calibri" pitchFamily="34" charset="-122"/>
-                <a:cs typeface="Calibri" pitchFamily="34" charset="-120"/>
-              </a:rPr>
-              <a:t>committed volume</a:t>
-            </a:r>
-            <a:endParaRPr lang="en-US" sz="1050" dirty="0"/>
-          </a:p>
-        </p:txBody>
-      </p:sp>
-      <p:sp>
-        <p:nvSpPr>
-          <p:cNvPr id="29" name="Shape 27"/>
-          <p:cNvSpPr/>
-          <p:nvPr/>
-        </p:nvSpPr>
-        <p:spPr>
-          <a:xfrm>
-            <a:off x="566928" y="4663440"/>
-            <a:ext cx="11057839" cy="1097280"/>
-          </a:xfrm>
-          <a:prstGeom prst="roundRect">
-            <a:avLst>
-              <a:gd name="adj" fmla="val 9167"/>
-            </a:avLst>
-          </a:prstGeom>
-          <a:solidFill>
-            <a:srgbClr val="081813"/>
-          </a:solidFill>
-          <a:ln w="12700">
-            <a:solidFill>
-              <a:srgbClr val="2A4034"/>
-            </a:solidFill>
-            <a:prstDash val="solid"/>
-          </a:ln>
-          <a:effectLst>
-            <a:outerShdw sx="100000" sy="100000" kx="0" ky="0" algn="bl" rotWithShape="0" blurRad="127000" dist="50800" dir="5400000">
-              <a:srgbClr val="000000">
-                <a:alpha val="35000"/>
-              </a:srgbClr>
-            </a:outerShdw>
-          </a:effectLst>
-        </p:spPr>
-      </p:sp>
-      <p:sp>
-        <p:nvSpPr>
-          <p:cNvPr id="30" name="Text 28"/>
-          <p:cNvSpPr txBox="1"/>
-          <p:nvPr/>
-        </p:nvSpPr>
-        <p:spPr>
-          <a:xfrm>
-            <a:off x="886968" y="4864608"/>
-            <a:ext cx="10417759" cy="731520"/>
+              <a:t>KODA IS</a:t>
+            </a:r>
+            <a:endParaRPr lang="en-US" sz="1700" dirty="0"/>
+          </a:p>
+        </p:txBody>
+      </p:sp>
+      <p:sp>
+        <p:nvSpPr>
+          <p:cNvPr id="8" name="Text 5"/>
+          <p:cNvSpPr txBox="1"/>
+          <p:nvPr/>
+        </p:nvSpPr>
+        <p:spPr>
+          <a:xfrm>
+            <a:off x="859536" y="3063240"/>
+            <a:ext cx="4800600" cy="914400"/>
           </a:xfrm>
           <a:prstGeom prst="rect">
             <a:avLst/>
@@ -10520,16 +10829,153 @@
               <a:buNone/>
             </a:pPr>
             <a:r>
-              <a:rPr lang="en-US" sz="1350" b="1" i="1" dirty="0">
-                <a:solidFill>
-                  <a:srgbClr val="F2B944"/>
+              <a:rPr lang="en-US" sz="1350" dirty="0">
+                <a:solidFill>
+                  <a:srgbClr val="46534A"/>
                 </a:solidFill>
                 <a:latin typeface="Calibri" pitchFamily="34" charset="0"/>
                 <a:ea typeface="Calibri" pitchFamily="34" charset="-122"/>
                 <a:cs typeface="Calibri" pitchFamily="34" charset="-120"/>
               </a:rPr>
-              <a:t>“Pay only when your merchant gets paid.”  </a:t>
-            </a:r>
+              <a:t>A payment VERIFICATION service. It reads the operator’s confirmation, fraud-scores and replay-locks it, and tells you in seconds what’s real.</a:t>
+            </a:r>
+            <a:endParaRPr lang="en-US" sz="1350" dirty="0"/>
+          </a:p>
+        </p:txBody>
+      </p:sp>
+      <p:sp>
+        <p:nvSpPr>
+          <p:cNvPr id="9" name="Shape 6"/>
+          <p:cNvSpPr/>
+          <p:nvPr/>
+        </p:nvSpPr>
+        <p:spPr>
+          <a:xfrm>
+            <a:off x="6281928" y="2148840"/>
+            <a:ext cx="5349240" cy="1965960"/>
+          </a:xfrm>
+          <a:prstGeom prst="roundRect">
+            <a:avLst>
+              <a:gd name="adj" fmla="val 4651"/>
+            </a:avLst>
+          </a:prstGeom>
+          <a:solidFill>
+            <a:srgbClr val="FFFFFF"/>
+          </a:solidFill>
+          <a:ln w="12700">
+            <a:solidFill>
+              <a:srgbClr val="E4DCC6"/>
+            </a:solidFill>
+            <a:prstDash val="solid"/>
+          </a:ln>
+        </p:spPr>
+      </p:sp>
+      <p:sp>
+        <p:nvSpPr>
+          <p:cNvPr id="10" name="Shape 7"/>
+          <p:cNvSpPr/>
+          <p:nvPr/>
+        </p:nvSpPr>
+        <p:spPr>
+          <a:xfrm>
+            <a:off x="6556248" y="2395728"/>
+            <a:ext cx="548640" cy="548640"/>
+          </a:xfrm>
+          <a:prstGeom prst="roundRect">
+            <a:avLst>
+              <a:gd name="adj" fmla="val 16667"/>
+            </a:avLst>
+          </a:prstGeom>
+          <a:solidFill>
+            <a:srgbClr val="EAE1CB"/>
+          </a:solidFill>
+          <a:ln/>
+        </p:spPr>
+      </p:sp>
+      <p:pic>
+        <p:nvPicPr>
+          <p:cNvPr id="11" name="Image 1" descr="preencoded.png">    </p:cNvPr>
+          <p:cNvPicPr>
+            <a:picLocks noChangeAspect="1"/>
+          </p:cNvPicPr>
+          <p:nvPr/>
+        </p:nvPicPr>
+        <p:blipFill>
+          <a:blip r:embed="rId2"/>
+          <a:stretch>
+            <a:fillRect/>
+          </a:stretch>
+        </p:blipFill>
+        <p:spPr>
+          <a:xfrm>
+            <a:off x="6665976" y="2505456"/>
+            <a:ext cx="329184" cy="329184"/>
+          </a:xfrm>
+          <a:prstGeom prst="rect">
+            <a:avLst/>
+          </a:prstGeom>
+        </p:spPr>
+      </p:pic>
+      <p:sp>
+        <p:nvSpPr>
+          <p:cNvPr id="12" name="Text 8"/>
+          <p:cNvSpPr txBox="1"/>
+          <p:nvPr/>
+        </p:nvSpPr>
+        <p:spPr>
+          <a:xfrm>
+            <a:off x="7287768" y="2450592"/>
+            <a:ext cx="4114800" cy="365760"/>
+          </a:xfrm>
+          <a:prstGeom prst="rect">
+            <a:avLst/>
+          </a:prstGeom>
+          <a:noFill/>
+          <a:ln/>
+        </p:spPr>
+        <p:txBody>
+          <a:bodyPr wrap="square" lIns="0" tIns="0" rIns="0" bIns="0" rtlCol="0" anchor="ctr"/>
+          <a:lstStyle/>
+          <a:p>
+            <a:pPr indent="0" marL="0">
+              <a:buNone/>
+            </a:pPr>
+            <a:r>
+              <a:rPr lang="en-US" sz="1700" b="1" dirty="0">
+                <a:solidFill>
+                  <a:srgbClr val="6B7A6E"/>
+                </a:solidFill>
+                <a:latin typeface="Arial" pitchFamily="34" charset="0"/>
+                <a:ea typeface="Arial" pitchFamily="34" charset="-122"/>
+                <a:cs typeface="Arial" pitchFamily="34" charset="-120"/>
+              </a:rPr>
+              <a:t>KODA IS NOT</a:t>
+            </a:r>
+            <a:endParaRPr lang="en-US" sz="1700" dirty="0"/>
+          </a:p>
+        </p:txBody>
+      </p:sp>
+      <p:sp>
+        <p:nvSpPr>
+          <p:cNvPr id="13" name="Text 9"/>
+          <p:cNvSpPr txBox="1"/>
+          <p:nvPr/>
+        </p:nvSpPr>
+        <p:spPr>
+          <a:xfrm>
+            <a:off x="6574536" y="3063240"/>
+            <a:ext cx="4800600" cy="914400"/>
+          </a:xfrm>
+          <a:prstGeom prst="rect">
+            <a:avLst/>
+          </a:prstGeom>
+          <a:noFill/>
+          <a:ln/>
+        </p:spPr>
+        <p:txBody>
+          <a:bodyPr wrap="square" lIns="0" tIns="0" rIns="0" bIns="0" rtlCol="0" anchor="ctr"/>
+          <a:lstStyle/>
+          <a:p>
             <a:pPr indent="0" marL="0">
               <a:lnSpc>
                 <a:spcPct val="112000"/>
@@ -10539,13 +10985,13 @@
             <a:r>
               <a:rPr lang="en-US" sz="1350" dirty="0">
                 <a:solidFill>
-                  <a:srgbClr val="E9E4D5"/>
+                  <a:srgbClr val="46534A"/>
                 </a:solidFill>
                 <a:latin typeface="Calibri" pitchFamily="34" charset="0"/>
                 <a:ea typeface="Calibri" pitchFamily="34" charset="-122"/>
                 <a:cs typeface="Calibri" pitchFamily="34" charset="-120"/>
               </a:rPr>
-              <a:t>Beyond your quota, prepaid ACU — topped up via mobile money and verified by KODA’s own engine — covers overage and AI features. A plan’s included rate always beats pay-as-you-go.</a:t>
+              <a:t>A bank, wallet, payment processor, aggregator, escrow or money transmitter. It never holds, moves or settles funds.</a:t>
             </a:r>
             <a:endParaRPr lang="en-US" sz="1350" dirty="0"/>
           </a:p>
@@ -10553,7 +10999,66 @@
       </p:sp>
       <p:sp>
         <p:nvSpPr>
-          <p:cNvPr id="31" name="Text 29"/>
+          <p:cNvPr id="14" name="Text 10"/>
+          <p:cNvSpPr txBox="1"/>
+          <p:nvPr/>
+        </p:nvSpPr>
+        <p:spPr>
+          <a:xfrm>
+            <a:off x="566928" y="4343400"/>
+            <a:ext cx="11057839" cy="1280160"/>
+          </a:xfrm>
+          <a:prstGeom prst="rect">
+            <a:avLst/>
+          </a:prstGeom>
+          <a:noFill/>
+          <a:ln/>
+        </p:spPr>
+        <p:txBody>
+          <a:bodyPr wrap="square" lIns="0" tIns="0" rIns="0" bIns="0" rtlCol="0" anchor="ctr"/>
+          <a:lstStyle/>
+          <a:p>
+            <a:pPr indent="0" marL="0">
+              <a:lnSpc>
+                <a:spcPct val="118000"/>
+              </a:lnSpc>
+              <a:buNone/>
+            </a:pPr>
+            <a:r>
+              <a:rPr lang="en-US" sz="1300" b="1" dirty="0">
+                <a:solidFill>
+                  <a:srgbClr val="081813"/>
+                </a:solidFill>
+                <a:latin typeface="Calibri" pitchFamily="34" charset="0"/>
+                <a:ea typeface="Calibri" pitchFamily="34" charset="-122"/>
+                <a:cs typeface="Calibri" pitchFamily="34" charset="-120"/>
+              </a:rPr>
+              <a:t>Your money travels directly from customer to you, over the operator’s own network. </a:t>
+            </a:r>
+            <a:pPr indent="0" marL="0">
+              <a:lnSpc>
+                <a:spcPct val="118000"/>
+              </a:lnSpc>
+              <a:buNone/>
+            </a:pPr>
+            <a:r>
+              <a:rPr lang="en-US" sz="1300" dirty="0">
+                <a:solidFill>
+                  <a:srgbClr val="5A6A5E"/>
+                </a:solidFill>
+                <a:latin typeface="Calibri" pitchFamily="34" charset="0"/>
+                <a:ea typeface="Calibri" pitchFamily="34" charset="-122"/>
+                <a:cs typeface="Calibri" pitchFamily="34" charset="-120"/>
+              </a:rPr>
+              <a:t>Verification is based on merchant-side operator confirmations — fraud-scored and replay-protected — but does not guarantee against operator-side reversals or constitute proof of settlement. KODA makes you first to know.</a:t>
+            </a:r>
+            <a:endParaRPr lang="en-US" sz="1300" dirty="0"/>
+          </a:p>
+        </p:txBody>
+      </p:sp>
+      <p:sp>
+        <p:nvSpPr>
+          <p:cNvPr id="15" name="Text 11"/>
           <p:cNvSpPr txBox="1"/>
           <p:nvPr/>
         </p:nvSpPr>
@@ -10572,33 +11077,19 @@
           <a:bodyPr wrap="square" lIns="0" tIns="0" rIns="0" bIns="0" rtlCol="0" anchor="ctr"/>
           <a:lstStyle/>
           <a:p>
-            <a:pPr algn="l" indent="0" marL="0">
-              <a:buNone/>
-            </a:pPr>
-            <a:r>
-              <a:rPr lang="en-US" sz="950" b="1" dirty="0">
-                <a:solidFill>
-                  <a:srgbClr val="E8A11F"/>
+            <a:pPr indent="0" marL="0">
+              <a:buNone/>
+            </a:pPr>
+            <a:r>
+              <a:rPr lang="en-US" sz="950" dirty="0">
+                <a:solidFill>
+                  <a:srgbClr val="8A968C"/>
                 </a:solidFill>
                 <a:latin typeface="Courier New" pitchFamily="34" charset="0"/>
                 <a:ea typeface="Courier New" pitchFamily="34" charset="-122"/>
                 <a:cs typeface="Courier New" pitchFamily="34" charset="-120"/>
               </a:rPr>
-              <a:t>kodajnn.com</a:t>
-            </a:r>
-            <a:pPr algn="l" indent="0" marL="0">
-              <a:buNone/>
-            </a:pPr>
-            <a:r>
-              <a:rPr lang="en-US" sz="950" dirty="0">
-                <a:solidFill>
-                  <a:srgbClr val="9BA79B"/>
-                </a:solidFill>
-                <a:latin typeface="Courier New" pitchFamily="34" charset="0"/>
-                <a:ea typeface="Courier New" pitchFamily="34" charset="-122"/>
-                <a:cs typeface="Courier New" pitchFamily="34" charset="-120"/>
-              </a:rPr>
-              <a:t>   ·   Groupe Nseya Digital  ·  Kinshasa, DR Congo</a:t>
+              <a:t>kodajnn.com   ·   Groupe Nseya Digital  ·  Kinshasa, DR Congo</a:t>
             </a:r>
             <a:endParaRPr lang="en-US" sz="950" dirty="0"/>
           </a:p>
